--- a/Solon_Roadmap_SteerCo_2026.pptx
+++ b/Solon_Roadmap_SteerCo_2026.pptx
@@ -191,7 +191,7 @@
                 <a:lstStyle/>
                 <a:p>
                   <a:pPr>
-                    <a:defRPr sz="900" b="0" i="0" u="none" strike="noStrike">
+                    <a:defRPr sz="1200" b="0" i="0" u="none" strike="noStrike">
                       <a:solidFill>
                         <a:srgbClr val="000000"/>
                       </a:solidFill>
@@ -216,7 +216,7 @@
                 <a:lstStyle/>
                 <a:p>
                   <a:pPr>
-                    <a:defRPr sz="900" b="0" i="0" u="none" strike="noStrike">
+                    <a:defRPr sz="1200" b="0" i="0" u="none" strike="noStrike">
                       <a:solidFill>
                         <a:srgbClr val="000000"/>
                       </a:solidFill>
@@ -241,7 +241,7 @@
                 <a:lstStyle/>
                 <a:p>
                   <a:pPr>
-                    <a:defRPr sz="900" b="0" i="0" u="none" strike="noStrike">
+                    <a:defRPr sz="1200" b="0" i="0" u="none" strike="noStrike">
                       <a:solidFill>
                         <a:srgbClr val="000000"/>
                       </a:solidFill>
@@ -329,28 +329,12 @@
     <c:legend>
       <c:legendPos val="b"/>
       <c:overlay val="0"/>
-      <c:txPr>
-        <a:bodyPr/>
-        <a:lstStyle/>
-        <a:p>
-          <a:pPr>
-            <a:defRPr sz="800">
-              <a:solidFill>
-                <a:srgbClr val="4A5C5A"/>
-              </a:solidFill>
-            </a:defRPr>
-          </a:pPr>
-          <a:endParaRPr lang="en-US"/>
-        </a:p>
-      </c:txPr>
     </c:legend>
     <c:plotVisOnly val="1"/>
     <c:dispBlanksAs val="span"/>
   </c:chart>
   <c:spPr>
-    <a:solidFill>
-      <a:srgbClr val="F4F6F6"/>
-    </a:solidFill>
+    <a:noFill/>
     <a:ln>
       <a:noFill/>
     </a:ln>
@@ -404,7 +388,7 @@
                 <a:pPr>
                   <a:defRPr b="0" i="0" strike="noStrike" sz="700" u="none">
                     <a:solidFill>
-                      <a:srgbClr val="FFFFFF"/>
+                      <a:srgbClr val="000000"/>
                     </a:solidFill>
                     <a:latin typeface="Arial"/>
                   </a:defRPr>
@@ -484,7 +468,7 @@
               <a:pPr>
                 <a:defRPr b="0" i="0" strike="noStrike" sz="700" u="none">
                   <a:solidFill>
-                    <a:srgbClr val="FFFFFF"/>
+                    <a:srgbClr val="000000"/>
                   </a:solidFill>
                   <a:latin typeface="Arial"/>
                 </a:defRPr>
@@ -530,9 +514,9 @@
           <a:lstStyle/>
           <a:p>
             <a:pPr>
-              <a:defRPr sz="700" b="0" i="0" u="none" strike="noStrike">
-                <a:solidFill>
-                  <a:srgbClr val="4A5C5A"/>
+              <a:defRPr sz="1200" b="0" i="0" u="none" strike="noStrike">
+                <a:solidFill>
+                  <a:srgbClr val="000000"/>
                 </a:solidFill>
                 <a:latin typeface="Arial"/>
               </a:defRPr>
@@ -555,9 +539,9 @@
         <c:axPos val="b"/>
         <c:majorGridlines>
           <c:spPr>
-            <a:ln w="6350" cap="flat">
+            <a:ln w="12700" cap="flat">
               <a:solidFill>
-                <a:srgbClr val="E0E8E7"/>
+                <a:srgbClr val="888888"/>
               </a:solidFill>
               <a:prstDash val="solid"/>
               <a:round/>
@@ -582,9 +566,9 @@
           <a:lstStyle/>
           <a:p>
             <a:pPr>
-              <a:defRPr sz="700" b="0" i="0" u="none" strike="noStrike">
-                <a:solidFill>
-                  <a:srgbClr val="4A5C5A"/>
+              <a:defRPr sz="1200" b="0" i="0" u="none" strike="noStrike">
+                <a:solidFill>
+                  <a:srgbClr val="000000"/>
                 </a:solidFill>
                 <a:latin typeface="Arial"/>
               </a:defRPr>
@@ -608,9 +592,7 @@
     <c:dispBlanksAs val="span"/>
   </c:chart>
   <c:spPr>
-    <a:solidFill>
-      <a:srgbClr val="F4F6F6"/>
-    </a:solidFill>
+    <a:noFill/>
     <a:ln>
       <a:noFill/>
     </a:ln>
@@ -692,14 +674,14 @@
           <c:dLbls>
             <c:dLbl>
               <c:idx val="0"/>
-              <c:numFmt formatCode="0%" sourceLinked="0"/>
+              <c:numFmt formatCode="General" sourceLinked="0"/>
               <c:spPr/>
               <c:txPr>
                 <a:bodyPr/>
                 <a:lstStyle/>
                 <a:p>
                   <a:pPr>
-                    <a:defRPr sz="700" b="0" i="0" u="none" strike="noStrike">
+                    <a:defRPr sz="1200" b="0" i="0" u="none" strike="noStrike">
                       <a:solidFill>
                         <a:srgbClr val="000000"/>
                       </a:solidFill>
@@ -712,19 +694,19 @@
               <c:showVal val="0"/>
               <c:showCatName val="0"/>
               <c:showSerName val="0"/>
-              <c:showPercent val="1"/>
+              <c:showPercent val="0"/>
               <c:showBubbleSize val="0"/>
             </c:dLbl>
             <c:dLbl>
               <c:idx val="1"/>
-              <c:numFmt formatCode="0%" sourceLinked="0"/>
+              <c:numFmt formatCode="General" sourceLinked="0"/>
               <c:spPr/>
               <c:txPr>
                 <a:bodyPr/>
                 <a:lstStyle/>
                 <a:p>
                   <a:pPr>
-                    <a:defRPr sz="700" b="0" i="0" u="none" strike="noStrike">
+                    <a:defRPr sz="1200" b="0" i="0" u="none" strike="noStrike">
                       <a:solidFill>
                         <a:srgbClr val="000000"/>
                       </a:solidFill>
@@ -737,19 +719,19 @@
               <c:showVal val="0"/>
               <c:showCatName val="0"/>
               <c:showSerName val="0"/>
-              <c:showPercent val="1"/>
+              <c:showPercent val="0"/>
               <c:showBubbleSize val="0"/>
             </c:dLbl>
             <c:dLbl>
               <c:idx val="2"/>
-              <c:numFmt formatCode="0%" sourceLinked="0"/>
+              <c:numFmt formatCode="General" sourceLinked="0"/>
               <c:spPr/>
               <c:txPr>
                 <a:bodyPr/>
                 <a:lstStyle/>
                 <a:p>
                   <a:pPr>
-                    <a:defRPr sz="700" b="0" i="0" u="none" strike="noStrike">
+                    <a:defRPr sz="1200" b="0" i="0" u="none" strike="noStrike">
                       <a:solidFill>
                         <a:srgbClr val="000000"/>
                       </a:solidFill>
@@ -762,10 +744,10 @@
               <c:showVal val="0"/>
               <c:showCatName val="0"/>
               <c:showSerName val="0"/>
-              <c:showPercent val="1"/>
+              <c:showPercent val="0"/>
               <c:showBubbleSize val="0"/>
             </c:dLbl>
-            <c:numFmt formatCode="0%" sourceLinked="0"/>
+            <c:numFmt formatCode="General" sourceLinked="0"/>
             <c:txPr>
               <a:bodyPr/>
               <a:lstStyle/>
@@ -837,24 +819,12 @@
     <c:legend>
       <c:legendPos val="r"/>
       <c:overlay val="0"/>
-      <c:txPr>
-        <a:bodyPr/>
-        <a:lstStyle/>
-        <a:p>
-          <a:pPr>
-            <a:defRPr sz="700">      </a:defRPr>
-          </a:pPr>
-          <a:endParaRPr lang="en-US"/>
-        </a:p>
-      </c:txPr>
     </c:legend>
     <c:plotVisOnly val="1"/>
     <c:dispBlanksAs val="span"/>
   </c:chart>
   <c:spPr>
-    <a:solidFill>
-      <a:srgbClr val="F4F6F6"/>
-    </a:solidFill>
+    <a:noFill/>
     <a:ln>
       <a:noFill/>
     </a:ln>
@@ -867,250 +837,6 @@
 </file>
 
 <file path=ppt/charts/chart4.xml><?xml version="1.0" encoding="utf-8"?>
-<c:chartSpace xmlns:c="http://schemas.openxmlformats.org/drawingml/2006/chart" xmlns:a="http://schemas.openxmlformats.org/drawingml/2006/main" xmlns:r="http://schemas.openxmlformats.org/officeDocument/2006/relationships">
-  <c:date1904 val="0"/>
-  <c:roundedCorners val="1"/>
-  <c:chart>
-    <c:autoTitleDeleted val="1"/>
-    <c:plotArea>
-      <c:layout/>
-      <c:pieChart>
-        <c:varyColors val="1"/>
-        <c:ser>
-          <c:idx val="0"/>
-          <c:order val="0"/>
-          <c:tx>
-            <c:strRef>
-              <c:f>Sheet1!$B$1</c:f>
-              <c:strCache>
-                <c:ptCount val="1"/>
-                <c:pt idx="0">
-                  <c:v>Requesters</c:v>
-                </c:pt>
-              </c:strCache>
-            </c:strRef>
-          </c:tx>
-          <c:spPr>
-            <a:solidFill>
-              <a:schemeClr val="accent1"/>
-            </a:solidFill>
-            <a:ln w="9525" cap="flat">
-              <a:solidFill>
-                <a:srgbClr val="F9F9F9"/>
-              </a:solidFill>
-              <a:prstDash val="solid"/>
-              <a:round/>
-            </a:ln>
-            <a:effectLst/>
-          </c:spPr>
-          <c:dPt>
-            <c:idx val="0"/>
-            <c:bubble3D val="0"/>
-            <c:spPr>
-              <a:solidFill>
-                <a:srgbClr val="123836"/>
-              </a:solidFill>
-              <a:effectLst/>
-            </c:spPr>
-          </c:dPt>
-          <c:dPt>
-            <c:idx val="1"/>
-            <c:bubble3D val="0"/>
-            <c:spPr>
-              <a:solidFill>
-                <a:srgbClr val="FF6359"/>
-              </a:solidFill>
-              <a:effectLst/>
-            </c:spPr>
-          </c:dPt>
-          <c:dPt>
-            <c:idx val="2"/>
-            <c:bubble3D val="0"/>
-            <c:spPr>
-              <a:solidFill>
-                <a:srgbClr val="718886"/>
-              </a:solidFill>
-              <a:effectLst/>
-            </c:spPr>
-          </c:dPt>
-          <c:dLbls>
-            <c:dLbl>
-              <c:idx val="0"/>
-              <c:numFmt formatCode="0%" sourceLinked="0"/>
-              <c:spPr/>
-              <c:txPr>
-                <a:bodyPr/>
-                <a:lstStyle/>
-                <a:p>
-                  <a:pPr>
-                    <a:defRPr sz="700" b="0" i="0" u="none" strike="noStrike">
-                      <a:solidFill>
-                        <a:srgbClr val="000000"/>
-                      </a:solidFill>
-                      <a:latin typeface="Arial"/>
-                    </a:defRPr>
-                  </a:pPr>
-                </a:p>
-              </c:txPr>
-              <c:showLegendKey val="0"/>
-              <c:showVal val="0"/>
-              <c:showCatName val="0"/>
-              <c:showSerName val="0"/>
-              <c:showPercent val="1"/>
-              <c:showBubbleSize val="0"/>
-            </c:dLbl>
-            <c:dLbl>
-              <c:idx val="1"/>
-              <c:numFmt formatCode="0%" sourceLinked="0"/>
-              <c:spPr/>
-              <c:txPr>
-                <a:bodyPr/>
-                <a:lstStyle/>
-                <a:p>
-                  <a:pPr>
-                    <a:defRPr sz="700" b="0" i="0" u="none" strike="noStrike">
-                      <a:solidFill>
-                        <a:srgbClr val="000000"/>
-                      </a:solidFill>
-                      <a:latin typeface="Arial"/>
-                    </a:defRPr>
-                  </a:pPr>
-                </a:p>
-              </c:txPr>
-              <c:showLegendKey val="0"/>
-              <c:showVal val="0"/>
-              <c:showCatName val="0"/>
-              <c:showSerName val="0"/>
-              <c:showPercent val="1"/>
-              <c:showBubbleSize val="0"/>
-            </c:dLbl>
-            <c:dLbl>
-              <c:idx val="2"/>
-              <c:numFmt formatCode="0%" sourceLinked="0"/>
-              <c:spPr/>
-              <c:txPr>
-                <a:bodyPr/>
-                <a:lstStyle/>
-                <a:p>
-                  <a:pPr>
-                    <a:defRPr sz="700" b="0" i="0" u="none" strike="noStrike">
-                      <a:solidFill>
-                        <a:srgbClr val="000000"/>
-                      </a:solidFill>
-                      <a:latin typeface="Arial"/>
-                    </a:defRPr>
-                  </a:pPr>
-                </a:p>
-              </c:txPr>
-              <c:showLegendKey val="0"/>
-              <c:showVal val="0"/>
-              <c:showCatName val="0"/>
-              <c:showSerName val="0"/>
-              <c:showPercent val="1"/>
-              <c:showBubbleSize val="0"/>
-            </c:dLbl>
-            <c:numFmt formatCode="0%" sourceLinked="0"/>
-            <c:txPr>
-              <a:bodyPr/>
-              <a:lstStyle/>
-              <a:p>
-                <a:pPr>
-                  <a:defRPr sz="1800" b="0" i="0" u="none" strike="noStrike">
-                    <a:solidFill>
-                      <a:srgbClr val="000000"/>
-                    </a:solidFill>
-                    <a:latin typeface="Arial"/>
-                  </a:defRPr>
-                </a:pPr>
-              </a:p>
-            </c:txPr>
-            <c:dLblPos val="ctr"/>
-            <c:showLegendKey val="0"/>
-            <c:showVal val="0"/>
-            <c:showCatName val="1"/>
-            <c:showSerName val="0"/>
-            <c:showPercent val="1"/>
-            <c:showBubbleSize val="0"/>
-            <c:showLeaderLines val="0"/>
-          </c:dLbls>
-          <c:cat>
-            <c:strRef>
-              <c:f>Sheet1!$A$2:$A$4</c:f>
-              <c:strCache>
-                <c:ptCount val="3"/>
-                <c:pt idx="0">
-                  <c:v>Greek Project (GRC)</c:v>
-                </c:pt>
-                <c:pt idx="1">
-                  <c:v>Go-To-Market (GTM)</c:v>
-                </c:pt>
-                <c:pt idx="2">
-                  <c:v>Other</c:v>
-                </c:pt>
-              </c:strCache>
-            </c:strRef>
-          </c:cat>
-          <c:val>
-            <c:numRef>
-              <c:f>Sheet1!$B$2:$B$4</c:f>
-              <c:numCache>
-                <c:ptCount val="3"/>
-                <c:pt idx="0">
-                  <c:v>80</c:v>
-                </c:pt>
-                <c:pt idx="1">
-                  <c:v>10</c:v>
-                </c:pt>
-                <c:pt idx="2">
-                  <c:v>10</c:v>
-                </c:pt>
-              </c:numCache>
-            </c:numRef>
-          </c:val>
-        </c:ser>
-        <c:firstSliceAng val="0"/>
-      </c:pieChart>
-      <c:spPr>
-        <a:noFill/>
-        <a:ln>
-          <a:noFill/>
-        </a:ln>
-        <a:effectLst/>
-      </c:spPr>
-    </c:plotArea>
-    <c:legend>
-      <c:legendPos val="r"/>
-      <c:overlay val="0"/>
-      <c:txPr>
-        <a:bodyPr/>
-        <a:lstStyle/>
-        <a:p>
-          <a:pPr>
-            <a:defRPr sz="700">      </a:defRPr>
-          </a:pPr>
-          <a:endParaRPr lang="en-US"/>
-        </a:p>
-      </c:txPr>
-    </c:legend>
-    <c:plotVisOnly val="1"/>
-    <c:dispBlanksAs val="span"/>
-  </c:chart>
-  <c:spPr>
-    <a:solidFill>
-      <a:srgbClr val="F4F6F6"/>
-    </a:solidFill>
-    <a:ln>
-      <a:noFill/>
-    </a:ln>
-    <a:effectLst/>
-  </c:spPr>
-  <c:externalData r:id="rId1">
-    <c:autoUpdate val="0"/>
-  </c:externalData>
-</c:chartSpace>
-</file>
-
-<file path=ppt/charts/chart5.xml><?xml version="1.0" encoding="utf-8"?>
 <c:chartSpace xmlns:c="http://schemas.openxmlformats.org/drawingml/2006/chart" xmlns:a="http://schemas.openxmlformats.org/drawingml/2006/main" xmlns:r="http://schemas.openxmlformats.org/officeDocument/2006/relationships">
   <c:date1904 val="0"/>
   <c:roundedCorners val="1"/>
@@ -1152,7 +878,7 @@
                 <a:pPr>
                   <a:defRPr b="0" i="0" strike="noStrike" sz="700" u="none">
                     <a:solidFill>
-                      <a:srgbClr val="FFFFFF"/>
+                      <a:srgbClr val="000000"/>
                     </a:solidFill>
                     <a:latin typeface="Arial"/>
                   </a:defRPr>
@@ -1220,7 +946,7 @@
               <a:pPr>
                 <a:defRPr b="0" i="0" strike="noStrike" sz="700" u="none">
                   <a:solidFill>
-                    <a:srgbClr val="FFFFFF"/>
+                    <a:srgbClr val="000000"/>
                   </a:solidFill>
                   <a:latin typeface="Arial"/>
                 </a:defRPr>
@@ -1266,9 +992,9 @@
           <a:lstStyle/>
           <a:p>
             <a:pPr>
-              <a:defRPr sz="700" b="0" i="0" u="none" strike="noStrike">
-                <a:solidFill>
-                  <a:srgbClr val="4A5C5A"/>
+              <a:defRPr sz="1200" b="0" i="0" u="none" strike="noStrike">
+                <a:solidFill>
+                  <a:srgbClr val="000000"/>
                 </a:solidFill>
                 <a:latin typeface="Arial"/>
               </a:defRPr>
@@ -1291,9 +1017,9 @@
         <c:axPos val="b"/>
         <c:majorGridlines>
           <c:spPr>
-            <a:ln w="6350" cap="flat">
+            <a:ln w="12700" cap="flat">
               <a:solidFill>
-                <a:srgbClr val="E0E8E7"/>
+                <a:srgbClr val="888888"/>
               </a:solidFill>
               <a:prstDash val="solid"/>
               <a:round/>
@@ -1318,9 +1044,9 @@
           <a:lstStyle/>
           <a:p>
             <a:pPr>
-              <a:defRPr sz="700" b="0" i="0" u="none" strike="noStrike">
-                <a:solidFill>
-                  <a:srgbClr val="4A5C5A"/>
+              <a:defRPr sz="1200" b="0" i="0" u="none" strike="noStrike">
+                <a:solidFill>
+                  <a:srgbClr val="000000"/>
                 </a:solidFill>
                 <a:latin typeface="Arial"/>
               </a:defRPr>
@@ -1344,9 +1070,7 @@
     <c:dispBlanksAs val="span"/>
   </c:chart>
   <c:spPr>
-    <a:solidFill>
-      <a:srgbClr val="F4F6F6"/>
-    </a:solidFill>
+    <a:noFill/>
     <a:ln>
       <a:noFill/>
     </a:ln>
@@ -1358,7 +1082,7 @@
 </c:chartSpace>
 </file>
 
-<file path=ppt/charts/chart6.xml><?xml version="1.0" encoding="utf-8"?>
+<file path=ppt/charts/chart5.xml><?xml version="1.0" encoding="utf-8"?>
 <c:chartSpace xmlns:c="http://schemas.openxmlformats.org/drawingml/2006/chart" xmlns:a="http://schemas.openxmlformats.org/drawingml/2006/main" xmlns:r="http://schemas.openxmlformats.org/officeDocument/2006/relationships">
   <c:date1904 val="0"/>
   <c:roundedCorners val="1"/>
@@ -1418,14 +1142,14 @@
           <c:dLbls>
             <c:dLbl>
               <c:idx val="0"/>
-              <c:numFmt formatCode="0%" sourceLinked="0"/>
+              <c:numFmt formatCode="General" sourceLinked="0"/>
               <c:spPr/>
               <c:txPr>
                 <a:bodyPr/>
                 <a:lstStyle/>
                 <a:p>
                   <a:pPr>
-                    <a:defRPr sz="700" b="0" i="0" u="none" strike="noStrike">
+                    <a:defRPr sz="1200" b="0" i="0" u="none" strike="noStrike">
                       <a:solidFill>
                         <a:srgbClr val="000000"/>
                       </a:solidFill>
@@ -1438,19 +1162,19 @@
               <c:showVal val="0"/>
               <c:showCatName val="0"/>
               <c:showSerName val="0"/>
-              <c:showPercent val="1"/>
+              <c:showPercent val="0"/>
               <c:showBubbleSize val="0"/>
             </c:dLbl>
             <c:dLbl>
               <c:idx val="1"/>
-              <c:numFmt formatCode="0%" sourceLinked="0"/>
+              <c:numFmt formatCode="General" sourceLinked="0"/>
               <c:spPr/>
               <c:txPr>
                 <a:bodyPr/>
                 <a:lstStyle/>
                 <a:p>
                   <a:pPr>
-                    <a:defRPr sz="700" b="0" i="0" u="none" strike="noStrike">
+                    <a:defRPr sz="1200" b="0" i="0" u="none" strike="noStrike">
                       <a:solidFill>
                         <a:srgbClr val="000000"/>
                       </a:solidFill>
@@ -1463,10 +1187,10 @@
               <c:showVal val="0"/>
               <c:showCatName val="0"/>
               <c:showSerName val="0"/>
-              <c:showPercent val="1"/>
+              <c:showPercent val="0"/>
               <c:showBubbleSize val="0"/>
             </c:dLbl>
-            <c:numFmt formatCode="0%" sourceLinked="0"/>
+            <c:numFmt formatCode="General" sourceLinked="0"/>
             <c:txPr>
               <a:bodyPr/>
               <a:lstStyle/>
@@ -1532,24 +1256,233 @@
     <c:legend>
       <c:legendPos val="r"/>
       <c:overlay val="0"/>
-      <c:txPr>
-        <a:bodyPr/>
-        <a:lstStyle/>
-        <a:p>
-          <a:pPr>
-            <a:defRPr sz="700">      </a:defRPr>
-          </a:pPr>
-          <a:endParaRPr lang="en-US"/>
-        </a:p>
-      </c:txPr>
     </c:legend>
     <c:plotVisOnly val="1"/>
     <c:dispBlanksAs val="span"/>
   </c:chart>
   <c:spPr>
-    <a:solidFill>
-      <a:srgbClr val="F4F6F6"/>
-    </a:solidFill>
+    <a:noFill/>
+    <a:ln>
+      <a:noFill/>
+    </a:ln>
+    <a:effectLst/>
+  </c:spPr>
+  <c:externalData r:id="rId1">
+    <c:autoUpdate val="0"/>
+  </c:externalData>
+</c:chartSpace>
+</file>
+
+<file path=ppt/charts/chart6.xml><?xml version="1.0" encoding="utf-8"?>
+<c:chartSpace xmlns:c="http://schemas.openxmlformats.org/drawingml/2006/chart" xmlns:a="http://schemas.openxmlformats.org/drawingml/2006/main" xmlns:r="http://schemas.openxmlformats.org/officeDocument/2006/relationships">
+  <c:date1904 val="0"/>
+  <c:roundedCorners val="1"/>
+  <c:chart>
+    <c:autoTitleDeleted val="1"/>
+    <c:plotArea>
+      <c:layout/>
+      <c:barChart>
+        <c:barDir val="bar"/>
+        <c:grouping val="clustered"/>
+        <c:varyColors val="0"/>
+        <c:ser>
+          <c:idx val="0"/>
+          <c:order val="0"/>
+          <c:tx>
+            <c:strRef>
+              <c:f>Sheet1!$B$1</c:f>
+              <c:strCache>
+                <c:ptCount val="1"/>
+                <c:pt idx="0">
+                  <c:v>Hours</c:v>
+                </c:pt>
+              </c:strCache>
+            </c:strRef>
+          </c:tx>
+          <c:spPr>
+            <a:solidFill>
+              <a:srgbClr val="1B5E52"/>
+            </a:solidFill>
+            <a:effectLst/>
+          </c:spPr>
+          <c:invertIfNegative val="0"/>
+          <c:dLbls>
+            <c:numFmt formatCode="#,##0" sourceLinked="0"/>
+            <c:txPr>
+              <a:bodyPr/>
+              <a:lstStyle/>
+              <a:p>
+                <a:pPr>
+                  <a:defRPr b="0" i="0" strike="noStrike" sz="700" u="none">
+                    <a:solidFill>
+                      <a:srgbClr val="000000"/>
+                    </a:solidFill>
+                    <a:latin typeface="Arial"/>
+                  </a:defRPr>
+                </a:pPr>
+              </a:p>
+            </c:txPr>
+            <c:showLegendKey val="0"/>
+            <c:showVal val="1"/>
+            <c:showCatName val="0"/>
+            <c:showSerName val="0"/>
+            <c:showPercent val="0"/>
+            <c:showBubbleSize val="0"/>
+            <c:showLeaderLines val="0"/>
+          </c:dLbls>
+          <c:cat>
+            <c:multiLvlStrRef>
+              <c:f>Sheet1!$A$2:$A$1</c:f>
+              <c:multiLvlStrCache>
+                <c:ptCount val="0"/>
+                <c:lvl/>
+              </c:multiLvlStrCache>
+            </c:multiLvlStrRef>
+          </c:cat>
+          <c:val>
+            <c:numRef>
+              <c:f>Sheet1!$B$2:$B$1</c:f>
+              <c:numCache>
+                <c:formatCode>General</c:formatCode>
+                <c:ptCount val="0"/>
+              </c:numCache>
+            </c:numRef>
+          </c:val>
+        </c:ser>
+        <c:dLbls>
+          <c:numFmt formatCode="#,##0" sourceLinked="0"/>
+          <c:txPr>
+            <a:bodyPr/>
+            <a:lstStyle/>
+            <a:p>
+              <a:pPr>
+                <a:defRPr b="0" i="0" strike="noStrike" sz="700" u="none">
+                  <a:solidFill>
+                    <a:srgbClr val="000000"/>
+                  </a:solidFill>
+                  <a:latin typeface="Arial"/>
+                </a:defRPr>
+              </a:pPr>
+            </a:p>
+          </c:txPr>
+          <c:showLegendKey val="0"/>
+          <c:showVal val="1"/>
+          <c:showCatName val="0"/>
+          <c:showSerName val="0"/>
+          <c:showPercent val="0"/>
+          <c:showBubbleSize val="0"/>
+          <c:showLeaderLines val="0"/>
+        </c:dLbls>
+        <c:gapWidth val="150"/>
+        <c:overlap val="0"/>
+        <c:axId val="2094734554"/>
+        <c:axId val="2094734552"/>
+        <c:axId val="2094734556"/>
+      </c:barChart>
+      <c:catAx>
+        <c:axId val="2094734554"/>
+        <c:scaling>
+          <c:orientation val="minMax"/>
+        </c:scaling>
+        <c:delete val="0"/>
+        <c:axPos val="l"/>
+        <c:numFmt formatCode="General" sourceLinked="1"/>
+        <c:majorTickMark val="out"/>
+        <c:minorTickMark val="none"/>
+        <c:tickLblPos val="nextTo"/>
+        <c:spPr>
+          <a:ln w="12700" cap="flat">
+            <a:solidFill>
+              <a:srgbClr val="888888"/>
+            </a:solidFill>
+            <a:prstDash val="solid"/>
+            <a:round/>
+          </a:ln>
+        </c:spPr>
+        <c:txPr>
+          <a:bodyPr/>
+          <a:lstStyle/>
+          <a:p>
+            <a:pPr>
+              <a:defRPr sz="1200" b="0" i="0" u="none" strike="noStrike">
+                <a:solidFill>
+                  <a:srgbClr val="000000"/>
+                </a:solidFill>
+                <a:latin typeface="Arial"/>
+              </a:defRPr>
+            </a:pPr>
+            <a:endParaRPr lang="en-US"/>
+          </a:p>
+        </c:txPr>
+        <c:crossAx val="2094734552"/>
+        <c:crosses val="autoZero"/>
+        <c:auto val="1"/>
+        <c:lblAlgn val="ctr"/>
+        <c:noMultiLvlLbl val="1"/>
+      </c:catAx>
+      <c:valAx>
+        <c:axId val="2094734552"/>
+        <c:scaling>
+          <c:orientation val="minMax"/>
+        </c:scaling>
+        <c:delete val="0"/>
+        <c:axPos val="b"/>
+        <c:majorGridlines>
+          <c:spPr>
+            <a:ln w="12700" cap="flat">
+              <a:solidFill>
+                <a:srgbClr val="888888"/>
+              </a:solidFill>
+              <a:prstDash val="solid"/>
+              <a:round/>
+            </a:ln>
+          </c:spPr>
+        </c:majorGridlines>
+        <c:numFmt formatCode="General" sourceLinked="0"/>
+        <c:majorTickMark val="out"/>
+        <c:minorTickMark val="none"/>
+        <c:tickLblPos val="low"/>
+        <c:spPr>
+          <a:ln w="12700" cap="flat">
+            <a:solidFill>
+              <a:srgbClr val="888888"/>
+            </a:solidFill>
+            <a:prstDash val="solid"/>
+            <a:round/>
+          </a:ln>
+        </c:spPr>
+        <c:txPr>
+          <a:bodyPr/>
+          <a:lstStyle/>
+          <a:p>
+            <a:pPr>
+              <a:defRPr sz="1200" b="0" i="0" u="none" strike="noStrike">
+                <a:solidFill>
+                  <a:srgbClr val="000000"/>
+                </a:solidFill>
+                <a:latin typeface="Arial"/>
+              </a:defRPr>
+            </a:pPr>
+            <a:endParaRPr lang="en-US"/>
+          </a:p>
+        </c:txPr>
+        <c:crossAx val="2094734554"/>
+        <c:crosses val="autoZero"/>
+        <c:crossBetween val="between"/>
+      </c:valAx>
+      <c:spPr>
+        <a:noFill/>
+        <a:ln>
+          <a:noFill/>
+        </a:ln>
+        <a:effectLst/>
+      </c:spPr>
+    </c:plotArea>
+    <c:plotVisOnly val="1"/>
+    <c:dispBlanksAs val="span"/>
+  </c:chart>
+  <c:spPr>
+    <a:noFill/>
     <a:ln>
       <a:noFill/>
     </a:ln>
@@ -1621,14 +1554,14 @@
           <c:dLbls>
             <c:dLbl>
               <c:idx val="0"/>
-              <c:numFmt formatCode="0%" sourceLinked="0"/>
+              <c:numFmt formatCode="General" sourceLinked="0"/>
               <c:spPr/>
               <c:txPr>
                 <a:bodyPr/>
                 <a:lstStyle/>
                 <a:p>
                   <a:pPr>
-                    <a:defRPr sz="900" b="0" i="0" u="none" strike="noStrike">
+                    <a:defRPr sz="1200" b="0" i="0" u="none" strike="noStrike">
                       <a:solidFill>
                         <a:srgbClr val="000000"/>
                       </a:solidFill>
@@ -1641,19 +1574,19 @@
               <c:showVal val="0"/>
               <c:showCatName val="0"/>
               <c:showSerName val="0"/>
-              <c:showPercent val="1"/>
+              <c:showPercent val="0"/>
               <c:showBubbleSize val="0"/>
             </c:dLbl>
             <c:dLbl>
               <c:idx val="1"/>
-              <c:numFmt formatCode="0%" sourceLinked="0"/>
+              <c:numFmt formatCode="General" sourceLinked="0"/>
               <c:spPr/>
               <c:txPr>
                 <a:bodyPr/>
                 <a:lstStyle/>
                 <a:p>
                   <a:pPr>
-                    <a:defRPr sz="900" b="0" i="0" u="none" strike="noStrike">
+                    <a:defRPr sz="1200" b="0" i="0" u="none" strike="noStrike">
                       <a:solidFill>
                         <a:srgbClr val="000000"/>
                       </a:solidFill>
@@ -1666,10 +1599,10 @@
               <c:showVal val="0"/>
               <c:showCatName val="0"/>
               <c:showSerName val="0"/>
-              <c:showPercent val="1"/>
+              <c:showPercent val="0"/>
               <c:showBubbleSize val="0"/>
             </c:dLbl>
-            <c:numFmt formatCode="0%" sourceLinked="0"/>
+            <c:numFmt formatCode="General" sourceLinked="0"/>
             <c:txPr>
               <a:bodyPr/>
               <a:lstStyle/>
@@ -1733,26 +1666,14 @@
       </c:spPr>
     </c:plotArea>
     <c:legend>
-      <c:legendPos val="b"/>
+      <c:legendPos val="r"/>
       <c:overlay val="0"/>
-      <c:txPr>
-        <a:bodyPr/>
-        <a:lstStyle/>
-        <a:p>
-          <a:pPr>
-            <a:defRPr sz="700">      </a:defRPr>
-          </a:pPr>
-          <a:endParaRPr lang="en-US"/>
-        </a:p>
-      </c:txPr>
     </c:legend>
     <c:plotVisOnly val="1"/>
     <c:dispBlanksAs val="span"/>
   </c:chart>
   <c:spPr>
-    <a:solidFill>
-      <a:srgbClr val="F4F6F6"/>
-    </a:solidFill>
+    <a:noFill/>
     <a:ln>
       <a:noFill/>
     </a:ln>
@@ -3165,12 +3086,7 @@
           <a:solidFill>
             <a:srgbClr val="FF6359"/>
           </a:solidFill>
-          <a:ln w="12700">
-            <a:solidFill>
-              <a:srgbClr val="FF6359"/>
-            </a:solidFill>
-            <a:prstDash val="solid"/>
-          </a:ln>
+          <a:ln/>
         </p:spPr>
       </p:sp>
       <p:sp>
@@ -3190,12 +3106,7 @@
           <a:solidFill>
             <a:srgbClr val="0A2422"/>
           </a:solidFill>
-          <a:ln w="12700">
-            <a:solidFill>
-              <a:srgbClr val="0A2422"/>
-            </a:solidFill>
-            <a:prstDash val="solid"/>
-          </a:ln>
+          <a:ln/>
         </p:spPr>
       </p:sp>
       <p:sp>
@@ -3216,7 +3127,7 @@
           <a:ln/>
         </p:spPr>
         <p:txBody>
-          <a:bodyPr wrap="square" lIns="0" tIns="0" rIns="0" bIns="0" rtlCol="0" anchor="ctr"/>
+          <a:bodyPr wrap="square" rtlCol="0" anchor="ctr"/>
           <a:lstStyle/>
           <a:p>
             <a:pPr indent="0" marL="0">
@@ -3255,7 +3166,7 @@
           <a:ln/>
         </p:spPr>
         <p:txBody>
-          <a:bodyPr wrap="square" lIns="0" tIns="0" rIns="0" bIns="0" rtlCol="0" anchor="ctr"/>
+          <a:bodyPr wrap="square" rtlCol="0" anchor="ctr"/>
           <a:lstStyle/>
           <a:p>
             <a:pPr indent="0" marL="0">
@@ -3294,7 +3205,7 @@
           <a:ln/>
         </p:spPr>
         <p:txBody>
-          <a:bodyPr wrap="square" lIns="0" tIns="0" rIns="0" bIns="0" rtlCol="0" anchor="ctr"/>
+          <a:bodyPr wrap="square" rtlCol="0" anchor="ctr"/>
           <a:lstStyle/>
           <a:p>
             <a:pPr indent="0" marL="0">
@@ -3333,7 +3244,7 @@
           <a:ln/>
         </p:spPr>
         <p:txBody>
-          <a:bodyPr wrap="square" lIns="0" tIns="0" rIns="0" bIns="0" rtlCol="0" anchor="ctr"/>
+          <a:bodyPr wrap="square" rtlCol="0" anchor="ctr"/>
           <a:lstStyle/>
           <a:p>
             <a:pPr indent="0" marL="0">
@@ -3372,7 +3283,7 @@
           <a:ln/>
         </p:spPr>
         <p:txBody>
-          <a:bodyPr wrap="square" lIns="0" tIns="0" rIns="0" bIns="0" rtlCol="0" anchor="ctr"/>
+          <a:bodyPr wrap="square" rtlCol="0" anchor="ctr"/>
           <a:lstStyle/>
           <a:p>
             <a:pPr algn="r" indent="0" marL="0">
@@ -3383,9 +3294,6 @@
                 <a:solidFill>
                   <a:srgbClr val="73AA87"/>
                 </a:solidFill>
-                <a:latin typeface="Calibri" pitchFamily="34" charset="0"/>
-                <a:ea typeface="Calibri" pitchFamily="34" charset="-122"/>
-                <a:cs typeface="Calibri" pitchFamily="34" charset="-120"/>
               </a:rPr>
               <a:t>Netcompany</a:t>
             </a:r>
@@ -3411,7 +3319,7 @@
           <a:ln/>
         </p:spPr>
         <p:txBody>
-          <a:bodyPr wrap="square" lIns="0" tIns="0" rIns="0" bIns="0" rtlCol="0" anchor="ctr"/>
+          <a:bodyPr wrap="square" rtlCol="0" anchor="ctr"/>
           <a:lstStyle/>
           <a:p>
             <a:pPr algn="r" indent="0" marL="0">
@@ -3422,9 +3330,6 @@
                 <a:solidFill>
                   <a:srgbClr val="718886"/>
                 </a:solidFill>
-                <a:latin typeface="Calibri" pitchFamily="34" charset="0"/>
-                <a:ea typeface="Calibri" pitchFamily="34" charset="-122"/>
-                <a:cs typeface="Calibri" pitchFamily="34" charset="-120"/>
               </a:rPr>
               <a:t>netcompany.com</a:t>
             </a:r>
@@ -3481,12 +3386,7 @@
           <a:solidFill>
             <a:srgbClr val="123836"/>
           </a:solidFill>
-          <a:ln w="12700">
-            <a:solidFill>
-              <a:srgbClr val="123836"/>
-            </a:solidFill>
-            <a:prstDash val="solid"/>
-          </a:ln>
+          <a:ln/>
         </p:spPr>
       </p:sp>
       <p:sp>
@@ -3506,12 +3406,7 @@
           <a:solidFill>
             <a:srgbClr val="FF6359"/>
           </a:solidFill>
-          <a:ln w="12700">
-            <a:solidFill>
-              <a:srgbClr val="FF6359"/>
-            </a:solidFill>
-            <a:prstDash val="solid"/>
-          </a:ln>
+          <a:ln/>
         </p:spPr>
       </p:sp>
       <p:sp>
@@ -3532,7 +3427,7 @@
           <a:ln/>
         </p:spPr>
         <p:txBody>
-          <a:bodyPr wrap="square" lIns="0" tIns="0" rIns="0" bIns="0" rtlCol="0" anchor="ctr"/>
+          <a:bodyPr wrap="square" rtlCol="0" anchor="ctr"/>
           <a:lstStyle/>
           <a:p>
             <a:pPr indent="0" marL="0">
@@ -3571,7 +3466,7 @@
           <a:ln/>
         </p:spPr>
         <p:txBody>
-          <a:bodyPr wrap="square" lIns="0" tIns="0" rIns="0" bIns="0" rtlCol="0" anchor="ctr"/>
+          <a:bodyPr wrap="square" rtlCol="0" anchor="ctr"/>
           <a:lstStyle/>
           <a:p>
             <a:pPr indent="0" marL="0">
@@ -3610,7 +3505,7 @@
           <a:ln/>
         </p:spPr>
         <p:txBody>
-          <a:bodyPr wrap="square" lIns="0" tIns="0" rIns="0" bIns="0" rtlCol="0" anchor="ctr"/>
+          <a:bodyPr wrap="square" rtlCol="0" anchor="ctr"/>
           <a:lstStyle/>
           <a:p>
             <a:pPr algn="r" indent="0" marL="0">
@@ -3648,12 +3543,7 @@
           <a:solidFill>
             <a:srgbClr val="123836"/>
           </a:solidFill>
-          <a:ln w="12700">
-            <a:solidFill>
-              <a:srgbClr val="123836"/>
-            </a:solidFill>
-            <a:prstDash val="solid"/>
-          </a:ln>
+          <a:ln/>
         </p:spPr>
       </p:sp>
       <p:sp>
@@ -3674,7 +3564,7 @@
           <a:ln/>
         </p:spPr>
         <p:txBody>
-          <a:bodyPr wrap="square" lIns="0" tIns="0" rIns="0" bIns="0" rtlCol="0" anchor="ctr"/>
+          <a:bodyPr wrap="square" rtlCol="0" anchor="ctr"/>
           <a:lstStyle/>
           <a:p>
             <a:pPr indent="0" marL="0">
@@ -3713,7 +3603,7 @@
           <a:ln/>
         </p:spPr>
         <p:txBody>
-          <a:bodyPr wrap="square" lIns="0" tIns="0" rIns="0" bIns="0" rtlCol="0" anchor="ctr"/>
+          <a:bodyPr wrap="square" rtlCol="0" anchor="ctr"/>
           <a:lstStyle/>
           <a:p>
             <a:pPr algn="r" indent="0" marL="0">
@@ -3783,12 +3673,7 @@
           <a:solidFill>
             <a:srgbClr val="FF6359"/>
           </a:solidFill>
-          <a:ln w="12700">
-            <a:solidFill>
-              <a:srgbClr val="FF6359"/>
-            </a:solidFill>
-            <a:prstDash val="solid"/>
-          </a:ln>
+          <a:ln/>
         </p:spPr>
       </p:sp>
       <p:sp>
@@ -3809,7 +3694,7 @@
           <a:ln/>
         </p:spPr>
         <p:txBody>
-          <a:bodyPr wrap="square" lIns="0" tIns="0" rIns="0" bIns="0" rtlCol="0" anchor="ctr"/>
+          <a:bodyPr wrap="square" rtlCol="0" anchor="ctr"/>
           <a:lstStyle/>
           <a:p>
             <a:pPr indent="0" marL="0">
@@ -3820,9 +3705,6 @@
                 <a:solidFill>
                   <a:srgbClr val="73AA87"/>
                 </a:solidFill>
-                <a:latin typeface="Calibri" pitchFamily="34" charset="0"/>
-                <a:ea typeface="Calibri" pitchFamily="34" charset="-122"/>
-                <a:cs typeface="Calibri" pitchFamily="34" charset="-120"/>
               </a:rPr>
               <a:t>01</a:t>
             </a:r>
@@ -3848,7 +3730,7 @@
           <a:ln/>
         </p:spPr>
         <p:txBody>
-          <a:bodyPr wrap="square" lIns="0" tIns="0" rIns="0" bIns="0" rtlCol="0" anchor="ctr"/>
+          <a:bodyPr wrap="square" rtlCol="0" anchor="ctr"/>
           <a:lstStyle/>
           <a:p>
             <a:pPr indent="0" marL="0">
@@ -3859,9 +3741,6 @@
                 <a:solidFill>
                   <a:srgbClr val="123836"/>
                 </a:solidFill>
-                <a:latin typeface="Calibri" pitchFamily="34" charset="0"/>
-                <a:ea typeface="Calibri" pitchFamily="34" charset="-122"/>
-                <a:cs typeface="Calibri" pitchFamily="34" charset="-120"/>
               </a:rPr>
               <a:t>Core Revenue Management Capabilities</a:t>
             </a:r>
@@ -3887,7 +3766,7 @@
           <a:ln/>
         </p:spPr>
         <p:txBody>
-          <a:bodyPr wrap="square" lIns="0" tIns="0" rIns="0" bIns="0" rtlCol="0" anchor="ctr"/>
+          <a:bodyPr wrap="square" rtlCol="0" anchor="ctr"/>
           <a:lstStyle/>
           <a:p>
             <a:pPr indent="0" marL="0">
@@ -3898,9 +3777,6 @@
                 <a:solidFill>
                   <a:srgbClr val="718886"/>
                 </a:solidFill>
-                <a:latin typeface="Calibri" pitchFamily="34" charset="0"/>
-                <a:ea typeface="Calibri" pitchFamily="34" charset="-122"/>
-                <a:cs typeface="Calibri" pitchFamily="34" charset="-120"/>
               </a:rPr>
               <a:t>Registration · Taxpayer Accounting · Billing · Exemptions · Penalty &amp; Interest · Tax Accounts</a:t>
             </a:r>
@@ -3957,12 +3833,7 @@
           <a:solidFill>
             <a:srgbClr val="FF6359"/>
           </a:solidFill>
-          <a:ln w="12700">
-            <a:solidFill>
-              <a:srgbClr val="FF6359"/>
-            </a:solidFill>
-            <a:prstDash val="solid"/>
-          </a:ln>
+          <a:ln/>
         </p:spPr>
       </p:sp>
       <p:sp>
@@ -3983,7 +3854,7 @@
           <a:ln/>
         </p:spPr>
         <p:txBody>
-          <a:bodyPr wrap="square" lIns="0" tIns="0" rIns="0" bIns="0" rtlCol="0" anchor="ctr"/>
+          <a:bodyPr wrap="square" rtlCol="0" anchor="ctr"/>
           <a:lstStyle/>
           <a:p>
             <a:pPr indent="0" marL="0">
@@ -3994,9 +3865,6 @@
                 <a:solidFill>
                   <a:srgbClr val="73AA87"/>
                 </a:solidFill>
-                <a:latin typeface="Calibri" pitchFamily="34" charset="0"/>
-                <a:ea typeface="Calibri" pitchFamily="34" charset="-122"/>
-                <a:cs typeface="Calibri" pitchFamily="34" charset="-120"/>
               </a:rPr>
               <a:t>02</a:t>
             </a:r>
@@ -4022,7 +3890,7 @@
           <a:ln/>
         </p:spPr>
         <p:txBody>
-          <a:bodyPr wrap="square" lIns="0" tIns="0" rIns="0" bIns="0" rtlCol="0" anchor="ctr"/>
+          <a:bodyPr wrap="square" rtlCol="0" anchor="ctr"/>
           <a:lstStyle/>
           <a:p>
             <a:pPr indent="0" marL="0">
@@ -4033,9 +3901,6 @@
                 <a:solidFill>
                   <a:srgbClr val="123836"/>
                 </a:solidFill>
-                <a:latin typeface="Calibri" pitchFamily="34" charset="0"/>
-                <a:ea typeface="Calibri" pitchFamily="34" charset="-122"/>
-                <a:cs typeface="Calibri" pitchFamily="34" charset="-120"/>
               </a:rPr>
               <a:t>Core Supporting Capabilities</a:t>
             </a:r>
@@ -4061,7 +3926,7 @@
           <a:ln/>
         </p:spPr>
         <p:txBody>
-          <a:bodyPr wrap="square" lIns="0" tIns="0" rIns="0" bIns="0" rtlCol="0" anchor="ctr"/>
+          <a:bodyPr wrap="square" rtlCol="0" anchor="ctr"/>
           <a:lstStyle/>
           <a:p>
             <a:pPr indent="0" marL="0">
@@ -4072,9 +3937,6 @@
                 <a:solidFill>
                   <a:srgbClr val="718886"/>
                 </a:solidFill>
-                <a:latin typeface="Calibri" pitchFamily="34" charset="0"/>
-                <a:ea typeface="Calibri" pitchFamily="34" charset="-122"/>
-                <a:cs typeface="Calibri" pitchFamily="34" charset="-120"/>
               </a:rPr>
               <a:t>Supporting functions enabling the tax administration platform</a:t>
             </a:r>
@@ -4131,12 +3993,7 @@
           <a:solidFill>
             <a:srgbClr val="FF6359"/>
           </a:solidFill>
-          <a:ln w="12700">
-            <a:solidFill>
-              <a:srgbClr val="FF6359"/>
-            </a:solidFill>
-            <a:prstDash val="solid"/>
-          </a:ln>
+          <a:ln/>
         </p:spPr>
       </p:sp>
       <p:sp>
@@ -4157,7 +4014,7 @@
           <a:ln/>
         </p:spPr>
         <p:txBody>
-          <a:bodyPr wrap="square" lIns="0" tIns="0" rIns="0" bIns="0" rtlCol="0" anchor="ctr"/>
+          <a:bodyPr wrap="square" rtlCol="0" anchor="ctr"/>
           <a:lstStyle/>
           <a:p>
             <a:pPr indent="0" marL="0">
@@ -4168,9 +4025,6 @@
                 <a:solidFill>
                   <a:srgbClr val="73AA87"/>
                 </a:solidFill>
-                <a:latin typeface="Calibri" pitchFamily="34" charset="0"/>
-                <a:ea typeface="Calibri" pitchFamily="34" charset="-122"/>
-                <a:cs typeface="Calibri" pitchFamily="34" charset="-120"/>
               </a:rPr>
               <a:t>03</a:t>
             </a:r>
@@ -4196,7 +4050,7 @@
           <a:ln/>
         </p:spPr>
         <p:txBody>
-          <a:bodyPr wrap="square" lIns="0" tIns="0" rIns="0" bIns="0" rtlCol="0" anchor="ctr"/>
+          <a:bodyPr wrap="square" rtlCol="0" anchor="ctr"/>
           <a:lstStyle/>
           <a:p>
             <a:pPr indent="0" marL="0">
@@ -4207,9 +4061,6 @@
                 <a:solidFill>
                   <a:srgbClr val="123836"/>
                 </a:solidFill>
-                <a:latin typeface="Calibri" pitchFamily="34" charset="0"/>
-                <a:ea typeface="Calibri" pitchFamily="34" charset="-122"/>
-                <a:cs typeface="Calibri" pitchFamily="34" charset="-120"/>
               </a:rPr>
               <a:t>Non-Functional Requirement Coverage</a:t>
             </a:r>
@@ -4235,7 +4086,7 @@
           <a:ln/>
         </p:spPr>
         <p:txBody>
-          <a:bodyPr wrap="square" lIns="0" tIns="0" rIns="0" bIns="0" rtlCol="0" anchor="ctr"/>
+          <a:bodyPr wrap="square" rtlCol="0" anchor="ctr"/>
           <a:lstStyle/>
           <a:p>
             <a:pPr indent="0" marL="0">
@@ -4246,9 +4097,6 @@
                 <a:solidFill>
                   <a:srgbClr val="718886"/>
                 </a:solidFill>
-                <a:latin typeface="Calibri" pitchFamily="34" charset="0"/>
-                <a:ea typeface="Calibri" pitchFamily="34" charset="-122"/>
-                <a:cs typeface="Calibri" pitchFamily="34" charset="-120"/>
               </a:rPr>
               <a:t>Performance, security, reliability and compliance standards</a:t>
             </a:r>
@@ -4305,12 +4153,7 @@
           <a:solidFill>
             <a:srgbClr val="FF6359"/>
           </a:solidFill>
-          <a:ln w="12700">
-            <a:solidFill>
-              <a:srgbClr val="FF6359"/>
-            </a:solidFill>
-            <a:prstDash val="solid"/>
-          </a:ln>
+          <a:ln/>
         </p:spPr>
       </p:sp>
       <p:sp>
@@ -4331,7 +4174,7 @@
           <a:ln/>
         </p:spPr>
         <p:txBody>
-          <a:bodyPr wrap="square" lIns="0" tIns="0" rIns="0" bIns="0" rtlCol="0" anchor="ctr"/>
+          <a:bodyPr wrap="square" rtlCol="0" anchor="ctr"/>
           <a:lstStyle/>
           <a:p>
             <a:pPr indent="0" marL="0">
@@ -4342,9 +4185,6 @@
                 <a:solidFill>
                   <a:srgbClr val="73AA87"/>
                 </a:solidFill>
-                <a:latin typeface="Calibri" pitchFamily="34" charset="0"/>
-                <a:ea typeface="Calibri" pitchFamily="34" charset="-122"/>
-                <a:cs typeface="Calibri" pitchFamily="34" charset="-120"/>
               </a:rPr>
               <a:t>04</a:t>
             </a:r>
@@ -4370,7 +4210,7 @@
           <a:ln/>
         </p:spPr>
         <p:txBody>
-          <a:bodyPr wrap="square" lIns="0" tIns="0" rIns="0" bIns="0" rtlCol="0" anchor="ctr"/>
+          <a:bodyPr wrap="square" rtlCol="0" anchor="ctr"/>
           <a:lstStyle/>
           <a:p>
             <a:pPr indent="0" marL="0">
@@ -4381,9 +4221,6 @@
                 <a:solidFill>
                   <a:srgbClr val="123836"/>
                 </a:solidFill>
-                <a:latin typeface="Calibri" pitchFamily="34" charset="0"/>
-                <a:ea typeface="Calibri" pitchFamily="34" charset="-122"/>
-                <a:cs typeface="Calibri" pitchFamily="34" charset="-120"/>
               </a:rPr>
               <a:t>Reference Implementations</a:t>
             </a:r>
@@ -4409,7 +4246,7 @@
           <a:ln/>
         </p:spPr>
         <p:txBody>
-          <a:bodyPr wrap="square" lIns="0" tIns="0" rIns="0" bIns="0" rtlCol="0" anchor="ctr"/>
+          <a:bodyPr wrap="square" rtlCol="0" anchor="ctr"/>
           <a:lstStyle/>
           <a:p>
             <a:pPr indent="0" marL="0">
@@ -4420,9 +4257,6 @@
                 <a:solidFill>
                   <a:srgbClr val="718886"/>
                 </a:solidFill>
-                <a:latin typeface="Calibri" pitchFamily="34" charset="0"/>
-                <a:ea typeface="Calibri" pitchFamily="34" charset="-122"/>
-                <a:cs typeface="Calibri" pitchFamily="34" charset="-120"/>
               </a:rPr>
               <a:t>Baseline modules and reusable implementation patterns</a:t>
             </a:r>
@@ -4479,12 +4313,7 @@
           <a:solidFill>
             <a:srgbClr val="FF6359"/>
           </a:solidFill>
-          <a:ln w="12700">
-            <a:solidFill>
-              <a:srgbClr val="FF6359"/>
-            </a:solidFill>
-            <a:prstDash val="solid"/>
-          </a:ln>
+          <a:ln/>
         </p:spPr>
       </p:sp>
       <p:sp>
@@ -4505,7 +4334,7 @@
           <a:ln/>
         </p:spPr>
         <p:txBody>
-          <a:bodyPr wrap="square" lIns="0" tIns="0" rIns="0" bIns="0" rtlCol="0" anchor="ctr"/>
+          <a:bodyPr wrap="square" rtlCol="0" anchor="ctr"/>
           <a:lstStyle/>
           <a:p>
             <a:pPr indent="0" marL="0">
@@ -4516,9 +4345,6 @@
                 <a:solidFill>
                   <a:srgbClr val="73AA87"/>
                 </a:solidFill>
-                <a:latin typeface="Calibri" pitchFamily="34" charset="0"/>
-                <a:ea typeface="Calibri" pitchFamily="34" charset="-122"/>
-                <a:cs typeface="Calibri" pitchFamily="34" charset="-120"/>
               </a:rPr>
               <a:t>05</a:t>
             </a:r>
@@ -4544,7 +4370,7 @@
           <a:ln/>
         </p:spPr>
         <p:txBody>
-          <a:bodyPr wrap="square" lIns="0" tIns="0" rIns="0" bIns="0" rtlCol="0" anchor="ctr"/>
+          <a:bodyPr wrap="square" rtlCol="0" anchor="ctr"/>
           <a:lstStyle/>
           <a:p>
             <a:pPr indent="0" marL="0">
@@ -4555,9 +4381,6 @@
                 <a:solidFill>
                   <a:srgbClr val="123836"/>
                 </a:solidFill>
-                <a:latin typeface="Calibri" pitchFamily="34" charset="0"/>
-                <a:ea typeface="Calibri" pitchFamily="34" charset="-122"/>
-                <a:cs typeface="Calibri" pitchFamily="34" charset="-120"/>
               </a:rPr>
               <a:t>Core Self Service Capabilities</a:t>
             </a:r>
@@ -4583,7 +4406,7 @@
           <a:ln/>
         </p:spPr>
         <p:txBody>
-          <a:bodyPr wrap="square" lIns="0" tIns="0" rIns="0" bIns="0" rtlCol="0" anchor="ctr"/>
+          <a:bodyPr wrap="square" rtlCol="0" anchor="ctr"/>
           <a:lstStyle/>
           <a:p>
             <a:pPr indent="0" marL="0">
@@ -4594,9 +4417,6 @@
                 <a:solidFill>
                   <a:srgbClr val="718886"/>
                 </a:solidFill>
-                <a:latin typeface="Calibri" pitchFamily="34" charset="0"/>
-                <a:ea typeface="Calibri" pitchFamily="34" charset="-122"/>
-                <a:cs typeface="Calibri" pitchFamily="34" charset="-120"/>
               </a:rPr>
               <a:t>Taxpayer-facing portal and self-service functionality</a:t>
             </a:r>
@@ -4653,12 +4473,7 @@
           <a:solidFill>
             <a:srgbClr val="FF6359"/>
           </a:solidFill>
-          <a:ln w="12700">
-            <a:solidFill>
-              <a:srgbClr val="FF6359"/>
-            </a:solidFill>
-            <a:prstDash val="solid"/>
-          </a:ln>
+          <a:ln/>
         </p:spPr>
       </p:sp>
       <p:sp>
@@ -4679,7 +4494,7 @@
           <a:ln/>
         </p:spPr>
         <p:txBody>
-          <a:bodyPr wrap="square" lIns="0" tIns="0" rIns="0" bIns="0" rtlCol="0" anchor="ctr"/>
+          <a:bodyPr wrap="square" rtlCol="0" anchor="ctr"/>
           <a:lstStyle/>
           <a:p>
             <a:pPr indent="0" marL="0">
@@ -4690,9 +4505,6 @@
                 <a:solidFill>
                   <a:srgbClr val="73AA87"/>
                 </a:solidFill>
-                <a:latin typeface="Calibri" pitchFamily="34" charset="0"/>
-                <a:ea typeface="Calibri" pitchFamily="34" charset="-122"/>
-                <a:cs typeface="Calibri" pitchFamily="34" charset="-120"/>
               </a:rPr>
               <a:t>06</a:t>
             </a:r>
@@ -4718,7 +4530,7 @@
           <a:ln/>
         </p:spPr>
         <p:txBody>
-          <a:bodyPr wrap="square" lIns="0" tIns="0" rIns="0" bIns="0" rtlCol="0" anchor="ctr"/>
+          <a:bodyPr wrap="square" rtlCol="0" anchor="ctr"/>
           <a:lstStyle/>
           <a:p>
             <a:pPr indent="0" marL="0">
@@ -4729,9 +4541,6 @@
                 <a:solidFill>
                   <a:srgbClr val="123836"/>
                 </a:solidFill>
-                <a:latin typeface="Calibri" pitchFamily="34" charset="0"/>
-                <a:ea typeface="Calibri" pitchFamily="34" charset="-122"/>
-                <a:cs typeface="Calibri" pitchFamily="34" charset="-120"/>
               </a:rPr>
               <a:t>Core Data Hub Capabilities</a:t>
             </a:r>
@@ -4757,7 +4566,7 @@
           <a:ln/>
         </p:spPr>
         <p:txBody>
-          <a:bodyPr wrap="square" lIns="0" tIns="0" rIns="0" bIns="0" rtlCol="0" anchor="ctr"/>
+          <a:bodyPr wrap="square" rtlCol="0" anchor="ctr"/>
           <a:lstStyle/>
           <a:p>
             <a:pPr indent="0" marL="0">
@@ -4768,9 +4577,6 @@
                 <a:solidFill>
                   <a:srgbClr val="718886"/>
                 </a:solidFill>
-                <a:latin typeface="Calibri" pitchFamily="34" charset="0"/>
-                <a:ea typeface="Calibri" pitchFamily="34" charset="-122"/>
-                <a:cs typeface="Calibri" pitchFamily="34" charset="-120"/>
               </a:rPr>
               <a:t>Data integration, analytics and reporting infrastructure</a:t>
             </a:r>
@@ -4827,12 +4633,7 @@
           <a:solidFill>
             <a:srgbClr val="123836"/>
           </a:solidFill>
-          <a:ln w="12700">
-            <a:solidFill>
-              <a:srgbClr val="123836"/>
-            </a:solidFill>
-            <a:prstDash val="solid"/>
-          </a:ln>
+          <a:ln/>
         </p:spPr>
       </p:sp>
       <p:sp>
@@ -4852,12 +4653,7 @@
           <a:solidFill>
             <a:srgbClr val="FF6359"/>
           </a:solidFill>
-          <a:ln w="12700">
-            <a:solidFill>
-              <a:srgbClr val="FF6359"/>
-            </a:solidFill>
-            <a:prstDash val="solid"/>
-          </a:ln>
+          <a:ln/>
         </p:spPr>
       </p:sp>
       <p:sp>
@@ -4878,7 +4674,7 @@
           <a:ln/>
         </p:spPr>
         <p:txBody>
-          <a:bodyPr wrap="square" lIns="0" tIns="0" rIns="0" bIns="0" rtlCol="0" anchor="ctr"/>
+          <a:bodyPr wrap="square" rtlCol="0" anchor="ctr"/>
           <a:lstStyle/>
           <a:p>
             <a:pPr indent="0" marL="0">
@@ -4917,7 +4713,7 @@
           <a:ln/>
         </p:spPr>
         <p:txBody>
-          <a:bodyPr wrap="square" lIns="0" tIns="0" rIns="0" bIns="0" rtlCol="0" anchor="ctr"/>
+          <a:bodyPr wrap="square" rtlCol="0" anchor="ctr"/>
           <a:lstStyle/>
           <a:p>
             <a:pPr indent="0" marL="0">
@@ -4956,7 +4752,7 @@
           <a:ln/>
         </p:spPr>
         <p:txBody>
-          <a:bodyPr wrap="square" lIns="0" tIns="0" rIns="0" bIns="0" rtlCol="0" anchor="ctr"/>
+          <a:bodyPr wrap="square" rtlCol="0" anchor="ctr"/>
           <a:lstStyle/>
           <a:p>
             <a:pPr algn="r" indent="0" marL="0">
@@ -4994,12 +4790,7 @@
           <a:solidFill>
             <a:srgbClr val="123836"/>
           </a:solidFill>
-          <a:ln w="12700">
-            <a:solidFill>
-              <a:srgbClr val="123836"/>
-            </a:solidFill>
-            <a:prstDash val="solid"/>
-          </a:ln>
+          <a:ln/>
         </p:spPr>
       </p:sp>
       <p:sp>
@@ -5020,7 +4811,7 @@
           <a:ln/>
         </p:spPr>
         <p:txBody>
-          <a:bodyPr wrap="square" lIns="0" tIns="0" rIns="0" bIns="0" rtlCol="0" anchor="ctr"/>
+          <a:bodyPr wrap="square" rtlCol="0" anchor="ctr"/>
           <a:lstStyle/>
           <a:p>
             <a:pPr indent="0" marL="0">
@@ -5059,7 +4850,7 @@
           <a:ln/>
         </p:spPr>
         <p:txBody>
-          <a:bodyPr wrap="square" lIns="0" tIns="0" rIns="0" bIns="0" rtlCol="0" anchor="ctr"/>
+          <a:bodyPr wrap="square" rtlCol="0" anchor="ctr"/>
           <a:lstStyle/>
           <a:p>
             <a:pPr algn="r" indent="0" marL="0">
@@ -5129,12 +4920,7 @@
           <a:solidFill>
             <a:srgbClr val="FF6359"/>
           </a:solidFill>
-          <a:ln w="12700">
-            <a:solidFill>
-              <a:srgbClr val="FF6359"/>
-            </a:solidFill>
-            <a:prstDash val="solid"/>
-          </a:ln>
+          <a:ln/>
         </p:spPr>
       </p:sp>
       <p:sp>
@@ -5155,7 +4941,7 @@
           <a:ln/>
         </p:spPr>
         <p:txBody>
-          <a:bodyPr wrap="square" lIns="0" tIns="0" rIns="0" bIns="0" rtlCol="0" anchor="ctr"/>
+          <a:bodyPr wrap="square" rtlCol="0" anchor="ctr"/>
           <a:lstStyle/>
           <a:p>
             <a:pPr algn="ctr" indent="0" marL="0">
@@ -5194,7 +4980,7 @@
           <a:ln/>
         </p:spPr>
         <p:txBody>
-          <a:bodyPr wrap="square" lIns="0" tIns="0" rIns="0" bIns="0" rtlCol="0" anchor="ctr"/>
+          <a:bodyPr wrap="square" rtlCol="0" anchor="ctr"/>
           <a:lstStyle/>
           <a:p>
             <a:pPr algn="ctr" indent="0" marL="0">
@@ -5233,7 +5019,7 @@
           <a:ln/>
         </p:spPr>
         <p:txBody>
-          <a:bodyPr wrap="square" lIns="0" tIns="0" rIns="0" bIns="0" rtlCol="0" anchor="ctr"/>
+          <a:bodyPr wrap="square" rtlCol="0" anchor="ctr"/>
           <a:lstStyle/>
           <a:p>
             <a:pPr algn="ctr" indent="0" marL="0">
@@ -5303,12 +5089,7 @@
           <a:solidFill>
             <a:srgbClr val="FF6359"/>
           </a:solidFill>
-          <a:ln w="12700">
-            <a:solidFill>
-              <a:srgbClr val="FF6359"/>
-            </a:solidFill>
-            <a:prstDash val="solid"/>
-          </a:ln>
+          <a:ln/>
         </p:spPr>
       </p:sp>
       <p:sp>
@@ -5329,7 +5110,7 @@
           <a:ln/>
         </p:spPr>
         <p:txBody>
-          <a:bodyPr wrap="square" lIns="0" tIns="0" rIns="0" bIns="0" rtlCol="0" anchor="ctr"/>
+          <a:bodyPr wrap="square" rtlCol="0" anchor="ctr"/>
           <a:lstStyle/>
           <a:p>
             <a:pPr algn="ctr" indent="0" marL="0">
@@ -5368,7 +5149,7 @@
           <a:ln/>
         </p:spPr>
         <p:txBody>
-          <a:bodyPr wrap="square" lIns="0" tIns="0" rIns="0" bIns="0" rtlCol="0" anchor="ctr"/>
+          <a:bodyPr wrap="square" rtlCol="0" anchor="ctr"/>
           <a:lstStyle/>
           <a:p>
             <a:pPr algn="ctr" indent="0" marL="0">
@@ -5407,7 +5188,7 @@
           <a:ln/>
         </p:spPr>
         <p:txBody>
-          <a:bodyPr wrap="square" lIns="0" tIns="0" rIns="0" bIns="0" rtlCol="0" anchor="ctr"/>
+          <a:bodyPr wrap="square" rtlCol="0" anchor="ctr"/>
           <a:lstStyle/>
           <a:p>
             <a:pPr algn="ctr" indent="0" marL="0">
@@ -5477,12 +5258,7 @@
           <a:solidFill>
             <a:srgbClr val="FF6359"/>
           </a:solidFill>
-          <a:ln w="12700">
-            <a:solidFill>
-              <a:srgbClr val="FF6359"/>
-            </a:solidFill>
-            <a:prstDash val="solid"/>
-          </a:ln>
+          <a:ln/>
         </p:spPr>
       </p:sp>
       <p:sp>
@@ -5503,7 +5279,7 @@
           <a:ln/>
         </p:spPr>
         <p:txBody>
-          <a:bodyPr wrap="square" lIns="0" tIns="0" rIns="0" bIns="0" rtlCol="0" anchor="ctr"/>
+          <a:bodyPr wrap="square" rtlCol="0" anchor="ctr"/>
           <a:lstStyle/>
           <a:p>
             <a:pPr algn="ctr" indent="0" marL="0">
@@ -5542,7 +5318,7 @@
           <a:ln/>
         </p:spPr>
         <p:txBody>
-          <a:bodyPr wrap="square" lIns="0" tIns="0" rIns="0" bIns="0" rtlCol="0" anchor="ctr"/>
+          <a:bodyPr wrap="square" rtlCol="0" anchor="ctr"/>
           <a:lstStyle/>
           <a:p>
             <a:pPr algn="ctr" indent="0" marL="0">
@@ -5581,7 +5357,7 @@
           <a:ln/>
         </p:spPr>
         <p:txBody>
-          <a:bodyPr wrap="square" lIns="0" tIns="0" rIns="0" bIns="0" rtlCol="0" anchor="ctr"/>
+          <a:bodyPr wrap="square" rtlCol="0" anchor="ctr"/>
           <a:lstStyle/>
           <a:p>
             <a:pPr algn="ctr" indent="0" marL="0">
@@ -5651,12 +5427,7 @@
           <a:solidFill>
             <a:srgbClr val="FF6359"/>
           </a:solidFill>
-          <a:ln w="12700">
-            <a:solidFill>
-              <a:srgbClr val="FF6359"/>
-            </a:solidFill>
-            <a:prstDash val="solid"/>
-          </a:ln>
+          <a:ln/>
         </p:spPr>
       </p:sp>
       <p:sp>
@@ -5677,7 +5448,7 @@
           <a:ln/>
         </p:spPr>
         <p:txBody>
-          <a:bodyPr wrap="square" lIns="0" tIns="0" rIns="0" bIns="0" rtlCol="0" anchor="ctr"/>
+          <a:bodyPr wrap="square" rtlCol="0" anchor="ctr"/>
           <a:lstStyle/>
           <a:p>
             <a:pPr algn="ctr" indent="0" marL="0">
@@ -5716,7 +5487,7 @@
           <a:ln/>
         </p:spPr>
         <p:txBody>
-          <a:bodyPr wrap="square" lIns="0" tIns="0" rIns="0" bIns="0" rtlCol="0" anchor="ctr"/>
+          <a:bodyPr wrap="square" rtlCol="0" anchor="ctr"/>
           <a:lstStyle/>
           <a:p>
             <a:pPr algn="ctr" indent="0" marL="0">
@@ -5755,7 +5526,7 @@
           <a:ln/>
         </p:spPr>
         <p:txBody>
-          <a:bodyPr wrap="square" lIns="0" tIns="0" rIns="0" bIns="0" rtlCol="0" anchor="ctr"/>
+          <a:bodyPr wrap="square" rtlCol="0" anchor="ctr"/>
           <a:lstStyle/>
           <a:p>
             <a:pPr algn="ctr" indent="0" marL="0">
@@ -5794,7 +5565,7 @@
           <a:ln/>
         </p:spPr>
         <p:txBody>
-          <a:bodyPr wrap="square" lIns="0" tIns="0" rIns="0" bIns="0" rtlCol="0" anchor="ctr"/>
+          <a:bodyPr wrap="square" rtlCol="0" anchor="ctr"/>
           <a:lstStyle/>
           <a:p>
             <a:pPr indent="0" marL="0">
@@ -5805,9 +5576,6 @@
                 <a:solidFill>
                   <a:srgbClr val="FF6359"/>
                 </a:solidFill>
-                <a:latin typeface="Calibri" pitchFamily="34" charset="0"/>
-                <a:ea typeface="Calibri" pitchFamily="34" charset="-122"/>
-                <a:cs typeface="Calibri" pitchFamily="34" charset="-120"/>
               </a:rPr>
               <a:t>Business Scope</a:t>
             </a:r>
@@ -5833,7 +5601,7 @@
           <a:ln/>
         </p:spPr>
         <p:txBody>
-          <a:bodyPr wrap="square" lIns="0" tIns="0" rIns="0" bIns="0" rtlCol="0" anchor="ctr"/>
+          <a:bodyPr wrap="square" rtlCol="0" anchor="ctr"/>
           <a:lstStyle/>
           <a:p>
             <a:pPr indent="0" marL="0">
@@ -5844,9 +5612,6 @@
                 <a:solidFill>
                   <a:srgbClr val="141E1E"/>
                 </a:solidFill>
-                <a:latin typeface="Calibri" pitchFamily="34" charset="0"/>
-                <a:ea typeface="Calibri" pitchFamily="34" charset="-122"/>
-                <a:cs typeface="Calibri" pitchFamily="34" charset="-120"/>
               </a:rPr>
               <a:t>Covers the foundational tax administration functions enabling tax authorities to manage the full lifecycle of taxpayer obligations — from registration and filing through billing, assessment, accounting, and penalty management.</a:t>
             </a:r>
@@ -5872,7 +5637,7 @@
           <a:ln/>
         </p:spPr>
         <p:txBody>
-          <a:bodyPr wrap="square" lIns="0" tIns="0" rIns="0" bIns="0" rtlCol="0" anchor="ctr"/>
+          <a:bodyPr wrap="square" rtlCol="0" anchor="ctr"/>
           <a:lstStyle/>
           <a:p>
             <a:pPr indent="0" marL="0">
@@ -5883,9 +5648,6 @@
                 <a:solidFill>
                   <a:srgbClr val="FF6359"/>
                 </a:solidFill>
-                <a:latin typeface="Calibri" pitchFamily="34" charset="0"/>
-                <a:ea typeface="Calibri" pitchFamily="34" charset="-122"/>
-                <a:cs typeface="Calibri" pitchFamily="34" charset="-120"/>
               </a:rPr>
               <a:t>Market Needs &amp; Investment Benefits</a:t>
             </a:r>
@@ -5923,9 +5685,6 @@
                 <a:solidFill>
                   <a:srgbClr val="4A5C5A"/>
                 </a:solidFill>
-                <a:latin typeface="Calibri" pitchFamily="34" charset="0"/>
-                <a:ea typeface="Calibri" pitchFamily="34" charset="-122"/>
-                <a:cs typeface="Calibri" pitchFamily="34" charset="-120"/>
               </a:rPr>
               <a:t>End-to-end taxpayer lifecycle management reduces administrative burden and manual errors</a:t>
             </a:r>
@@ -5941,9 +5700,6 @@
                 <a:solidFill>
                   <a:srgbClr val="4A5C5A"/>
                 </a:solidFill>
-                <a:latin typeface="Calibri" pitchFamily="34" charset="0"/>
-                <a:ea typeface="Calibri" pitchFamily="34" charset="-122"/>
-                <a:cs typeface="Calibri" pitchFamily="34" charset="-120"/>
               </a:rPr>
               <a:t>Automated penalty and interest calculations improve collection rates and reduce revenue leakage</a:t>
             </a:r>
@@ -5959,9 +5715,6 @@
                 <a:solidFill>
                   <a:srgbClr val="4A5C5A"/>
                 </a:solidFill>
-                <a:latin typeface="Calibri" pitchFamily="34" charset="0"/>
-                <a:ea typeface="Calibri" pitchFamily="34" charset="-122"/>
-                <a:cs typeface="Calibri" pitchFamily="34" charset="-120"/>
               </a:rPr>
               <a:t>Modular capability design allows onboarding of new tax types with minimal reconfiguration</a:t>
             </a:r>
@@ -5977,9 +5730,6 @@
                 <a:solidFill>
                   <a:srgbClr val="4A5C5A"/>
                 </a:solidFill>
-                <a:latin typeface="Calibri" pitchFamily="34" charset="0"/>
-                <a:ea typeface="Calibri" pitchFamily="34" charset="-122"/>
-                <a:cs typeface="Calibri" pitchFamily="34" charset="-120"/>
               </a:rPr>
               <a:t>Streamlined registration and billing processes reduce case handling time for tax officers</a:t>
             </a:r>
@@ -5995,9 +5745,6 @@
                 <a:solidFill>
                   <a:srgbClr val="4A5C5A"/>
                 </a:solidFill>
-                <a:latin typeface="Calibri" pitchFamily="34" charset="0"/>
-                <a:ea typeface="Calibri" pitchFamily="34" charset="-122"/>
-                <a:cs typeface="Calibri" pitchFamily="34" charset="-120"/>
               </a:rPr>
               <a:t>Supports regulatory compliance including audit trails and operational reporting</a:t>
             </a:r>
@@ -6023,7 +5770,7 @@
           <a:ln/>
         </p:spPr>
         <p:txBody>
-          <a:bodyPr wrap="square" lIns="0" tIns="0" rIns="0" bIns="0" rtlCol="0" anchor="ctr"/>
+          <a:bodyPr wrap="square" rtlCol="0" anchor="ctr"/>
           <a:lstStyle/>
           <a:p>
             <a:pPr indent="0" marL="0">
@@ -6034,9 +5781,6 @@
                 <a:solidFill>
                   <a:srgbClr val="FF6359"/>
                 </a:solidFill>
-                <a:latin typeface="Calibri" pitchFamily="34" charset="0"/>
-                <a:ea typeface="Calibri" pitchFamily="34" charset="-122"/>
-                <a:cs typeface="Calibri" pitchFamily="34" charset="-120"/>
               </a:rPr>
               <a:t>Status Distribution</a:t>
             </a:r>
@@ -6078,7 +5822,7 @@
           <a:ln/>
         </p:spPr>
         <p:txBody>
-          <a:bodyPr wrap="square" lIns="0" tIns="0" rIns="0" bIns="0" rtlCol="0" anchor="ctr"/>
+          <a:bodyPr wrap="square" rtlCol="0" anchor="ctr"/>
           <a:lstStyle/>
           <a:p>
             <a:pPr indent="0" marL="0">
@@ -6089,9 +5833,6 @@
                 <a:solidFill>
                   <a:srgbClr val="FF6359"/>
                 </a:solidFill>
-                <a:latin typeface="Calibri" pitchFamily="34" charset="0"/>
-                <a:ea typeface="Calibri" pitchFamily="34" charset="-122"/>
-                <a:cs typeface="Calibri" pitchFamily="34" charset="-120"/>
               </a:rPr>
               <a:t>Roadmap Initiatives at a Glance</a:t>
             </a:r>
@@ -6138,21 +5879,14 @@
                         <a:buNone/>
                       </a:pPr>
                       <a:r>
-                        <a:rPr lang="en-US" sz="800" b="1" dirty="0">
+                        <a:rPr lang="en-US" sz="1200" b="1" dirty="0">
                           <a:solidFill>
                             <a:srgbClr val="FFFFFF"/>
                           </a:solidFill>
-                          <a:latin typeface="Calibri" pitchFamily="34" charset="0"/>
-                          <a:ea typeface="Calibri" pitchFamily="34" charset="-122"/>
-                          <a:cs typeface="Calibri" pitchFamily="34" charset="-120"/>
                         </a:rPr>
                         <a:t>Initiative</a:t>
                       </a:r>
-                      <a:endParaRPr lang="en-US" sz="800" dirty="0">
-                        <a:latin typeface="Calibri" charset="0"/>
-                        <a:ea typeface="Calibri" charset="0"/>
-                        <a:cs typeface="Calibri" charset="0"/>
-                      </a:endParaRPr>
+                      <a:endParaRPr lang="en-US" sz="1200" dirty="0"/>
                     </a:p>
                   </a:txBody>
                   <a:tcPr marL="91440" marR="91440" marT="45720" marB="45720">
@@ -6206,21 +5940,14 @@
                         <a:buNone/>
                       </a:pPr>
                       <a:r>
-                        <a:rPr lang="en-US" sz="800" b="1" dirty="0">
+                        <a:rPr lang="en-US" sz="1200" b="1" dirty="0">
                           <a:solidFill>
                             <a:srgbClr val="FFFFFF"/>
                           </a:solidFill>
-                          <a:latin typeface="Calibri" pitchFamily="34" charset="0"/>
-                          <a:ea typeface="Calibri" pitchFamily="34" charset="-122"/>
-                          <a:cs typeface="Calibri" pitchFamily="34" charset="-120"/>
                         </a:rPr>
                         <a:t>Effort (H)</a:t>
                       </a:r>
-                      <a:endParaRPr lang="en-US" sz="800" dirty="0">
-                        <a:latin typeface="Calibri" charset="0"/>
-                        <a:ea typeface="Calibri" charset="0"/>
-                        <a:cs typeface="Calibri" charset="0"/>
-                      </a:endParaRPr>
+                      <a:endParaRPr lang="en-US" sz="1200" dirty="0"/>
                     </a:p>
                   </a:txBody>
                   <a:tcPr marL="91440" marR="91440" marT="45720" marB="45720">
@@ -6274,21 +6001,14 @@
                         <a:buNone/>
                       </a:pPr>
                       <a:r>
-                        <a:rPr lang="en-US" sz="800" b="1" dirty="0">
+                        <a:rPr lang="en-US" sz="1200" b="1" dirty="0">
                           <a:solidFill>
                             <a:srgbClr val="FFFFFF"/>
                           </a:solidFill>
-                          <a:latin typeface="Calibri" pitchFamily="34" charset="0"/>
-                          <a:ea typeface="Calibri" pitchFamily="34" charset="-122"/>
-                          <a:cs typeface="Calibri" pitchFamily="34" charset="-120"/>
                         </a:rPr>
                         <a:t>Feats</a:t>
                       </a:r>
-                      <a:endParaRPr lang="en-US" sz="800" dirty="0">
-                        <a:latin typeface="Calibri" charset="0"/>
-                        <a:ea typeface="Calibri" charset="0"/>
-                        <a:cs typeface="Calibri" charset="0"/>
-                      </a:endParaRPr>
+                      <a:endParaRPr lang="en-US" sz="1200" dirty="0"/>
                     </a:p>
                   </a:txBody>
                   <a:tcPr marL="91440" marR="91440" marT="45720" marB="45720">
@@ -6342,21 +6062,14 @@
                         <a:buNone/>
                       </a:pPr>
                       <a:r>
-                        <a:rPr lang="en-US" sz="800" b="1" dirty="0">
+                        <a:rPr lang="en-US" sz="1200" b="1" dirty="0">
                           <a:solidFill>
                             <a:srgbClr val="FFFFFF"/>
                           </a:solidFill>
-                          <a:latin typeface="Calibri" pitchFamily="34" charset="0"/>
-                          <a:ea typeface="Calibri" pitchFamily="34" charset="-122"/>
-                          <a:cs typeface="Calibri" pitchFamily="34" charset="-120"/>
                         </a:rPr>
                         <a:t>PI</a:t>
                       </a:r>
-                      <a:endParaRPr lang="en-US" sz="800" dirty="0">
-                        <a:latin typeface="Calibri" charset="0"/>
-                        <a:ea typeface="Calibri" charset="0"/>
-                        <a:cs typeface="Calibri" charset="0"/>
-                      </a:endParaRPr>
+                      <a:endParaRPr lang="en-US" sz="1200" dirty="0"/>
                     </a:p>
                   </a:txBody>
                   <a:tcPr marL="91440" marR="91440" marT="45720" marB="45720">
@@ -6410,21 +6123,14 @@
                         <a:buNone/>
                       </a:pPr>
                       <a:r>
-                        <a:rPr lang="en-US" sz="800" b="1" dirty="0">
+                        <a:rPr lang="en-US" sz="1200" b="1" dirty="0">
                           <a:solidFill>
                             <a:srgbClr val="FFFFFF"/>
                           </a:solidFill>
-                          <a:latin typeface="Calibri" pitchFamily="34" charset="0"/>
-                          <a:ea typeface="Calibri" pitchFamily="34" charset="-122"/>
-                          <a:cs typeface="Calibri" pitchFamily="34" charset="-120"/>
                         </a:rPr>
                         <a:t>Prio</a:t>
                       </a:r>
-                      <a:endParaRPr lang="en-US" sz="800" dirty="0">
-                        <a:latin typeface="Calibri" charset="0"/>
-                        <a:ea typeface="Calibri" charset="0"/>
-                        <a:cs typeface="Calibri" charset="0"/>
-                      </a:endParaRPr>
+                      <a:endParaRPr lang="en-US" sz="1200" dirty="0"/>
                     </a:p>
                   </a:txBody>
                   <a:tcPr marL="91440" marR="91440" marT="45720" marB="45720">
@@ -6476,25 +6182,18 @@
                     <a:bodyPr/>
                     <a:lstStyle/>
                     <a:p>
-                      <a:pPr algn="l" indent="0" marL="0">
+                      <a:pPr indent="0" marL="0">
                         <a:buNone/>
                       </a:pPr>
                       <a:r>
-                        <a:rPr lang="en-US" sz="800" dirty="0">
+                        <a:rPr lang="en-US" sz="1200" dirty="0">
                           <a:solidFill>
-                            <a:srgbClr val="141E1E"/>
+                            <a:srgbClr val="000000"/>
                           </a:solidFill>
-                          <a:latin typeface="Calibri" pitchFamily="34" charset="0"/>
-                          <a:ea typeface="Calibri" pitchFamily="34" charset="-122"/>
-                          <a:cs typeface="Calibri" pitchFamily="34" charset="-120"/>
                         </a:rPr>
                         <a:t>Registration</a:t>
                       </a:r>
-                      <a:endParaRPr lang="en-US" sz="800" dirty="0">
-                        <a:latin typeface="Calibri" charset="0"/>
-                        <a:ea typeface="Calibri" charset="0"/>
-                        <a:cs typeface="Calibri" charset="0"/>
-                      </a:endParaRPr>
+                      <a:endParaRPr lang="en-US" sz="1200" dirty="0"/>
                     </a:p>
                   </a:txBody>
                   <a:tcPr marL="91440" marR="91440" marT="45720" marB="45720">
@@ -6534,9 +6233,6 @@
                       <a:headEnd type="none" w="med" len="med"/>
                       <a:tailEnd type="none" w="med" len="med"/>
                     </a:lnB>
-                    <a:solidFill>
-                      <a:srgbClr val="FFFFFF"/>
-                    </a:solidFill>
                   </a:tcPr>
                 </a:tc>
                 <a:tc>
@@ -6548,21 +6244,14 @@
                         <a:buNone/>
                       </a:pPr>
                       <a:r>
-                        <a:rPr lang="en-US" sz="800" dirty="0">
+                        <a:rPr lang="en-US" sz="1200" dirty="0">
                           <a:solidFill>
-                            <a:srgbClr val="141E1E"/>
+                            <a:srgbClr val="000000"/>
                           </a:solidFill>
-                          <a:latin typeface="Calibri" pitchFamily="34" charset="0"/>
-                          <a:ea typeface="Calibri" pitchFamily="34" charset="-122"/>
-                          <a:cs typeface="Calibri" pitchFamily="34" charset="-120"/>
                         </a:rPr>
                         <a:t>11,866</a:t>
                       </a:r>
-                      <a:endParaRPr lang="en-US" sz="800" dirty="0">
-                        <a:latin typeface="Calibri" charset="0"/>
-                        <a:ea typeface="Calibri" charset="0"/>
-                        <a:cs typeface="Calibri" charset="0"/>
-                      </a:endParaRPr>
+                      <a:endParaRPr lang="en-US" sz="1200" dirty="0"/>
                     </a:p>
                   </a:txBody>
                   <a:tcPr marL="91440" marR="91440" marT="45720" marB="45720">
@@ -6602,9 +6291,6 @@
                       <a:headEnd type="none" w="med" len="med"/>
                       <a:tailEnd type="none" w="med" len="med"/>
                     </a:lnB>
-                    <a:solidFill>
-                      <a:srgbClr val="FFFFFF"/>
-                    </a:solidFill>
                   </a:tcPr>
                 </a:tc>
                 <a:tc>
@@ -6616,21 +6302,14 @@
                         <a:buNone/>
                       </a:pPr>
                       <a:r>
-                        <a:rPr lang="en-US" sz="800" dirty="0">
+                        <a:rPr lang="en-US" sz="1200" dirty="0">
                           <a:solidFill>
-                            <a:srgbClr val="141E1E"/>
+                            <a:srgbClr val="000000"/>
                           </a:solidFill>
-                          <a:latin typeface="Calibri" pitchFamily="34" charset="0"/>
-                          <a:ea typeface="Calibri" pitchFamily="34" charset="-122"/>
-                          <a:cs typeface="Calibri" pitchFamily="34" charset="-120"/>
                         </a:rPr>
                         <a:t>6</a:t>
                       </a:r>
-                      <a:endParaRPr lang="en-US" sz="800" dirty="0">
-                        <a:latin typeface="Calibri" charset="0"/>
-                        <a:ea typeface="Calibri" charset="0"/>
-                        <a:cs typeface="Calibri" charset="0"/>
-                      </a:endParaRPr>
+                      <a:endParaRPr lang="en-US" sz="1200" dirty="0"/>
                     </a:p>
                   </a:txBody>
                   <a:tcPr marL="91440" marR="91440" marT="45720" marB="45720">
@@ -6670,9 +6349,6 @@
                       <a:headEnd type="none" w="med" len="med"/>
                       <a:tailEnd type="none" w="med" len="med"/>
                     </a:lnB>
-                    <a:solidFill>
-                      <a:srgbClr val="FFFFFF"/>
-                    </a:solidFill>
                   </a:tcPr>
                 </a:tc>
                 <a:tc>
@@ -6684,21 +6360,14 @@
                         <a:buNone/>
                       </a:pPr>
                       <a:r>
-                        <a:rPr lang="en-US" sz="800" dirty="0">
+                        <a:rPr lang="en-US" sz="1200" dirty="0">
                           <a:solidFill>
-                            <a:srgbClr val="141E1E"/>
+                            <a:srgbClr val="000000"/>
                           </a:solidFill>
-                          <a:latin typeface="Calibri" pitchFamily="34" charset="0"/>
-                          <a:ea typeface="Calibri" pitchFamily="34" charset="-122"/>
-                          <a:cs typeface="Calibri" pitchFamily="34" charset="-120"/>
                         </a:rPr>
                         <a:t>PI27-29</a:t>
                       </a:r>
-                      <a:endParaRPr lang="en-US" sz="800" dirty="0">
-                        <a:latin typeface="Calibri" charset="0"/>
-                        <a:ea typeface="Calibri" charset="0"/>
-                        <a:cs typeface="Calibri" charset="0"/>
-                      </a:endParaRPr>
+                      <a:endParaRPr lang="en-US" sz="1200" dirty="0"/>
                     </a:p>
                   </a:txBody>
                   <a:tcPr marL="91440" marR="91440" marT="45720" marB="45720">
@@ -6738,9 +6407,6 @@
                       <a:headEnd type="none" w="med" len="med"/>
                       <a:tailEnd type="none" w="med" len="med"/>
                     </a:lnB>
-                    <a:solidFill>
-                      <a:srgbClr val="FFFFFF"/>
-                    </a:solidFill>
                   </a:tcPr>
                 </a:tc>
                 <a:tc>
@@ -6752,21 +6418,14 @@
                         <a:buNone/>
                       </a:pPr>
                       <a:r>
-                        <a:rPr lang="en-US" sz="800" dirty="0">
+                        <a:rPr lang="en-US" sz="1200" dirty="0">
                           <a:solidFill>
-                            <a:srgbClr val="141E1E"/>
+                            <a:srgbClr val="000000"/>
                           </a:solidFill>
-                          <a:latin typeface="Calibri" pitchFamily="34" charset="0"/>
-                          <a:ea typeface="Calibri" pitchFamily="34" charset="-122"/>
-                          <a:cs typeface="Calibri" pitchFamily="34" charset="-120"/>
                         </a:rPr>
                         <a:t>P1</a:t>
                       </a:r>
-                      <a:endParaRPr lang="en-US" sz="800" dirty="0">
-                        <a:latin typeface="Calibri" charset="0"/>
-                        <a:ea typeface="Calibri" charset="0"/>
-                        <a:cs typeface="Calibri" charset="0"/>
-                      </a:endParaRPr>
+                      <a:endParaRPr lang="en-US" sz="1200" dirty="0"/>
                     </a:p>
                   </a:txBody>
                   <a:tcPr marL="91440" marR="91440" marT="45720" marB="45720">
@@ -6806,9 +6465,6 @@
                       <a:headEnd type="none" w="med" len="med"/>
                       <a:tailEnd type="none" w="med" len="med"/>
                     </a:lnB>
-                    <a:solidFill>
-                      <a:srgbClr val="FFFFFF"/>
-                    </a:solidFill>
                   </a:tcPr>
                 </a:tc>
               </a:tr>
@@ -6818,25 +6474,18 @@
                     <a:bodyPr/>
                     <a:lstStyle/>
                     <a:p>
-                      <a:pPr algn="l" indent="0" marL="0">
+                      <a:pPr indent="0" marL="0">
                         <a:buNone/>
                       </a:pPr>
                       <a:r>
-                        <a:rPr lang="en-US" sz="800" dirty="0">
+                        <a:rPr lang="en-US" sz="1200" dirty="0">
                           <a:solidFill>
-                            <a:srgbClr val="141E1E"/>
+                            <a:srgbClr val="000000"/>
                           </a:solidFill>
-                          <a:latin typeface="Calibri" pitchFamily="34" charset="0"/>
-                          <a:ea typeface="Calibri" pitchFamily="34" charset="-122"/>
-                          <a:cs typeface="Calibri" pitchFamily="34" charset="-120"/>
                         </a:rPr>
                         <a:t>Taxpayer Accounting</a:t>
                       </a:r>
-                      <a:endParaRPr lang="en-US" sz="800" dirty="0">
-                        <a:latin typeface="Calibri" charset="0"/>
-                        <a:ea typeface="Calibri" charset="0"/>
-                        <a:cs typeface="Calibri" charset="0"/>
-                      </a:endParaRPr>
+                      <a:endParaRPr lang="en-US" sz="1200" dirty="0"/>
                     </a:p>
                   </a:txBody>
                   <a:tcPr marL="91440" marR="91440" marT="45720" marB="45720">
@@ -6876,9 +6525,6 @@
                       <a:headEnd type="none" w="med" len="med"/>
                       <a:tailEnd type="none" w="med" len="med"/>
                     </a:lnB>
-                    <a:solidFill>
-                      <a:srgbClr val="EEF3F2"/>
-                    </a:solidFill>
                   </a:tcPr>
                 </a:tc>
                 <a:tc>
@@ -6890,21 +6536,14 @@
                         <a:buNone/>
                       </a:pPr>
                       <a:r>
-                        <a:rPr lang="en-US" sz="800" dirty="0">
+                        <a:rPr lang="en-US" sz="1200" dirty="0">
                           <a:solidFill>
-                            <a:srgbClr val="141E1E"/>
+                            <a:srgbClr val="000000"/>
                           </a:solidFill>
-                          <a:latin typeface="Calibri" pitchFamily="34" charset="0"/>
-                          <a:ea typeface="Calibri" pitchFamily="34" charset="-122"/>
-                          <a:cs typeface="Calibri" pitchFamily="34" charset="-120"/>
                         </a:rPr>
                         <a:t>8,064</a:t>
                       </a:r>
-                      <a:endParaRPr lang="en-US" sz="800" dirty="0">
-                        <a:latin typeface="Calibri" charset="0"/>
-                        <a:ea typeface="Calibri" charset="0"/>
-                        <a:cs typeface="Calibri" charset="0"/>
-                      </a:endParaRPr>
+                      <a:endParaRPr lang="en-US" sz="1200" dirty="0"/>
                     </a:p>
                   </a:txBody>
                   <a:tcPr marL="91440" marR="91440" marT="45720" marB="45720">
@@ -6944,9 +6583,6 @@
                       <a:headEnd type="none" w="med" len="med"/>
                       <a:tailEnd type="none" w="med" len="med"/>
                     </a:lnB>
-                    <a:solidFill>
-                      <a:srgbClr val="EEF3F2"/>
-                    </a:solidFill>
                   </a:tcPr>
                 </a:tc>
                 <a:tc>
@@ -6958,21 +6594,14 @@
                         <a:buNone/>
                       </a:pPr>
                       <a:r>
-                        <a:rPr lang="en-US" sz="800" dirty="0">
+                        <a:rPr lang="en-US" sz="1200" dirty="0">
                           <a:solidFill>
-                            <a:srgbClr val="141E1E"/>
+                            <a:srgbClr val="000000"/>
                           </a:solidFill>
-                          <a:latin typeface="Calibri" pitchFamily="34" charset="0"/>
-                          <a:ea typeface="Calibri" pitchFamily="34" charset="-122"/>
-                          <a:cs typeface="Calibri" pitchFamily="34" charset="-120"/>
                         </a:rPr>
                         <a:t>4</a:t>
                       </a:r>
-                      <a:endParaRPr lang="en-US" sz="800" dirty="0">
-                        <a:latin typeface="Calibri" charset="0"/>
-                        <a:ea typeface="Calibri" charset="0"/>
-                        <a:cs typeface="Calibri" charset="0"/>
-                      </a:endParaRPr>
+                      <a:endParaRPr lang="en-US" sz="1200" dirty="0"/>
                     </a:p>
                   </a:txBody>
                   <a:tcPr marL="91440" marR="91440" marT="45720" marB="45720">
@@ -7012,9 +6641,6 @@
                       <a:headEnd type="none" w="med" len="med"/>
                       <a:tailEnd type="none" w="med" len="med"/>
                     </a:lnB>
-                    <a:solidFill>
-                      <a:srgbClr val="EEF3F2"/>
-                    </a:solidFill>
                   </a:tcPr>
                 </a:tc>
                 <a:tc>
@@ -7026,21 +6652,14 @@
                         <a:buNone/>
                       </a:pPr>
                       <a:r>
-                        <a:rPr lang="en-US" sz="800" dirty="0">
+                        <a:rPr lang="en-US" sz="1200" dirty="0">
                           <a:solidFill>
-                            <a:srgbClr val="141E1E"/>
+                            <a:srgbClr val="000000"/>
                           </a:solidFill>
-                          <a:latin typeface="Calibri" pitchFamily="34" charset="0"/>
-                          <a:ea typeface="Calibri" pitchFamily="34" charset="-122"/>
-                          <a:cs typeface="Calibri" pitchFamily="34" charset="-120"/>
                         </a:rPr>
                         <a:t>PI28-29</a:t>
                       </a:r>
-                      <a:endParaRPr lang="en-US" sz="800" dirty="0">
-                        <a:latin typeface="Calibri" charset="0"/>
-                        <a:ea typeface="Calibri" charset="0"/>
-                        <a:cs typeface="Calibri" charset="0"/>
-                      </a:endParaRPr>
+                      <a:endParaRPr lang="en-US" sz="1200" dirty="0"/>
                     </a:p>
                   </a:txBody>
                   <a:tcPr marL="91440" marR="91440" marT="45720" marB="45720">
@@ -7080,9 +6699,6 @@
                       <a:headEnd type="none" w="med" len="med"/>
                       <a:tailEnd type="none" w="med" len="med"/>
                     </a:lnB>
-                    <a:solidFill>
-                      <a:srgbClr val="EEF3F2"/>
-                    </a:solidFill>
                   </a:tcPr>
                 </a:tc>
                 <a:tc>
@@ -7094,21 +6710,14 @@
                         <a:buNone/>
                       </a:pPr>
                       <a:r>
-                        <a:rPr lang="en-US" sz="800" dirty="0">
+                        <a:rPr lang="en-US" sz="1200" dirty="0">
                           <a:solidFill>
-                            <a:srgbClr val="141E1E"/>
+                            <a:srgbClr val="000000"/>
                           </a:solidFill>
-                          <a:latin typeface="Calibri" pitchFamily="34" charset="0"/>
-                          <a:ea typeface="Calibri" pitchFamily="34" charset="-122"/>
-                          <a:cs typeface="Calibri" pitchFamily="34" charset="-120"/>
                         </a:rPr>
                         <a:t>P1</a:t>
                       </a:r>
-                      <a:endParaRPr lang="en-US" sz="800" dirty="0">
-                        <a:latin typeface="Calibri" charset="0"/>
-                        <a:ea typeface="Calibri" charset="0"/>
-                        <a:cs typeface="Calibri" charset="0"/>
-                      </a:endParaRPr>
+                      <a:endParaRPr lang="en-US" sz="1200" dirty="0"/>
                     </a:p>
                   </a:txBody>
                   <a:tcPr marL="91440" marR="91440" marT="45720" marB="45720">
@@ -7148,9 +6757,6 @@
                       <a:headEnd type="none" w="med" len="med"/>
                       <a:tailEnd type="none" w="med" len="med"/>
                     </a:lnB>
-                    <a:solidFill>
-                      <a:srgbClr val="EEF3F2"/>
-                    </a:solidFill>
                   </a:tcPr>
                 </a:tc>
               </a:tr>
@@ -7160,25 +6766,18 @@
                     <a:bodyPr/>
                     <a:lstStyle/>
                     <a:p>
-                      <a:pPr algn="l" indent="0" marL="0">
+                      <a:pPr indent="0" marL="0">
                         <a:buNone/>
                       </a:pPr>
                       <a:r>
-                        <a:rPr lang="en-US" sz="800" dirty="0">
+                        <a:rPr lang="en-US" sz="1200" dirty="0">
                           <a:solidFill>
-                            <a:srgbClr val="141E1E"/>
+                            <a:srgbClr val="000000"/>
                           </a:solidFill>
-                          <a:latin typeface="Calibri" pitchFamily="34" charset="0"/>
-                          <a:ea typeface="Calibri" pitchFamily="34" charset="-122"/>
-                          <a:cs typeface="Calibri" pitchFamily="34" charset="-120"/>
                         </a:rPr>
                         <a:t>Billing &amp; Assessments</a:t>
                       </a:r>
-                      <a:endParaRPr lang="en-US" sz="800" dirty="0">
-                        <a:latin typeface="Calibri" charset="0"/>
-                        <a:ea typeface="Calibri" charset="0"/>
-                        <a:cs typeface="Calibri" charset="0"/>
-                      </a:endParaRPr>
+                      <a:endParaRPr lang="en-US" sz="1200" dirty="0"/>
                     </a:p>
                   </a:txBody>
                   <a:tcPr marL="91440" marR="91440" marT="45720" marB="45720">
@@ -7218,9 +6817,6 @@
                       <a:headEnd type="none" w="med" len="med"/>
                       <a:tailEnd type="none" w="med" len="med"/>
                     </a:lnB>
-                    <a:solidFill>
-                      <a:srgbClr val="FFFFFF"/>
-                    </a:solidFill>
                   </a:tcPr>
                 </a:tc>
                 <a:tc>
@@ -7232,21 +6828,14 @@
                         <a:buNone/>
                       </a:pPr>
                       <a:r>
-                        <a:rPr lang="en-US" sz="800" dirty="0">
+                        <a:rPr lang="en-US" sz="1200" dirty="0">
                           <a:solidFill>
-                            <a:srgbClr val="141E1E"/>
+                            <a:srgbClr val="000000"/>
                           </a:solidFill>
-                          <a:latin typeface="Calibri" pitchFamily="34" charset="0"/>
-                          <a:ea typeface="Calibri" pitchFamily="34" charset="-122"/>
-                          <a:cs typeface="Calibri" pitchFamily="34" charset="-120"/>
                         </a:rPr>
                         <a:t>2,880</a:t>
                       </a:r>
-                      <a:endParaRPr lang="en-US" sz="800" dirty="0">
-                        <a:latin typeface="Calibri" charset="0"/>
-                        <a:ea typeface="Calibri" charset="0"/>
-                        <a:cs typeface="Calibri" charset="0"/>
-                      </a:endParaRPr>
+                      <a:endParaRPr lang="en-US" sz="1200" dirty="0"/>
                     </a:p>
                   </a:txBody>
                   <a:tcPr marL="91440" marR="91440" marT="45720" marB="45720">
@@ -7286,9 +6875,6 @@
                       <a:headEnd type="none" w="med" len="med"/>
                       <a:tailEnd type="none" w="med" len="med"/>
                     </a:lnB>
-                    <a:solidFill>
-                      <a:srgbClr val="FFFFFF"/>
-                    </a:solidFill>
                   </a:tcPr>
                 </a:tc>
                 <a:tc>
@@ -7300,21 +6886,14 @@
                         <a:buNone/>
                       </a:pPr>
                       <a:r>
-                        <a:rPr lang="en-US" sz="800" dirty="0">
+                        <a:rPr lang="en-US" sz="1200" dirty="0">
                           <a:solidFill>
-                            <a:srgbClr val="141E1E"/>
+                            <a:srgbClr val="000000"/>
                           </a:solidFill>
-                          <a:latin typeface="Calibri" pitchFamily="34" charset="0"/>
-                          <a:ea typeface="Calibri" pitchFamily="34" charset="-122"/>
-                          <a:cs typeface="Calibri" pitchFamily="34" charset="-120"/>
                         </a:rPr>
                         <a:t>3</a:t>
                       </a:r>
-                      <a:endParaRPr lang="en-US" sz="800" dirty="0">
-                        <a:latin typeface="Calibri" charset="0"/>
-                        <a:ea typeface="Calibri" charset="0"/>
-                        <a:cs typeface="Calibri" charset="0"/>
-                      </a:endParaRPr>
+                      <a:endParaRPr lang="en-US" sz="1200" dirty="0"/>
                     </a:p>
                   </a:txBody>
                   <a:tcPr marL="91440" marR="91440" marT="45720" marB="45720">
@@ -7354,9 +6933,6 @@
                       <a:headEnd type="none" w="med" len="med"/>
                       <a:tailEnd type="none" w="med" len="med"/>
                     </a:lnB>
-                    <a:solidFill>
-                      <a:srgbClr val="FFFFFF"/>
-                    </a:solidFill>
                   </a:tcPr>
                 </a:tc>
                 <a:tc>
@@ -7368,21 +6944,14 @@
                         <a:buNone/>
                       </a:pPr>
                       <a:r>
-                        <a:rPr lang="en-US" sz="800" dirty="0">
+                        <a:rPr lang="en-US" sz="1200" dirty="0">
                           <a:solidFill>
-                            <a:srgbClr val="141E1E"/>
+                            <a:srgbClr val="000000"/>
                           </a:solidFill>
-                          <a:latin typeface="Calibri" pitchFamily="34" charset="0"/>
-                          <a:ea typeface="Calibri" pitchFamily="34" charset="-122"/>
-                          <a:cs typeface="Calibri" pitchFamily="34" charset="-120"/>
                         </a:rPr>
                         <a:t>PI28-29</a:t>
                       </a:r>
-                      <a:endParaRPr lang="en-US" sz="800" dirty="0">
-                        <a:latin typeface="Calibri" charset="0"/>
-                        <a:ea typeface="Calibri" charset="0"/>
-                        <a:cs typeface="Calibri" charset="0"/>
-                      </a:endParaRPr>
+                      <a:endParaRPr lang="en-US" sz="1200" dirty="0"/>
                     </a:p>
                   </a:txBody>
                   <a:tcPr marL="91440" marR="91440" marT="45720" marB="45720">
@@ -7422,9 +6991,6 @@
                       <a:headEnd type="none" w="med" len="med"/>
                       <a:tailEnd type="none" w="med" len="med"/>
                     </a:lnB>
-                    <a:solidFill>
-                      <a:srgbClr val="FFFFFF"/>
-                    </a:solidFill>
                   </a:tcPr>
                 </a:tc>
                 <a:tc>
@@ -7436,21 +7002,14 @@
                         <a:buNone/>
                       </a:pPr>
                       <a:r>
-                        <a:rPr lang="en-US" sz="800" dirty="0">
+                        <a:rPr lang="en-US" sz="1200" dirty="0">
                           <a:solidFill>
-                            <a:srgbClr val="141E1E"/>
+                            <a:srgbClr val="000000"/>
                           </a:solidFill>
-                          <a:latin typeface="Calibri" pitchFamily="34" charset="0"/>
-                          <a:ea typeface="Calibri" pitchFamily="34" charset="-122"/>
-                          <a:cs typeface="Calibri" pitchFamily="34" charset="-120"/>
                         </a:rPr>
                         <a:t>P1-2</a:t>
                       </a:r>
-                      <a:endParaRPr lang="en-US" sz="800" dirty="0">
-                        <a:latin typeface="Calibri" charset="0"/>
-                        <a:ea typeface="Calibri" charset="0"/>
-                        <a:cs typeface="Calibri" charset="0"/>
-                      </a:endParaRPr>
+                      <a:endParaRPr lang="en-US" sz="1200" dirty="0"/>
                     </a:p>
                   </a:txBody>
                   <a:tcPr marL="91440" marR="91440" marT="45720" marB="45720">
@@ -7490,9 +7049,6 @@
                       <a:headEnd type="none" w="med" len="med"/>
                       <a:tailEnd type="none" w="med" len="med"/>
                     </a:lnB>
-                    <a:solidFill>
-                      <a:srgbClr val="FFFFFF"/>
-                    </a:solidFill>
                   </a:tcPr>
                 </a:tc>
               </a:tr>
@@ -7502,25 +7058,18 @@
                     <a:bodyPr/>
                     <a:lstStyle/>
                     <a:p>
-                      <a:pPr algn="l" indent="0" marL="0">
+                      <a:pPr indent="0" marL="0">
                         <a:buNone/>
                       </a:pPr>
                       <a:r>
-                        <a:rPr lang="en-US" sz="800" dirty="0">
+                        <a:rPr lang="en-US" sz="1200" dirty="0">
                           <a:solidFill>
-                            <a:srgbClr val="141E1E"/>
+                            <a:srgbClr val="000000"/>
                           </a:solidFill>
-                          <a:latin typeface="Calibri" pitchFamily="34" charset="0"/>
-                          <a:ea typeface="Calibri" pitchFamily="34" charset="-122"/>
-                          <a:cs typeface="Calibri" pitchFamily="34" charset="-120"/>
                         </a:rPr>
                         <a:t>Exemptions</a:t>
                       </a:r>
-                      <a:endParaRPr lang="en-US" sz="800" dirty="0">
-                        <a:latin typeface="Calibri" charset="0"/>
-                        <a:ea typeface="Calibri" charset="0"/>
-                        <a:cs typeface="Calibri" charset="0"/>
-                      </a:endParaRPr>
+                      <a:endParaRPr lang="en-US" sz="1200" dirty="0"/>
                     </a:p>
                   </a:txBody>
                   <a:tcPr marL="91440" marR="91440" marT="45720" marB="45720">
@@ -7560,9 +7109,6 @@
                       <a:headEnd type="none" w="med" len="med"/>
                       <a:tailEnd type="none" w="med" len="med"/>
                     </a:lnB>
-                    <a:solidFill>
-                      <a:srgbClr val="EEF3F2"/>
-                    </a:solidFill>
                   </a:tcPr>
                 </a:tc>
                 <a:tc>
@@ -7574,21 +7120,14 @@
                         <a:buNone/>
                       </a:pPr>
                       <a:r>
-                        <a:rPr lang="en-US" sz="800" dirty="0">
+                        <a:rPr lang="en-US" sz="1200" dirty="0">
                           <a:solidFill>
-                            <a:srgbClr val="141E1E"/>
+                            <a:srgbClr val="000000"/>
                           </a:solidFill>
-                          <a:latin typeface="Calibri" pitchFamily="34" charset="0"/>
-                          <a:ea typeface="Calibri" pitchFamily="34" charset="-122"/>
-                          <a:cs typeface="Calibri" pitchFamily="34" charset="-120"/>
                         </a:rPr>
                         <a:t>390</a:t>
                       </a:r>
-                      <a:endParaRPr lang="en-US" sz="800" dirty="0">
-                        <a:latin typeface="Calibri" charset="0"/>
-                        <a:ea typeface="Calibri" charset="0"/>
-                        <a:cs typeface="Calibri" charset="0"/>
-                      </a:endParaRPr>
+                      <a:endParaRPr lang="en-US" sz="1200" dirty="0"/>
                     </a:p>
                   </a:txBody>
                   <a:tcPr marL="91440" marR="91440" marT="45720" marB="45720">
@@ -7628,9 +7167,6 @@
                       <a:headEnd type="none" w="med" len="med"/>
                       <a:tailEnd type="none" w="med" len="med"/>
                     </a:lnB>
-                    <a:solidFill>
-                      <a:srgbClr val="EEF3F2"/>
-                    </a:solidFill>
                   </a:tcPr>
                 </a:tc>
                 <a:tc>
@@ -7642,21 +7178,14 @@
                         <a:buNone/>
                       </a:pPr>
                       <a:r>
-                        <a:rPr lang="en-US" sz="800" dirty="0">
+                        <a:rPr lang="en-US" sz="1200" dirty="0">
                           <a:solidFill>
-                            <a:srgbClr val="141E1E"/>
+                            <a:srgbClr val="000000"/>
                           </a:solidFill>
-                          <a:latin typeface="Calibri" pitchFamily="34" charset="0"/>
-                          <a:ea typeface="Calibri" pitchFamily="34" charset="-122"/>
-                          <a:cs typeface="Calibri" pitchFamily="34" charset="-120"/>
                         </a:rPr>
                         <a:t>1</a:t>
                       </a:r>
-                      <a:endParaRPr lang="en-US" sz="800" dirty="0">
-                        <a:latin typeface="Calibri" charset="0"/>
-                        <a:ea typeface="Calibri" charset="0"/>
-                        <a:cs typeface="Calibri" charset="0"/>
-                      </a:endParaRPr>
+                      <a:endParaRPr lang="en-US" sz="1200" dirty="0"/>
                     </a:p>
                   </a:txBody>
                   <a:tcPr marL="91440" marR="91440" marT="45720" marB="45720">
@@ -7696,9 +7225,6 @@
                       <a:headEnd type="none" w="med" len="med"/>
                       <a:tailEnd type="none" w="med" len="med"/>
                     </a:lnB>
-                    <a:solidFill>
-                      <a:srgbClr val="EEF3F2"/>
-                    </a:solidFill>
                   </a:tcPr>
                 </a:tc>
                 <a:tc>
@@ -7710,21 +7236,14 @@
                         <a:buNone/>
                       </a:pPr>
                       <a:r>
-                        <a:rPr lang="en-US" sz="800" dirty="0">
+                        <a:rPr lang="en-US" sz="1200" dirty="0">
                           <a:solidFill>
-                            <a:srgbClr val="141E1E"/>
+                            <a:srgbClr val="000000"/>
                           </a:solidFill>
-                          <a:latin typeface="Calibri" pitchFamily="34" charset="0"/>
-                          <a:ea typeface="Calibri" pitchFamily="34" charset="-122"/>
-                          <a:cs typeface="Calibri" pitchFamily="34" charset="-120"/>
                         </a:rPr>
                         <a:t>PI28</a:t>
                       </a:r>
-                      <a:endParaRPr lang="en-US" sz="800" dirty="0">
-                        <a:latin typeface="Calibri" charset="0"/>
-                        <a:ea typeface="Calibri" charset="0"/>
-                        <a:cs typeface="Calibri" charset="0"/>
-                      </a:endParaRPr>
+                      <a:endParaRPr lang="en-US" sz="1200" dirty="0"/>
                     </a:p>
                   </a:txBody>
                   <a:tcPr marL="91440" marR="91440" marT="45720" marB="45720">
@@ -7764,9 +7283,6 @@
                       <a:headEnd type="none" w="med" len="med"/>
                       <a:tailEnd type="none" w="med" len="med"/>
                     </a:lnB>
-                    <a:solidFill>
-                      <a:srgbClr val="EEF3F2"/>
-                    </a:solidFill>
                   </a:tcPr>
                 </a:tc>
                 <a:tc>
@@ -7778,21 +7294,14 @@
                         <a:buNone/>
                       </a:pPr>
                       <a:r>
-                        <a:rPr lang="en-US" sz="800" dirty="0">
+                        <a:rPr lang="en-US" sz="1200" dirty="0">
                           <a:solidFill>
-                            <a:srgbClr val="141E1E"/>
+                            <a:srgbClr val="000000"/>
                           </a:solidFill>
-                          <a:latin typeface="Calibri" pitchFamily="34" charset="0"/>
-                          <a:ea typeface="Calibri" pitchFamily="34" charset="-122"/>
-                          <a:cs typeface="Calibri" pitchFamily="34" charset="-120"/>
                         </a:rPr>
                         <a:t>P2</a:t>
                       </a:r>
-                      <a:endParaRPr lang="en-US" sz="800" dirty="0">
-                        <a:latin typeface="Calibri" charset="0"/>
-                        <a:ea typeface="Calibri" charset="0"/>
-                        <a:cs typeface="Calibri" charset="0"/>
-                      </a:endParaRPr>
+                      <a:endParaRPr lang="en-US" sz="1200" dirty="0"/>
                     </a:p>
                   </a:txBody>
                   <a:tcPr marL="91440" marR="91440" marT="45720" marB="45720">
@@ -7832,9 +7341,6 @@
                       <a:headEnd type="none" w="med" len="med"/>
                       <a:tailEnd type="none" w="med" len="med"/>
                     </a:lnB>
-                    <a:solidFill>
-                      <a:srgbClr val="EEF3F2"/>
-                    </a:solidFill>
                   </a:tcPr>
                 </a:tc>
               </a:tr>
@@ -7844,25 +7350,18 @@
                     <a:bodyPr/>
                     <a:lstStyle/>
                     <a:p>
-                      <a:pPr algn="l" indent="0" marL="0">
+                      <a:pPr indent="0" marL="0">
                         <a:buNone/>
                       </a:pPr>
                       <a:r>
-                        <a:rPr lang="en-US" sz="800" dirty="0">
+                        <a:rPr lang="en-US" sz="1200" dirty="0">
                           <a:solidFill>
-                            <a:srgbClr val="141E1E"/>
+                            <a:srgbClr val="000000"/>
                           </a:solidFill>
-                          <a:latin typeface="Calibri" pitchFamily="34" charset="0"/>
-                          <a:ea typeface="Calibri" pitchFamily="34" charset="-122"/>
-                          <a:cs typeface="Calibri" pitchFamily="34" charset="-120"/>
                         </a:rPr>
                         <a:t>Penalty &amp; Interest</a:t>
                       </a:r>
-                      <a:endParaRPr lang="en-US" sz="800" dirty="0">
-                        <a:latin typeface="Calibri" charset="0"/>
-                        <a:ea typeface="Calibri" charset="0"/>
-                        <a:cs typeface="Calibri" charset="0"/>
-                      </a:endParaRPr>
+                      <a:endParaRPr lang="en-US" sz="1200" dirty="0"/>
                     </a:p>
                   </a:txBody>
                   <a:tcPr marL="91440" marR="91440" marT="45720" marB="45720">
@@ -7902,9 +7401,6 @@
                       <a:headEnd type="none" w="med" len="med"/>
                       <a:tailEnd type="none" w="med" len="med"/>
                     </a:lnB>
-                    <a:solidFill>
-                      <a:srgbClr val="FFFFFF"/>
-                    </a:solidFill>
                   </a:tcPr>
                 </a:tc>
                 <a:tc>
@@ -7916,21 +7412,14 @@
                         <a:buNone/>
                       </a:pPr>
                       <a:r>
-                        <a:rPr lang="en-US" sz="800" dirty="0">
+                        <a:rPr lang="en-US" sz="1200" dirty="0">
                           <a:solidFill>
-                            <a:srgbClr val="141E1E"/>
+                            <a:srgbClr val="000000"/>
                           </a:solidFill>
-                          <a:latin typeface="Calibri" pitchFamily="34" charset="0"/>
-                          <a:ea typeface="Calibri" pitchFamily="34" charset="-122"/>
-                          <a:cs typeface="Calibri" pitchFamily="34" charset="-120"/>
                         </a:rPr>
                         <a:t>TBD</a:t>
                       </a:r>
-                      <a:endParaRPr lang="en-US" sz="800" dirty="0">
-                        <a:latin typeface="Calibri" charset="0"/>
-                        <a:ea typeface="Calibri" charset="0"/>
-                        <a:cs typeface="Calibri" charset="0"/>
-                      </a:endParaRPr>
+                      <a:endParaRPr lang="en-US" sz="1200" dirty="0"/>
                     </a:p>
                   </a:txBody>
                   <a:tcPr marL="91440" marR="91440" marT="45720" marB="45720">
@@ -7970,9 +7459,6 @@
                       <a:headEnd type="none" w="med" len="med"/>
                       <a:tailEnd type="none" w="med" len="med"/>
                     </a:lnB>
-                    <a:solidFill>
-                      <a:srgbClr val="FFFFFF"/>
-                    </a:solidFill>
                   </a:tcPr>
                 </a:tc>
                 <a:tc>
@@ -7984,21 +7470,14 @@
                         <a:buNone/>
                       </a:pPr>
                       <a:r>
-                        <a:rPr lang="en-US" sz="800" dirty="0">
+                        <a:rPr lang="en-US" sz="1200" dirty="0">
                           <a:solidFill>
-                            <a:srgbClr val="141E1E"/>
+                            <a:srgbClr val="000000"/>
                           </a:solidFill>
-                          <a:latin typeface="Calibri" pitchFamily="34" charset="0"/>
-                          <a:ea typeface="Calibri" pitchFamily="34" charset="-122"/>
-                          <a:cs typeface="Calibri" pitchFamily="34" charset="-120"/>
                         </a:rPr>
                         <a:t>1</a:t>
                       </a:r>
-                      <a:endParaRPr lang="en-US" sz="800" dirty="0">
-                        <a:latin typeface="Calibri" charset="0"/>
-                        <a:ea typeface="Calibri" charset="0"/>
-                        <a:cs typeface="Calibri" charset="0"/>
-                      </a:endParaRPr>
+                      <a:endParaRPr lang="en-US" sz="1200" dirty="0"/>
                     </a:p>
                   </a:txBody>
                   <a:tcPr marL="91440" marR="91440" marT="45720" marB="45720">
@@ -8038,9 +7517,6 @@
                       <a:headEnd type="none" w="med" len="med"/>
                       <a:tailEnd type="none" w="med" len="med"/>
                     </a:lnB>
-                    <a:solidFill>
-                      <a:srgbClr val="FFFFFF"/>
-                    </a:solidFill>
                   </a:tcPr>
                 </a:tc>
                 <a:tc>
@@ -8052,21 +7528,14 @@
                         <a:buNone/>
                       </a:pPr>
                       <a:r>
-                        <a:rPr lang="en-US" sz="800" dirty="0">
+                        <a:rPr lang="en-US" sz="1200" dirty="0">
                           <a:solidFill>
-                            <a:srgbClr val="141E1E"/>
+                            <a:srgbClr val="000000"/>
                           </a:solidFill>
-                          <a:latin typeface="Calibri" pitchFamily="34" charset="0"/>
-                          <a:ea typeface="Calibri" pitchFamily="34" charset="-122"/>
-                          <a:cs typeface="Calibri" pitchFamily="34" charset="-120"/>
                         </a:rPr>
                         <a:t>PI28-29</a:t>
                       </a:r>
-                      <a:endParaRPr lang="en-US" sz="800" dirty="0">
-                        <a:latin typeface="Calibri" charset="0"/>
-                        <a:ea typeface="Calibri" charset="0"/>
-                        <a:cs typeface="Calibri" charset="0"/>
-                      </a:endParaRPr>
+                      <a:endParaRPr lang="en-US" sz="1200" dirty="0"/>
                     </a:p>
                   </a:txBody>
                   <a:tcPr marL="91440" marR="91440" marT="45720" marB="45720">
@@ -8106,9 +7575,6 @@
                       <a:headEnd type="none" w="med" len="med"/>
                       <a:tailEnd type="none" w="med" len="med"/>
                     </a:lnB>
-                    <a:solidFill>
-                      <a:srgbClr val="FFFFFF"/>
-                    </a:solidFill>
                   </a:tcPr>
                 </a:tc>
                 <a:tc>
@@ -8120,21 +7586,14 @@
                         <a:buNone/>
                       </a:pPr>
                       <a:r>
-                        <a:rPr lang="en-US" sz="800" dirty="0">
+                        <a:rPr lang="en-US" sz="1200" dirty="0">
                           <a:solidFill>
-                            <a:srgbClr val="141E1E"/>
+                            <a:srgbClr val="000000"/>
                           </a:solidFill>
-                          <a:latin typeface="Calibri" pitchFamily="34" charset="0"/>
-                          <a:ea typeface="Calibri" pitchFamily="34" charset="-122"/>
-                          <a:cs typeface="Calibri" pitchFamily="34" charset="-120"/>
                         </a:rPr>
                         <a:t>P2</a:t>
                       </a:r>
-                      <a:endParaRPr lang="en-US" sz="800" dirty="0">
-                        <a:latin typeface="Calibri" charset="0"/>
-                        <a:ea typeface="Calibri" charset="0"/>
-                        <a:cs typeface="Calibri" charset="0"/>
-                      </a:endParaRPr>
+                      <a:endParaRPr lang="en-US" sz="1200" dirty="0"/>
                     </a:p>
                   </a:txBody>
                   <a:tcPr marL="91440" marR="91440" marT="45720" marB="45720">
@@ -8174,9 +7633,6 @@
                       <a:headEnd type="none" w="med" len="med"/>
                       <a:tailEnd type="none" w="med" len="med"/>
                     </a:lnB>
-                    <a:solidFill>
-                      <a:srgbClr val="FFFFFF"/>
-                    </a:solidFill>
                   </a:tcPr>
                 </a:tc>
               </a:tr>
@@ -8186,25 +7642,18 @@
                     <a:bodyPr/>
                     <a:lstStyle/>
                     <a:p>
-                      <a:pPr algn="l" indent="0" marL="0">
+                      <a:pPr indent="0" marL="0">
                         <a:buNone/>
                       </a:pPr>
                       <a:r>
-                        <a:rPr lang="en-US" sz="800" dirty="0">
+                        <a:rPr lang="en-US" sz="1200" dirty="0">
                           <a:solidFill>
-                            <a:srgbClr val="141E1E"/>
+                            <a:srgbClr val="000000"/>
                           </a:solidFill>
-                          <a:latin typeface="Calibri" pitchFamily="34" charset="0"/>
-                          <a:ea typeface="Calibri" pitchFamily="34" charset="-122"/>
-                          <a:cs typeface="Calibri" pitchFamily="34" charset="-120"/>
                         </a:rPr>
                         <a:t>Tax Accounts</a:t>
                       </a:r>
-                      <a:endParaRPr lang="en-US" sz="800" dirty="0">
-                        <a:latin typeface="Calibri" charset="0"/>
-                        <a:ea typeface="Calibri" charset="0"/>
-                        <a:cs typeface="Calibri" charset="0"/>
-                      </a:endParaRPr>
+                      <a:endParaRPr lang="en-US" sz="1200" dirty="0"/>
                     </a:p>
                   </a:txBody>
                   <a:tcPr marL="91440" marR="91440" marT="45720" marB="45720">
@@ -8244,9 +7693,6 @@
                       <a:headEnd type="none" w="med" len="med"/>
                       <a:tailEnd type="none" w="med" len="med"/>
                     </a:lnB>
-                    <a:solidFill>
-                      <a:srgbClr val="EEF3F2"/>
-                    </a:solidFill>
                   </a:tcPr>
                 </a:tc>
                 <a:tc>
@@ -8258,21 +7704,14 @@
                         <a:buNone/>
                       </a:pPr>
                       <a:r>
-                        <a:rPr lang="en-US" sz="800" dirty="0">
+                        <a:rPr lang="en-US" sz="1200" dirty="0">
                           <a:solidFill>
-                            <a:srgbClr val="141E1E"/>
+                            <a:srgbClr val="000000"/>
                           </a:solidFill>
-                          <a:latin typeface="Calibri" pitchFamily="34" charset="0"/>
-                          <a:ea typeface="Calibri" pitchFamily="34" charset="-122"/>
-                          <a:cs typeface="Calibri" pitchFamily="34" charset="-120"/>
                         </a:rPr>
                         <a:t>TBD</a:t>
                       </a:r>
-                      <a:endParaRPr lang="en-US" sz="800" dirty="0">
-                        <a:latin typeface="Calibri" charset="0"/>
-                        <a:ea typeface="Calibri" charset="0"/>
-                        <a:cs typeface="Calibri" charset="0"/>
-                      </a:endParaRPr>
+                      <a:endParaRPr lang="en-US" sz="1200" dirty="0"/>
                     </a:p>
                   </a:txBody>
                   <a:tcPr marL="91440" marR="91440" marT="45720" marB="45720">
@@ -8312,9 +7751,6 @@
                       <a:headEnd type="none" w="med" len="med"/>
                       <a:tailEnd type="none" w="med" len="med"/>
                     </a:lnB>
-                    <a:solidFill>
-                      <a:srgbClr val="EEF3F2"/>
-                    </a:solidFill>
                   </a:tcPr>
                 </a:tc>
                 <a:tc>
@@ -8326,21 +7762,14 @@
                         <a:buNone/>
                       </a:pPr>
                       <a:r>
-                        <a:rPr lang="en-US" sz="800" dirty="0">
+                        <a:rPr lang="en-US" sz="1200" dirty="0">
                           <a:solidFill>
-                            <a:srgbClr val="141E1E"/>
+                            <a:srgbClr val="000000"/>
                           </a:solidFill>
-                          <a:latin typeface="Calibri" pitchFamily="34" charset="0"/>
-                          <a:ea typeface="Calibri" pitchFamily="34" charset="-122"/>
-                          <a:cs typeface="Calibri" pitchFamily="34" charset="-120"/>
                         </a:rPr>
                         <a:t>1</a:t>
                       </a:r>
-                      <a:endParaRPr lang="en-US" sz="800" dirty="0">
-                        <a:latin typeface="Calibri" charset="0"/>
-                        <a:ea typeface="Calibri" charset="0"/>
-                        <a:cs typeface="Calibri" charset="0"/>
-                      </a:endParaRPr>
+                      <a:endParaRPr lang="en-US" sz="1200" dirty="0"/>
                     </a:p>
                   </a:txBody>
                   <a:tcPr marL="91440" marR="91440" marT="45720" marB="45720">
@@ -8380,9 +7809,6 @@
                       <a:headEnd type="none" w="med" len="med"/>
                       <a:tailEnd type="none" w="med" len="med"/>
                     </a:lnB>
-                    <a:solidFill>
-                      <a:srgbClr val="EEF3F2"/>
-                    </a:solidFill>
                   </a:tcPr>
                 </a:tc>
                 <a:tc>
@@ -8394,21 +7820,14 @@
                         <a:buNone/>
                       </a:pPr>
                       <a:r>
-                        <a:rPr lang="en-US" sz="800" dirty="0">
+                        <a:rPr lang="en-US" sz="1200" dirty="0">
                           <a:solidFill>
-                            <a:srgbClr val="141E1E"/>
+                            <a:srgbClr val="000000"/>
                           </a:solidFill>
-                          <a:latin typeface="Calibri" pitchFamily="34" charset="0"/>
-                          <a:ea typeface="Calibri" pitchFamily="34" charset="-122"/>
-                          <a:cs typeface="Calibri" pitchFamily="34" charset="-120"/>
                         </a:rPr>
                         <a:t>PI28-29</a:t>
                       </a:r>
-                      <a:endParaRPr lang="en-US" sz="800" dirty="0">
-                        <a:latin typeface="Calibri" charset="0"/>
-                        <a:ea typeface="Calibri" charset="0"/>
-                        <a:cs typeface="Calibri" charset="0"/>
-                      </a:endParaRPr>
+                      <a:endParaRPr lang="en-US" sz="1200" dirty="0"/>
                     </a:p>
                   </a:txBody>
                   <a:tcPr marL="91440" marR="91440" marT="45720" marB="45720">
@@ -8448,9 +7867,6 @@
                       <a:headEnd type="none" w="med" len="med"/>
                       <a:tailEnd type="none" w="med" len="med"/>
                     </a:lnB>
-                    <a:solidFill>
-                      <a:srgbClr val="EEF3F2"/>
-                    </a:solidFill>
                   </a:tcPr>
                 </a:tc>
                 <a:tc>
@@ -8462,21 +7878,14 @@
                         <a:buNone/>
                       </a:pPr>
                       <a:r>
-                        <a:rPr lang="en-US" sz="800" dirty="0">
+                        <a:rPr lang="en-US" sz="1200" dirty="0">
                           <a:solidFill>
-                            <a:srgbClr val="141E1E"/>
+                            <a:srgbClr val="000000"/>
                           </a:solidFill>
-                          <a:latin typeface="Calibri" pitchFamily="34" charset="0"/>
-                          <a:ea typeface="Calibri" pitchFamily="34" charset="-122"/>
-                          <a:cs typeface="Calibri" pitchFamily="34" charset="-120"/>
                         </a:rPr>
                         <a:t>P1</a:t>
                       </a:r>
-                      <a:endParaRPr lang="en-US" sz="800" dirty="0">
-                        <a:latin typeface="Calibri" charset="0"/>
-                        <a:ea typeface="Calibri" charset="0"/>
-                        <a:cs typeface="Calibri" charset="0"/>
-                      </a:endParaRPr>
+                      <a:endParaRPr lang="en-US" sz="1200" dirty="0"/>
                     </a:p>
                   </a:txBody>
                   <a:tcPr marL="91440" marR="91440" marT="45720" marB="45720">
@@ -8516,9 +7925,6 @@
                       <a:headEnd type="none" w="med" len="med"/>
                       <a:tailEnd type="none" w="med" len="med"/>
                     </a:lnB>
-                    <a:solidFill>
-                      <a:srgbClr val="EEF3F2"/>
-                    </a:solidFill>
                   </a:tcPr>
                 </a:tc>
               </a:tr>
@@ -8575,12 +7981,7 @@
           <a:solidFill>
             <a:srgbClr val="123836"/>
           </a:solidFill>
-          <a:ln w="12700">
-            <a:solidFill>
-              <a:srgbClr val="123836"/>
-            </a:solidFill>
-            <a:prstDash val="solid"/>
-          </a:ln>
+          <a:ln/>
         </p:spPr>
       </p:sp>
       <p:sp>
@@ -8600,12 +8001,7 @@
           <a:solidFill>
             <a:srgbClr val="FF6359"/>
           </a:solidFill>
-          <a:ln w="12700">
-            <a:solidFill>
-              <a:srgbClr val="FF6359"/>
-            </a:solidFill>
-            <a:prstDash val="solid"/>
-          </a:ln>
+          <a:ln/>
         </p:spPr>
       </p:sp>
       <p:sp>
@@ -8626,7 +8022,7 @@
           <a:ln/>
         </p:spPr>
         <p:txBody>
-          <a:bodyPr wrap="square" lIns="0" tIns="0" rIns="0" bIns="0" rtlCol="0" anchor="ctr"/>
+          <a:bodyPr wrap="square" rtlCol="0" anchor="ctr"/>
           <a:lstStyle/>
           <a:p>
             <a:pPr indent="0" marL="0">
@@ -8665,7 +8061,7 @@
           <a:ln/>
         </p:spPr>
         <p:txBody>
-          <a:bodyPr wrap="square" lIns="0" tIns="0" rIns="0" bIns="0" rtlCol="0" anchor="ctr"/>
+          <a:bodyPr wrap="square" rtlCol="0" anchor="ctr"/>
           <a:lstStyle/>
           <a:p>
             <a:pPr indent="0" marL="0">
@@ -8704,7 +8100,7 @@
           <a:ln/>
         </p:spPr>
         <p:txBody>
-          <a:bodyPr wrap="square" lIns="0" tIns="0" rIns="0" bIns="0" rtlCol="0" anchor="ctr"/>
+          <a:bodyPr wrap="square" rtlCol="0" anchor="ctr"/>
           <a:lstStyle/>
           <a:p>
             <a:pPr algn="r" indent="0" marL="0">
@@ -8742,12 +8138,7 @@
           <a:solidFill>
             <a:srgbClr val="123836"/>
           </a:solidFill>
-          <a:ln w="12700">
-            <a:solidFill>
-              <a:srgbClr val="123836"/>
-            </a:solidFill>
-            <a:prstDash val="solid"/>
-          </a:ln>
+          <a:ln/>
         </p:spPr>
       </p:sp>
       <p:sp>
@@ -8768,7 +8159,7 @@
           <a:ln/>
         </p:spPr>
         <p:txBody>
-          <a:bodyPr wrap="square" lIns="0" tIns="0" rIns="0" bIns="0" rtlCol="0" anchor="ctr"/>
+          <a:bodyPr wrap="square" rtlCol="0" anchor="ctr"/>
           <a:lstStyle/>
           <a:p>
             <a:pPr indent="0" marL="0">
@@ -8807,7 +8198,7 @@
           <a:ln/>
         </p:spPr>
         <p:txBody>
-          <a:bodyPr wrap="square" lIns="0" tIns="0" rIns="0" bIns="0" rtlCol="0" anchor="ctr"/>
+          <a:bodyPr wrap="square" rtlCol="0" anchor="ctr"/>
           <a:lstStyle/>
           <a:p>
             <a:pPr algn="r" indent="0" marL="0">
@@ -8877,12 +8268,7 @@
           <a:solidFill>
             <a:srgbClr val="FF6359"/>
           </a:solidFill>
-          <a:ln w="12700">
-            <a:solidFill>
-              <a:srgbClr val="FF6359"/>
-            </a:solidFill>
-            <a:prstDash val="solid"/>
-          </a:ln>
+          <a:ln/>
         </p:spPr>
       </p:sp>
       <p:sp>
@@ -8903,7 +8289,7 @@
           <a:ln/>
         </p:spPr>
         <p:txBody>
-          <a:bodyPr wrap="square" lIns="0" tIns="0" rIns="0" bIns="0" rtlCol="0" anchor="ctr"/>
+          <a:bodyPr wrap="square" rtlCol="0" anchor="ctr"/>
           <a:lstStyle/>
           <a:p>
             <a:pPr algn="ctr" indent="0" marL="0">
@@ -8942,7 +8328,7 @@
           <a:ln/>
         </p:spPr>
         <p:txBody>
-          <a:bodyPr wrap="square" lIns="0" tIns="0" rIns="0" bIns="0" rtlCol="0" anchor="ctr"/>
+          <a:bodyPr wrap="square" rtlCol="0" anchor="ctr"/>
           <a:lstStyle/>
           <a:p>
             <a:pPr algn="ctr" indent="0" marL="0">
@@ -8981,7 +8367,7 @@
           <a:ln/>
         </p:spPr>
         <p:txBody>
-          <a:bodyPr wrap="square" lIns="0" tIns="0" rIns="0" bIns="0" rtlCol="0" anchor="ctr"/>
+          <a:bodyPr wrap="square" rtlCol="0" anchor="ctr"/>
           <a:lstStyle/>
           <a:p>
             <a:pPr algn="ctr" indent="0" marL="0">
@@ -9051,12 +8437,7 @@
           <a:solidFill>
             <a:srgbClr val="FF6359"/>
           </a:solidFill>
-          <a:ln w="12700">
-            <a:solidFill>
-              <a:srgbClr val="FF6359"/>
-            </a:solidFill>
-            <a:prstDash val="solid"/>
-          </a:ln>
+          <a:ln/>
         </p:spPr>
       </p:sp>
       <p:sp>
@@ -9077,7 +8458,7 @@
           <a:ln/>
         </p:spPr>
         <p:txBody>
-          <a:bodyPr wrap="square" lIns="0" tIns="0" rIns="0" bIns="0" rtlCol="0" anchor="ctr"/>
+          <a:bodyPr wrap="square" rtlCol="0" anchor="ctr"/>
           <a:lstStyle/>
           <a:p>
             <a:pPr algn="ctr" indent="0" marL="0">
@@ -9116,7 +8497,7 @@
           <a:ln/>
         </p:spPr>
         <p:txBody>
-          <a:bodyPr wrap="square" lIns="0" tIns="0" rIns="0" bIns="0" rtlCol="0" anchor="ctr"/>
+          <a:bodyPr wrap="square" rtlCol="0" anchor="ctr"/>
           <a:lstStyle/>
           <a:p>
             <a:pPr algn="ctr" indent="0" marL="0">
@@ -9155,7 +8536,7 @@
           <a:ln/>
         </p:spPr>
         <p:txBody>
-          <a:bodyPr wrap="square" lIns="0" tIns="0" rIns="0" bIns="0" rtlCol="0" anchor="ctr"/>
+          <a:bodyPr wrap="square" rtlCol="0" anchor="ctr"/>
           <a:lstStyle/>
           <a:p>
             <a:pPr algn="ctr" indent="0" marL="0">
@@ -9225,12 +8606,7 @@
           <a:solidFill>
             <a:srgbClr val="FF6359"/>
           </a:solidFill>
-          <a:ln w="12700">
-            <a:solidFill>
-              <a:srgbClr val="FF6359"/>
-            </a:solidFill>
-            <a:prstDash val="solid"/>
-          </a:ln>
+          <a:ln/>
         </p:spPr>
       </p:sp>
       <p:sp>
@@ -9251,7 +8627,7 @@
           <a:ln/>
         </p:spPr>
         <p:txBody>
-          <a:bodyPr wrap="square" lIns="0" tIns="0" rIns="0" bIns="0" rtlCol="0" anchor="ctr"/>
+          <a:bodyPr wrap="square" rtlCol="0" anchor="ctr"/>
           <a:lstStyle/>
           <a:p>
             <a:pPr algn="ctr" indent="0" marL="0">
@@ -9290,7 +8666,7 @@
           <a:ln/>
         </p:spPr>
         <p:txBody>
-          <a:bodyPr wrap="square" lIns="0" tIns="0" rIns="0" bIns="0" rtlCol="0" anchor="ctr"/>
+          <a:bodyPr wrap="square" rtlCol="0" anchor="ctr"/>
           <a:lstStyle/>
           <a:p>
             <a:pPr algn="ctr" indent="0" marL="0">
@@ -9329,7 +8705,7 @@
           <a:ln/>
         </p:spPr>
         <p:txBody>
-          <a:bodyPr wrap="square" lIns="0" tIns="0" rIns="0" bIns="0" rtlCol="0" anchor="ctr"/>
+          <a:bodyPr wrap="square" rtlCol="0" anchor="ctr"/>
           <a:lstStyle/>
           <a:p>
             <a:pPr algn="ctr" indent="0" marL="0">
@@ -9399,12 +8775,7 @@
           <a:solidFill>
             <a:srgbClr val="FF6359"/>
           </a:solidFill>
-          <a:ln w="12700">
-            <a:solidFill>
-              <a:srgbClr val="FF6359"/>
-            </a:solidFill>
-            <a:prstDash val="solid"/>
-          </a:ln>
+          <a:ln/>
         </p:spPr>
       </p:sp>
       <p:sp>
@@ -9425,7 +8796,7 @@
           <a:ln/>
         </p:spPr>
         <p:txBody>
-          <a:bodyPr wrap="square" lIns="0" tIns="0" rIns="0" bIns="0" rtlCol="0" anchor="ctr"/>
+          <a:bodyPr wrap="square" rtlCol="0" anchor="ctr"/>
           <a:lstStyle/>
           <a:p>
             <a:pPr algn="ctr" indent="0" marL="0">
@@ -9464,7 +8835,7 @@
           <a:ln/>
         </p:spPr>
         <p:txBody>
-          <a:bodyPr wrap="square" lIns="0" tIns="0" rIns="0" bIns="0" rtlCol="0" anchor="ctr"/>
+          <a:bodyPr wrap="square" rtlCol="0" anchor="ctr"/>
           <a:lstStyle/>
           <a:p>
             <a:pPr algn="ctr" indent="0" marL="0">
@@ -9503,7 +8874,7 @@
           <a:ln/>
         </p:spPr>
         <p:txBody>
-          <a:bodyPr wrap="square" lIns="0" tIns="0" rIns="0" bIns="0" rtlCol="0" anchor="ctr"/>
+          <a:bodyPr wrap="square" rtlCol="0" anchor="ctr"/>
           <a:lstStyle/>
           <a:p>
             <a:pPr algn="ctr" indent="0" marL="0">
@@ -9542,7 +8913,7 @@
           <a:ln/>
         </p:spPr>
         <p:txBody>
-          <a:bodyPr wrap="square" lIns="0" tIns="0" rIns="0" bIns="0" rtlCol="0" anchor="ctr"/>
+          <a:bodyPr wrap="square" rtlCol="0" anchor="ctr"/>
           <a:lstStyle/>
           <a:p>
             <a:pPr indent="0" marL="0">
@@ -9553,9 +8924,6 @@
                 <a:solidFill>
                   <a:srgbClr val="FF6359"/>
                 </a:solidFill>
-                <a:latin typeface="Calibri" pitchFamily="34" charset="0"/>
-                <a:ea typeface="Calibri" pitchFamily="34" charset="-122"/>
-                <a:cs typeface="Calibri" pitchFamily="34" charset="-120"/>
               </a:rPr>
               <a:t>Business Scope</a:t>
             </a:r>
@@ -9581,7 +8949,7 @@
           <a:ln/>
         </p:spPr>
         <p:txBody>
-          <a:bodyPr wrap="square" lIns="0" tIns="0" rIns="0" bIns="0" rtlCol="0" anchor="ctr"/>
+          <a:bodyPr wrap="square" rtlCol="0" anchor="ctr"/>
           <a:lstStyle/>
           <a:p>
             <a:pPr indent="0" marL="0">
@@ -9592,9 +8960,6 @@
                 <a:solidFill>
                   <a:srgbClr val="141E1E"/>
                 </a:solidFill>
-                <a:latin typeface="Calibri" pitchFamily="34" charset="0"/>
-                <a:ea typeface="Calibri" pitchFamily="34" charset="-122"/>
-                <a:cs typeface="Calibri" pitchFamily="34" charset="-120"/>
               </a:rPr>
               <a:t>Enables tax authorities to manage the complete registration lifecycle — including party creation, identifier management, historical data tracking, and organisational hierarchy. Supports natural persons and legal entities with full audit traceability.</a:t>
             </a:r>
@@ -9620,7 +8985,7 @@
           <a:ln/>
         </p:spPr>
         <p:txBody>
-          <a:bodyPr wrap="square" lIns="0" tIns="0" rIns="0" bIns="0" rtlCol="0" anchor="ctr"/>
+          <a:bodyPr wrap="square" rtlCol="0" anchor="ctr"/>
           <a:lstStyle/>
           <a:p>
             <a:pPr indent="0" marL="0">
@@ -9631,9 +8996,6 @@
                 <a:solidFill>
                   <a:srgbClr val="FF6359"/>
                 </a:solidFill>
-                <a:latin typeface="Calibri" pitchFamily="34" charset="0"/>
-                <a:ea typeface="Calibri" pitchFamily="34" charset="-122"/>
-                <a:cs typeface="Calibri" pitchFamily="34" charset="-120"/>
               </a:rPr>
               <a:t>Key Investment Benefits</a:t>
             </a:r>
@@ -9671,9 +9033,6 @@
                 <a:solidFill>
                   <a:srgbClr val="4A5C5A"/>
                 </a:solidFill>
-                <a:latin typeface="Calibri" pitchFamily="34" charset="0"/>
-                <a:ea typeface="Calibri" pitchFamily="34" charset="-122"/>
-                <a:cs typeface="Calibri" pitchFamily="34" charset="-120"/>
               </a:rPr>
               <a:t>Faster taxpayer onboarding reduces overhead and improves service delivery</a:t>
             </a:r>
@@ -9689,9 +9048,6 @@
                 <a:solidFill>
                   <a:srgbClr val="4A5C5A"/>
                 </a:solidFill>
-                <a:latin typeface="Calibri" pitchFamily="34" charset="0"/>
-                <a:ea typeface="Calibri" pitchFamily="34" charset="-122"/>
-                <a:cs typeface="Calibri" pitchFamily="34" charset="-120"/>
               </a:rPr>
               <a:t>Flexible party model supports VAT, CIT, and PAYE with full audit traceability</a:t>
             </a:r>
@@ -9707,9 +9063,6 @@
                 <a:solidFill>
                   <a:srgbClr val="4A5C5A"/>
                 </a:solidFill>
-                <a:latin typeface="Calibri" pitchFamily="34" charset="0"/>
-                <a:ea typeface="Calibri" pitchFamily="34" charset="-122"/>
-                <a:cs typeface="Calibri" pitchFamily="34" charset="-120"/>
               </a:rPr>
               <a:t>Structured identifiers and validation rules improve data quality across tax types</a:t>
             </a:r>
@@ -9735,7 +9088,7 @@
           <a:ln/>
         </p:spPr>
         <p:txBody>
-          <a:bodyPr wrap="square" lIns="0" tIns="0" rIns="0" bIns="0" rtlCol="0" anchor="ctr"/>
+          <a:bodyPr wrap="square" rtlCol="0" anchor="ctr"/>
           <a:lstStyle/>
           <a:p>
             <a:pPr indent="0" marL="0">
@@ -9746,9 +9099,6 @@
                 <a:solidFill>
                   <a:srgbClr val="FF6359"/>
                 </a:solidFill>
-                <a:latin typeface="Calibri" pitchFamily="34" charset="0"/>
-                <a:ea typeface="Calibri" pitchFamily="34" charset="-122"/>
-                <a:cs typeface="Calibri" pitchFamily="34" charset="-120"/>
               </a:rPr>
               <a:t>Estimated Effort by Feature Area</a:t>
             </a:r>
@@ -9790,7 +9140,7 @@
           <a:ln/>
         </p:spPr>
         <p:txBody>
-          <a:bodyPr wrap="square" lIns="0" tIns="0" rIns="0" bIns="0" rtlCol="0" anchor="ctr"/>
+          <a:bodyPr wrap="square" rtlCol="0" anchor="ctr"/>
           <a:lstStyle/>
           <a:p>
             <a:pPr indent="0" marL="0">
@@ -9801,9 +9151,6 @@
                 <a:solidFill>
                   <a:srgbClr val="FF6359"/>
                 </a:solidFill>
-                <a:latin typeface="Calibri" pitchFamily="34" charset="0"/>
-                <a:ea typeface="Calibri" pitchFamily="34" charset="-122"/>
-                <a:cs typeface="Calibri" pitchFamily="34" charset="-120"/>
               </a:rPr>
               <a:t>Priority Distribution</a:t>
             </a:r>
@@ -9835,61 +9182,6 @@
         </p:nvSpPr>
         <p:spPr>
           <a:xfrm>
-            <a:off x="6263640" y="3191256"/>
-            <a:ext cx="2651760" cy="201168"/>
-          </a:xfrm>
-          <a:prstGeom prst="rect">
-            <a:avLst/>
-          </a:prstGeom>
-          <a:noFill/>
-          <a:ln/>
-        </p:spPr>
-        <p:txBody>
-          <a:bodyPr wrap="square" lIns="0" tIns="0" rIns="0" bIns="0" rtlCol="0" anchor="ctr"/>
-          <a:lstStyle/>
-          <a:p>
-            <a:pPr indent="0" marL="0">
-              <a:buNone/>
-            </a:pPr>
-            <a:r>
-              <a:rPr lang="en-US" sz="1000" b="1" dirty="0">
-                <a:solidFill>
-                  <a:srgbClr val="FF6359"/>
-                </a:solidFill>
-                <a:latin typeface="Calibri" pitchFamily="34" charset="0"/>
-                <a:ea typeface="Calibri" pitchFamily="34" charset="-122"/>
-                <a:cs typeface="Calibri" pitchFamily="34" charset="-120"/>
-              </a:rPr>
-              <a:t>Stakeholder Split</a:t>
-            </a:r>
-            <a:endParaRPr lang="en-US" sz="1000" dirty="0"/>
-          </a:p>
-        </p:txBody>
-      </p:sp>
-      <p:graphicFrame>
-        <p:nvGraphicFramePr>
-          <p:cNvPr id="39" name="Chart 2" descr=""/>
-          <p:cNvGraphicFramePr/>
-          <p:nvPr/>
-        </p:nvGraphicFramePr>
-        <p:xfrm>
-          <a:off x="6263640" y="3410712"/>
-          <a:ext cx="2651760" cy="621792"/>
-        </p:xfrm>
-        <a:graphic xmlns:a="http://schemas.openxmlformats.org/drawingml/2006/main">
-          <a:graphicData uri="http://schemas.openxmlformats.org/drawingml/2006/chart">
-            <c:chart xmlns:c="http://schemas.openxmlformats.org/drawingml/2006/chart" r:id="rId3"/>
-          </a:graphicData>
-        </a:graphic>
-      </p:graphicFrame>
-      <p:sp>
-        <p:nvSpPr>
-          <p:cNvPr id="40" name="Text 35"/>
-          <p:cNvSpPr/>
-          <p:nvPr/>
-        </p:nvSpPr>
-        <p:spPr>
-          <a:xfrm>
             <a:off x="228600" y="3886200"/>
             <a:ext cx="914400" cy="201168"/>
           </a:xfrm>
@@ -9900,7 +9192,7 @@
           <a:ln/>
         </p:spPr>
         <p:txBody>
-          <a:bodyPr wrap="square" lIns="0" tIns="0" rIns="0" bIns="0" rtlCol="0" anchor="ctr"/>
+          <a:bodyPr wrap="square" rtlCol="0" anchor="ctr"/>
           <a:lstStyle/>
           <a:p>
             <a:pPr indent="0" marL="0">
@@ -9911,9 +9203,6 @@
                 <a:solidFill>
                   <a:srgbClr val="FF6359"/>
                 </a:solidFill>
-                <a:latin typeface="Calibri" pitchFamily="34" charset="0"/>
-                <a:ea typeface="Calibri" pitchFamily="34" charset="-122"/>
-                <a:cs typeface="Calibri" pitchFamily="34" charset="-120"/>
               </a:rPr>
               <a:t>PI Planning</a:t>
             </a:r>
@@ -9923,7 +9212,7 @@
       </p:sp>
       <p:sp>
         <p:nvSpPr>
-          <p:cNvPr id="41" name="Shape 36"/>
+          <p:cNvPr id="39" name="Shape 35"/>
           <p:cNvSpPr/>
           <p:nvPr/>
         </p:nvSpPr>
@@ -9938,17 +9227,12 @@
           <a:solidFill>
             <a:srgbClr val="123836"/>
           </a:solidFill>
-          <a:ln w="12700">
-            <a:solidFill>
-              <a:srgbClr val="123836"/>
-            </a:solidFill>
-            <a:prstDash val="solid"/>
-          </a:ln>
-        </p:spPr>
-      </p:sp>
-      <p:sp>
-        <p:nvSpPr>
-          <p:cNvPr id="42" name="Text 37"/>
+          <a:ln/>
+        </p:spPr>
+      </p:sp>
+      <p:sp>
+        <p:nvSpPr>
+          <p:cNvPr id="40" name="Text 36"/>
           <p:cNvSpPr/>
           <p:nvPr/>
         </p:nvSpPr>
@@ -9964,7 +9248,7 @@
           <a:ln/>
         </p:spPr>
         <p:txBody>
-          <a:bodyPr wrap="square" lIns="0" tIns="0" rIns="0" bIns="0" rtlCol="0" anchor="ctr"/>
+          <a:bodyPr wrap="square" rtlCol="0" anchor="ctr"/>
           <a:lstStyle/>
           <a:p>
             <a:pPr indent="0" marL="0">
@@ -9975,9 +9259,6 @@
                 <a:solidFill>
                   <a:srgbClr val="FFD282"/>
                 </a:solidFill>
-                <a:latin typeface="Calibri" pitchFamily="34" charset="0"/>
-                <a:ea typeface="Calibri" pitchFamily="34" charset="-122"/>
-                <a:cs typeface="Calibri" pitchFamily="34" charset="-120"/>
               </a:rPr>
               <a:t>PI27</a:t>
             </a:r>
@@ -9987,7 +9268,7 @@
       </p:sp>
       <p:sp>
         <p:nvSpPr>
-          <p:cNvPr id="43" name="Text 38"/>
+          <p:cNvPr id="41" name="Text 37"/>
           <p:cNvSpPr/>
           <p:nvPr/>
         </p:nvSpPr>
@@ -10003,7 +9284,7 @@
           <a:ln/>
         </p:spPr>
         <p:txBody>
-          <a:bodyPr wrap="square" lIns="0" tIns="0" rIns="0" bIns="0" rtlCol="0" anchor="ctr"/>
+          <a:bodyPr wrap="square" rtlCol="0" anchor="ctr"/>
           <a:lstStyle/>
           <a:p>
             <a:pPr indent="0" marL="0">
@@ -10014,9 +9295,6 @@
                 <a:solidFill>
                   <a:srgbClr val="FFFFFF"/>
                 </a:solidFill>
-                <a:latin typeface="Calibri" pitchFamily="34" charset="0"/>
-                <a:ea typeface="Calibri" pitchFamily="34" charset="-122"/>
-                <a:cs typeface="Calibri" pitchFamily="34" charset="-120"/>
               </a:rPr>
               <a:t>Party Identifiers · Historical Data View · Additional Name Elements (3 features)</a:t>
             </a:r>
@@ -10026,7 +9304,7 @@
       </p:sp>
       <p:sp>
         <p:nvSpPr>
-          <p:cNvPr id="44" name="Shape 39"/>
+          <p:cNvPr id="42" name="Shape 38"/>
           <p:cNvSpPr/>
           <p:nvPr/>
         </p:nvSpPr>
@@ -10041,17 +9319,12 @@
           <a:solidFill>
             <a:srgbClr val="1B5E52"/>
           </a:solidFill>
-          <a:ln w="12700">
-            <a:solidFill>
-              <a:srgbClr val="1B5E52"/>
-            </a:solidFill>
-            <a:prstDash val="solid"/>
-          </a:ln>
-        </p:spPr>
-      </p:sp>
-      <p:sp>
-        <p:nvSpPr>
-          <p:cNvPr id="45" name="Text 40"/>
+          <a:ln/>
+        </p:spPr>
+      </p:sp>
+      <p:sp>
+        <p:nvSpPr>
+          <p:cNvPr id="43" name="Text 39"/>
           <p:cNvSpPr/>
           <p:nvPr/>
         </p:nvSpPr>
@@ -10067,7 +9340,7 @@
           <a:ln/>
         </p:spPr>
         <p:txBody>
-          <a:bodyPr wrap="square" lIns="0" tIns="0" rIns="0" bIns="0" rtlCol="0" anchor="ctr"/>
+          <a:bodyPr wrap="square" rtlCol="0" anchor="ctr"/>
           <a:lstStyle/>
           <a:p>
             <a:pPr indent="0" marL="0">
@@ -10078,9 +9351,6 @@
                 <a:solidFill>
                   <a:srgbClr val="FFD282"/>
                 </a:solidFill>
-                <a:latin typeface="Calibri" pitchFamily="34" charset="0"/>
-                <a:ea typeface="Calibri" pitchFamily="34" charset="-122"/>
-                <a:cs typeface="Calibri" pitchFamily="34" charset="-120"/>
               </a:rPr>
               <a:t>PI28</a:t>
             </a:r>
@@ -10090,7 +9360,7 @@
       </p:sp>
       <p:sp>
         <p:nvSpPr>
-          <p:cNvPr id="46" name="Text 41"/>
+          <p:cNvPr id="44" name="Text 40"/>
           <p:cNvSpPr/>
           <p:nvPr/>
         </p:nvSpPr>
@@ -10106,7 +9376,7 @@
           <a:ln/>
         </p:spPr>
         <p:txBody>
-          <a:bodyPr wrap="square" lIns="0" tIns="0" rIns="0" bIns="0" rtlCol="0" anchor="ctr"/>
+          <a:bodyPr wrap="square" rtlCol="0" anchor="ctr"/>
           <a:lstStyle/>
           <a:p>
             <a:pPr indent="0" marL="0">
@@ -10117,9 +9387,6 @@
                 <a:solidFill>
                   <a:srgbClr val="FFFFFF"/>
                 </a:solidFill>
-                <a:latin typeface="Calibri" pitchFamily="34" charset="0"/>
-                <a:ea typeface="Calibri" pitchFamily="34" charset="-122"/>
-                <a:cs typeface="Calibri" pitchFamily="34" charset="-120"/>
               </a:rPr>
               <a:t>Data Area Enhancements · Search Enhancements (2 features) — confirm capacity now</a:t>
             </a:r>
@@ -10129,7 +9396,7 @@
       </p:sp>
       <p:sp>
         <p:nvSpPr>
-          <p:cNvPr id="47" name="Shape 42"/>
+          <p:cNvPr id="45" name="Shape 41"/>
           <p:cNvSpPr/>
           <p:nvPr/>
         </p:nvSpPr>
@@ -10144,17 +9411,12 @@
           <a:solidFill>
             <a:srgbClr val="718886"/>
           </a:solidFill>
-          <a:ln w="12700">
-            <a:solidFill>
-              <a:srgbClr val="718886"/>
-            </a:solidFill>
-            <a:prstDash val="solid"/>
-          </a:ln>
-        </p:spPr>
-      </p:sp>
-      <p:sp>
-        <p:nvSpPr>
-          <p:cNvPr id="48" name="Text 43"/>
+          <a:ln/>
+        </p:spPr>
+      </p:sp>
+      <p:sp>
+        <p:nvSpPr>
+          <p:cNvPr id="46" name="Text 42"/>
           <p:cNvSpPr/>
           <p:nvPr/>
         </p:nvSpPr>
@@ -10170,7 +9432,7 @@
           <a:ln/>
         </p:spPr>
         <p:txBody>
-          <a:bodyPr wrap="square" lIns="0" tIns="0" rIns="0" bIns="0" rtlCol="0" anchor="ctr"/>
+          <a:bodyPr wrap="square" rtlCol="0" anchor="ctr"/>
           <a:lstStyle/>
           <a:p>
             <a:pPr indent="0" marL="0">
@@ -10181,9 +9443,6 @@
                 <a:solidFill>
                   <a:srgbClr val="FFD282"/>
                 </a:solidFill>
-                <a:latin typeface="Calibri" pitchFamily="34" charset="0"/>
-                <a:ea typeface="Calibri" pitchFamily="34" charset="-122"/>
-                <a:cs typeface="Calibri" pitchFamily="34" charset="-120"/>
               </a:rPr>
               <a:t>PI29</a:t>
             </a:r>
@@ -10193,7 +9452,7 @@
       </p:sp>
       <p:sp>
         <p:nvSpPr>
-          <p:cNvPr id="49" name="Text 44"/>
+          <p:cNvPr id="47" name="Text 43"/>
           <p:cNvSpPr/>
           <p:nvPr/>
         </p:nvSpPr>
@@ -10209,7 +9468,7 @@
           <a:ln/>
         </p:spPr>
         <p:txBody>
-          <a:bodyPr wrap="square" lIns="0" tIns="0" rIns="0" bIns="0" rtlCol="0" anchor="ctr"/>
+          <a:bodyPr wrap="square" rtlCol="0" anchor="ctr"/>
           <a:lstStyle/>
           <a:p>
             <a:pPr indent="0" marL="0">
@@ -10220,9 +9479,6 @@
                 <a:solidFill>
                   <a:srgbClr val="FFFFFF"/>
                 </a:solidFill>
-                <a:latin typeface="Calibri" pitchFamily="34" charset="0"/>
-                <a:ea typeface="Calibri" pitchFamily="34" charset="-122"/>
-                <a:cs typeface="Calibri" pitchFamily="34" charset="-120"/>
               </a:rPr>
               <a:t>Organisational Hierarchy View — GRC team alignment required before scoping</a:t>
             </a:r>
@@ -10279,12 +9535,7 @@
           <a:solidFill>
             <a:srgbClr val="123836"/>
           </a:solidFill>
-          <a:ln w="12700">
-            <a:solidFill>
-              <a:srgbClr val="123836"/>
-            </a:solidFill>
-            <a:prstDash val="solid"/>
-          </a:ln>
+          <a:ln/>
         </p:spPr>
       </p:sp>
       <p:sp>
@@ -10304,12 +9555,7 @@
           <a:solidFill>
             <a:srgbClr val="FF6359"/>
           </a:solidFill>
-          <a:ln w="12700">
-            <a:solidFill>
-              <a:srgbClr val="FF6359"/>
-            </a:solidFill>
-            <a:prstDash val="solid"/>
-          </a:ln>
+          <a:ln/>
         </p:spPr>
       </p:sp>
       <p:sp>
@@ -10330,7 +9576,7 @@
           <a:ln/>
         </p:spPr>
         <p:txBody>
-          <a:bodyPr wrap="square" lIns="0" tIns="0" rIns="0" bIns="0" rtlCol="0" anchor="ctr"/>
+          <a:bodyPr wrap="square" rtlCol="0" anchor="ctr"/>
           <a:lstStyle/>
           <a:p>
             <a:pPr indent="0" marL="0">
@@ -10369,7 +9615,7 @@
           <a:ln/>
         </p:spPr>
         <p:txBody>
-          <a:bodyPr wrap="square" lIns="0" tIns="0" rIns="0" bIns="0" rtlCol="0" anchor="ctr"/>
+          <a:bodyPr wrap="square" rtlCol="0" anchor="ctr"/>
           <a:lstStyle/>
           <a:p>
             <a:pPr indent="0" marL="0">
@@ -10408,7 +9654,7 @@
           <a:ln/>
         </p:spPr>
         <p:txBody>
-          <a:bodyPr wrap="square" lIns="0" tIns="0" rIns="0" bIns="0" rtlCol="0" anchor="ctr"/>
+          <a:bodyPr wrap="square" rtlCol="0" anchor="ctr"/>
           <a:lstStyle/>
           <a:p>
             <a:pPr algn="r" indent="0" marL="0">
@@ -10446,12 +9692,7 @@
           <a:solidFill>
             <a:srgbClr val="123836"/>
           </a:solidFill>
-          <a:ln w="12700">
-            <a:solidFill>
-              <a:srgbClr val="123836"/>
-            </a:solidFill>
-            <a:prstDash val="solid"/>
-          </a:ln>
+          <a:ln/>
         </p:spPr>
       </p:sp>
       <p:sp>
@@ -10472,7 +9713,7 @@
           <a:ln/>
         </p:spPr>
         <p:txBody>
-          <a:bodyPr wrap="square" lIns="0" tIns="0" rIns="0" bIns="0" rtlCol="0" anchor="ctr"/>
+          <a:bodyPr wrap="square" rtlCol="0" anchor="ctr"/>
           <a:lstStyle/>
           <a:p>
             <a:pPr indent="0" marL="0">
@@ -10511,7 +9752,7 @@
           <a:ln/>
         </p:spPr>
         <p:txBody>
-          <a:bodyPr wrap="square" lIns="0" tIns="0" rIns="0" bIns="0" rtlCol="0" anchor="ctr"/>
+          <a:bodyPr wrap="square" rtlCol="0" anchor="ctr"/>
           <a:lstStyle/>
           <a:p>
             <a:pPr algn="r" indent="0" marL="0">
@@ -10581,12 +9822,7 @@
           <a:solidFill>
             <a:srgbClr val="FF6359"/>
           </a:solidFill>
-          <a:ln w="12700">
-            <a:solidFill>
-              <a:srgbClr val="FF6359"/>
-            </a:solidFill>
-            <a:prstDash val="solid"/>
-          </a:ln>
+          <a:ln/>
         </p:spPr>
       </p:sp>
       <p:sp>
@@ -10607,7 +9843,7 @@
           <a:ln/>
         </p:spPr>
         <p:txBody>
-          <a:bodyPr wrap="square" lIns="0" tIns="0" rIns="0" bIns="0" rtlCol="0" anchor="ctr"/>
+          <a:bodyPr wrap="square" rtlCol="0" anchor="ctr"/>
           <a:lstStyle/>
           <a:p>
             <a:pPr algn="ctr" indent="0" marL="0">
@@ -10646,7 +9882,7 @@
           <a:ln/>
         </p:spPr>
         <p:txBody>
-          <a:bodyPr wrap="square" lIns="0" tIns="0" rIns="0" bIns="0" rtlCol="0" anchor="ctr"/>
+          <a:bodyPr wrap="square" rtlCol="0" anchor="ctr"/>
           <a:lstStyle/>
           <a:p>
             <a:pPr algn="ctr" indent="0" marL="0">
@@ -10685,7 +9921,7 @@
           <a:ln/>
         </p:spPr>
         <p:txBody>
-          <a:bodyPr wrap="square" lIns="0" tIns="0" rIns="0" bIns="0" rtlCol="0" anchor="ctr"/>
+          <a:bodyPr wrap="square" rtlCol="0" anchor="ctr"/>
           <a:lstStyle/>
           <a:p>
             <a:pPr algn="ctr" indent="0" marL="0">
@@ -10755,12 +9991,7 @@
           <a:solidFill>
             <a:srgbClr val="FF6359"/>
           </a:solidFill>
-          <a:ln w="12700">
-            <a:solidFill>
-              <a:srgbClr val="FF6359"/>
-            </a:solidFill>
-            <a:prstDash val="solid"/>
-          </a:ln>
+          <a:ln/>
         </p:spPr>
       </p:sp>
       <p:sp>
@@ -10781,7 +10012,7 @@
           <a:ln/>
         </p:spPr>
         <p:txBody>
-          <a:bodyPr wrap="square" lIns="0" tIns="0" rIns="0" bIns="0" rtlCol="0" anchor="ctr"/>
+          <a:bodyPr wrap="square" rtlCol="0" anchor="ctr"/>
           <a:lstStyle/>
           <a:p>
             <a:pPr algn="ctr" indent="0" marL="0">
@@ -10820,7 +10051,7 @@
           <a:ln/>
         </p:spPr>
         <p:txBody>
-          <a:bodyPr wrap="square" lIns="0" tIns="0" rIns="0" bIns="0" rtlCol="0" anchor="ctr"/>
+          <a:bodyPr wrap="square" rtlCol="0" anchor="ctr"/>
           <a:lstStyle/>
           <a:p>
             <a:pPr algn="ctr" indent="0" marL="0">
@@ -10859,7 +10090,7 @@
           <a:ln/>
         </p:spPr>
         <p:txBody>
-          <a:bodyPr wrap="square" lIns="0" tIns="0" rIns="0" bIns="0" rtlCol="0" anchor="ctr"/>
+          <a:bodyPr wrap="square" rtlCol="0" anchor="ctr"/>
           <a:lstStyle/>
           <a:p>
             <a:pPr algn="ctr" indent="0" marL="0">
@@ -10929,12 +10160,7 @@
           <a:solidFill>
             <a:srgbClr val="FF6359"/>
           </a:solidFill>
-          <a:ln w="12700">
-            <a:solidFill>
-              <a:srgbClr val="FF6359"/>
-            </a:solidFill>
-            <a:prstDash val="solid"/>
-          </a:ln>
+          <a:ln/>
         </p:spPr>
       </p:sp>
       <p:sp>
@@ -10955,7 +10181,7 @@
           <a:ln/>
         </p:spPr>
         <p:txBody>
-          <a:bodyPr wrap="square" lIns="0" tIns="0" rIns="0" bIns="0" rtlCol="0" anchor="ctr"/>
+          <a:bodyPr wrap="square" rtlCol="0" anchor="ctr"/>
           <a:lstStyle/>
           <a:p>
             <a:pPr algn="ctr" indent="0" marL="0">
@@ -10994,7 +10220,7 @@
           <a:ln/>
         </p:spPr>
         <p:txBody>
-          <a:bodyPr wrap="square" lIns="0" tIns="0" rIns="0" bIns="0" rtlCol="0" anchor="ctr"/>
+          <a:bodyPr wrap="square" rtlCol="0" anchor="ctr"/>
           <a:lstStyle/>
           <a:p>
             <a:pPr algn="ctr" indent="0" marL="0">
@@ -11033,7 +10259,7 @@
           <a:ln/>
         </p:spPr>
         <p:txBody>
-          <a:bodyPr wrap="square" lIns="0" tIns="0" rIns="0" bIns="0" rtlCol="0" anchor="ctr"/>
+          <a:bodyPr wrap="square" rtlCol="0" anchor="ctr"/>
           <a:lstStyle/>
           <a:p>
             <a:pPr algn="ctr" indent="0" marL="0">
@@ -11103,12 +10329,7 @@
           <a:solidFill>
             <a:srgbClr val="FF6359"/>
           </a:solidFill>
-          <a:ln w="12700">
-            <a:solidFill>
-              <a:srgbClr val="FF6359"/>
-            </a:solidFill>
-            <a:prstDash val="solid"/>
-          </a:ln>
+          <a:ln/>
         </p:spPr>
       </p:sp>
       <p:sp>
@@ -11129,7 +10350,7 @@
           <a:ln/>
         </p:spPr>
         <p:txBody>
-          <a:bodyPr wrap="square" lIns="0" tIns="0" rIns="0" bIns="0" rtlCol="0" anchor="ctr"/>
+          <a:bodyPr wrap="square" rtlCol="0" anchor="ctr"/>
           <a:lstStyle/>
           <a:p>
             <a:pPr algn="ctr" indent="0" marL="0">
@@ -11168,7 +10389,7 @@
           <a:ln/>
         </p:spPr>
         <p:txBody>
-          <a:bodyPr wrap="square" lIns="0" tIns="0" rIns="0" bIns="0" rtlCol="0" anchor="ctr"/>
+          <a:bodyPr wrap="square" rtlCol="0" anchor="ctr"/>
           <a:lstStyle/>
           <a:p>
             <a:pPr algn="ctr" indent="0" marL="0">
@@ -11207,7 +10428,7 @@
           <a:ln/>
         </p:spPr>
         <p:txBody>
-          <a:bodyPr wrap="square" lIns="0" tIns="0" rIns="0" bIns="0" rtlCol="0" anchor="ctr"/>
+          <a:bodyPr wrap="square" rtlCol="0" anchor="ctr"/>
           <a:lstStyle/>
           <a:p>
             <a:pPr algn="ctr" indent="0" marL="0">
@@ -11236,7 +10457,7 @@
         </p:nvSpPr>
         <p:spPr>
           <a:xfrm>
-            <a:off x="228600" y="1993392"/>
+            <a:off x="228600" y="1965960"/>
             <a:ext cx="2743200" cy="228600"/>
           </a:xfrm>
           <a:prstGeom prst="rect">
@@ -11246,7 +10467,7 @@
           <a:ln/>
         </p:spPr>
         <p:txBody>
-          <a:bodyPr wrap="square" lIns="0" tIns="0" rIns="0" bIns="0" rtlCol="0" anchor="ctr"/>
+          <a:bodyPr wrap="square" rtlCol="0" anchor="ctr"/>
           <a:lstStyle/>
           <a:p>
             <a:pPr indent="0" marL="0">
@@ -11257,9 +10478,6 @@
                 <a:solidFill>
                   <a:srgbClr val="FF6359"/>
                 </a:solidFill>
-                <a:latin typeface="Calibri" pitchFamily="34" charset="0"/>
-                <a:ea typeface="Calibri" pitchFamily="34" charset="-122"/>
-                <a:cs typeface="Calibri" pitchFamily="34" charset="-120"/>
               </a:rPr>
               <a:t>Business Scope</a:t>
             </a:r>
@@ -11275,17 +10493,17 @@
         </p:nvSpPr>
         <p:spPr>
           <a:xfrm>
-            <a:off x="228600" y="2240280"/>
-            <a:ext cx="2743200" cy="658368"/>
-          </a:xfrm>
-          <a:prstGeom prst="rect">
-            <a:avLst/>
-          </a:prstGeom>
-          <a:noFill/>
-          <a:ln/>
-        </p:spPr>
-        <p:txBody>
-          <a:bodyPr wrap="square" lIns="0" tIns="0" rIns="0" bIns="0" rtlCol="0" anchor="ctr"/>
+            <a:off x="228600" y="2212848"/>
+            <a:ext cx="2743200" cy="685800"/>
+          </a:xfrm>
+          <a:prstGeom prst="rect">
+            <a:avLst/>
+          </a:prstGeom>
+          <a:noFill/>
+          <a:ln/>
+        </p:spPr>
+        <p:txBody>
+          <a:bodyPr wrap="square" rtlCol="0" anchor="ctr"/>
           <a:lstStyle/>
           <a:p>
             <a:pPr indent="0" marL="0">
@@ -11296,9 +10514,6 @@
                 <a:solidFill>
                   <a:srgbClr val="141E1E"/>
                 </a:solidFill>
-                <a:latin typeface="Calibri" pitchFamily="34" charset="0"/>
-                <a:ea typeface="Calibri" pitchFamily="34" charset="-122"/>
-                <a:cs typeface="Calibri" pitchFamily="34" charset="-120"/>
               </a:rPr>
               <a:t>Provides tax authorities with a unified financial ledger for each taxpayer, recording all transactions including payments, credits, adjustments, and write-offs. Ensures accurate account balances and supports reconciliation across all tax types.</a:t>
             </a:r>
@@ -11324,7 +10539,7 @@
           <a:ln/>
         </p:spPr>
         <p:txBody>
-          <a:bodyPr wrap="square" lIns="0" tIns="0" rIns="0" bIns="0" rtlCol="0" anchor="ctr"/>
+          <a:bodyPr wrap="square" rtlCol="0" anchor="ctr"/>
           <a:lstStyle/>
           <a:p>
             <a:pPr indent="0" marL="0">
@@ -11335,9 +10550,6 @@
                 <a:solidFill>
                   <a:srgbClr val="FF6359"/>
                 </a:solidFill>
-                <a:latin typeface="Calibri" pitchFamily="34" charset="0"/>
-                <a:ea typeface="Calibri" pitchFamily="34" charset="-122"/>
-                <a:cs typeface="Calibri" pitchFamily="34" charset="-120"/>
               </a:rPr>
               <a:t>Key Investment Benefits</a:t>
             </a:r>
@@ -11353,8 +10565,8 @@
         </p:nvSpPr>
         <p:spPr>
           <a:xfrm>
-            <a:off x="228600" y="3163824"/>
-            <a:ext cx="2743200" cy="822960"/>
+            <a:off x="228600" y="3172968"/>
+            <a:ext cx="2743200" cy="749808"/>
           </a:xfrm>
           <a:prstGeom prst="rect">
             <a:avLst/>
@@ -11375,9 +10587,6 @@
                 <a:solidFill>
                   <a:srgbClr val="4A5C5A"/>
                 </a:solidFill>
-                <a:latin typeface="Calibri" pitchFamily="34" charset="0"/>
-                <a:ea typeface="Calibri" pitchFamily="34" charset="-122"/>
-                <a:cs typeface="Calibri" pitchFamily="34" charset="-120"/>
               </a:rPr>
               <a:t>Real-time balance visibility reduces disputes and improves taxpayer trust</a:t>
             </a:r>
@@ -11393,9 +10602,6 @@
                 <a:solidFill>
                   <a:srgbClr val="4A5C5A"/>
                 </a:solidFill>
-                <a:latin typeface="Calibri" pitchFamily="34" charset="0"/>
-                <a:ea typeface="Calibri" pitchFamily="34" charset="-122"/>
-                <a:cs typeface="Calibri" pitchFamily="34" charset="-120"/>
               </a:rPr>
               <a:t>Automated reconciliation eliminates manual posting errors</a:t>
             </a:r>
@@ -11411,9 +10617,6 @@
                 <a:solidFill>
                   <a:srgbClr val="4A5C5A"/>
                 </a:solidFill>
-                <a:latin typeface="Calibri" pitchFamily="34" charset="0"/>
-                <a:ea typeface="Calibri" pitchFamily="34" charset="-122"/>
-                <a:cs typeface="Calibri" pitchFamily="34" charset="-120"/>
               </a:rPr>
               <a:t>Single ledger supports multi-tax-type accounting for all periods</a:t>
             </a:r>
@@ -11429,17 +10632,17 @@
         </p:nvSpPr>
         <p:spPr>
           <a:xfrm>
-            <a:off x="3108960" y="1993392"/>
-            <a:ext cx="2834640" cy="228600"/>
-          </a:xfrm>
-          <a:prstGeom prst="rect">
-            <a:avLst/>
-          </a:prstGeom>
-          <a:noFill/>
-          <a:ln/>
-        </p:spPr>
-        <p:txBody>
-          <a:bodyPr wrap="square" lIns="0" tIns="0" rIns="0" bIns="0" rtlCol="0" anchor="ctr"/>
+            <a:off x="3108960" y="1965960"/>
+            <a:ext cx="3017520" cy="228600"/>
+          </a:xfrm>
+          <a:prstGeom prst="rect">
+            <a:avLst/>
+          </a:prstGeom>
+          <a:noFill/>
+          <a:ln/>
+        </p:spPr>
+        <p:txBody>
+          <a:bodyPr wrap="square" rtlCol="0" anchor="ctr"/>
           <a:lstStyle/>
           <a:p>
             <a:pPr indent="0" marL="0">
@@ -11450,9 +10653,6 @@
                 <a:solidFill>
                   <a:srgbClr val="FF6359"/>
                 </a:solidFill>
-                <a:latin typeface="Calibri" pitchFamily="34" charset="0"/>
-                <a:ea typeface="Calibri" pitchFamily="34" charset="-122"/>
-                <a:cs typeface="Calibri" pitchFamily="34" charset="-120"/>
               </a:rPr>
               <a:t>Estimated Effort by Feature Area</a:t>
             </a:r>
@@ -11467,8 +10667,8 @@
           <p:nvPr/>
         </p:nvGraphicFramePr>
         <p:xfrm>
-          <a:off x="3108960" y="2240280"/>
-          <a:ext cx="2834640" cy="1828800"/>
+          <a:off x="3108960" y="2212848"/>
+          <a:ext cx="3017520" cy="1828800"/>
         </p:xfrm>
         <a:graphic xmlns:a="http://schemas.openxmlformats.org/drawingml/2006/main">
           <a:graphicData uri="http://schemas.openxmlformats.org/drawingml/2006/chart">
@@ -11484,7 +10684,7 @@
         </p:nvSpPr>
         <p:spPr>
           <a:xfrm>
-            <a:off x="6263640" y="1993392"/>
+            <a:off x="6263640" y="1965960"/>
             <a:ext cx="2651760" cy="228600"/>
           </a:xfrm>
           <a:prstGeom prst="rect">
@@ -11494,7 +10694,7 @@
           <a:ln/>
         </p:spPr>
         <p:txBody>
-          <a:bodyPr wrap="square" lIns="0" tIns="0" rIns="0" bIns="0" rtlCol="0" anchor="ctr"/>
+          <a:bodyPr wrap="square" rtlCol="0" anchor="ctr"/>
           <a:lstStyle/>
           <a:p>
             <a:pPr indent="0" marL="0">
@@ -11505,9 +10705,6 @@
                 <a:solidFill>
                   <a:srgbClr val="FF6359"/>
                 </a:solidFill>
-                <a:latin typeface="Calibri" pitchFamily="34" charset="0"/>
-                <a:ea typeface="Calibri" pitchFamily="34" charset="-122"/>
-                <a:cs typeface="Calibri" pitchFamily="34" charset="-120"/>
               </a:rPr>
               <a:t>Priority Distribution</a:t>
             </a:r>
@@ -11522,8 +10719,8 @@
           <p:nvPr/>
         </p:nvGraphicFramePr>
         <p:xfrm>
-          <a:off x="6263640" y="2240280"/>
-          <a:ext cx="2651760" cy="1051560"/>
+          <a:off x="6263640" y="2212848"/>
+          <a:ext cx="2651760" cy="914400"/>
         </p:xfrm>
         <a:graphic xmlns:a="http://schemas.openxmlformats.org/drawingml/2006/main">
           <a:graphicData uri="http://schemas.openxmlformats.org/drawingml/2006/chart">
@@ -11539,121 +10736,6 @@
         </p:nvSpPr>
         <p:spPr>
           <a:xfrm>
-            <a:off x="6263640" y="3355848"/>
-            <a:ext cx="2651760" cy="201168"/>
-          </a:xfrm>
-          <a:prstGeom prst="rect">
-            <a:avLst/>
-          </a:prstGeom>
-          <a:noFill/>
-          <a:ln/>
-        </p:spPr>
-        <p:txBody>
-          <a:bodyPr wrap="square" lIns="0" tIns="0" rIns="0" bIns="0" rtlCol="0" anchor="ctr"/>
-          <a:lstStyle/>
-          <a:p>
-            <a:pPr indent="0" marL="0">
-              <a:buNone/>
-            </a:pPr>
-            <a:r>
-              <a:rPr lang="en-US" sz="1000" b="1" dirty="0">
-                <a:solidFill>
-                  <a:srgbClr val="FF6359"/>
-                </a:solidFill>
-                <a:latin typeface="Calibri" pitchFamily="34" charset="0"/>
-                <a:ea typeface="Calibri" pitchFamily="34" charset="-122"/>
-                <a:cs typeface="Calibri" pitchFamily="34" charset="-120"/>
-              </a:rPr>
-              <a:t>Key Talking Points</a:t>
-            </a:r>
-            <a:endParaRPr lang="en-US" sz="1000" dirty="0"/>
-          </a:p>
-        </p:txBody>
-      </p:sp>
-      <p:sp>
-        <p:nvSpPr>
-          <p:cNvPr id="39" name="Text 35"/>
-          <p:cNvSpPr/>
-          <p:nvPr/>
-        </p:nvSpPr>
-        <p:spPr>
-          <a:xfrm>
-            <a:off x="6263640" y="3584448"/>
-            <a:ext cx="2651760" cy="685800"/>
-          </a:xfrm>
-          <a:prstGeom prst="rect">
-            <a:avLst/>
-          </a:prstGeom>
-          <a:noFill/>
-          <a:ln/>
-        </p:spPr>
-        <p:txBody>
-          <a:bodyPr wrap="square" rtlCol="0" anchor="ctr"/>
-          <a:lstStyle/>
-          <a:p>
-            <a:pPr marL="342900" indent="-342900">
-              <a:buSzPct val="100000"/>
-              <a:buChar char="•"/>
-            </a:pPr>
-            <a:r>
-              <a:rPr lang="en-US" sz="900" dirty="0">
-                <a:solidFill>
-                  <a:srgbClr val="4A5C5A"/>
-                </a:solidFill>
-                <a:latin typeface="Calibri" pitchFamily="34" charset="0"/>
-                <a:ea typeface="Calibri" pitchFamily="34" charset="-122"/>
-                <a:cs typeface="Calibri" pitchFamily="34" charset="-120"/>
-              </a:rPr>
-              <a:t>Second-largest investment — foundational to revenue assurance</a:t>
-            </a:r>
-            <a:endParaRPr lang="en-US" sz="900" dirty="0"/>
-          </a:p>
-          <a:p>
-            <a:pPr marL="342900" indent="-342900">
-              <a:buSzPct val="100000"/>
-              <a:buChar char="•"/>
-            </a:pPr>
-            <a:r>
-              <a:rPr lang="en-US" sz="900" dirty="0">
-                <a:solidFill>
-                  <a:srgbClr val="4A5C5A"/>
-                </a:solidFill>
-                <a:latin typeface="Calibri" pitchFamily="34" charset="0"/>
-                <a:ea typeface="Calibri" pitchFamily="34" charset="-122"/>
-                <a:cs typeface="Calibri" pitchFamily="34" charset="-120"/>
-              </a:rPr>
-              <a:t>PI28 delivery critical — capacity must be confirmed now</a:t>
-            </a:r>
-            <a:endParaRPr lang="en-US" sz="900" dirty="0"/>
-          </a:p>
-          <a:p>
-            <a:pPr marL="342900" indent="-342900">
-              <a:buSzPct val="100000"/>
-              <a:buChar char="•"/>
-            </a:pPr>
-            <a:r>
-              <a:rPr lang="en-US" sz="900" dirty="0">
-                <a:solidFill>
-                  <a:srgbClr val="4A5C5A"/>
-                </a:solidFill>
-                <a:latin typeface="Calibri" pitchFamily="34" charset="0"/>
-                <a:ea typeface="Calibri" pitchFamily="34" charset="-122"/>
-                <a:cs typeface="Calibri" pitchFamily="34" charset="-120"/>
-              </a:rPr>
-              <a:t>All P1/P2 — no descoping without revenue risk</a:t>
-            </a:r>
-            <a:endParaRPr lang="en-US" sz="900" dirty="0"/>
-          </a:p>
-        </p:txBody>
-      </p:sp>
-      <p:sp>
-        <p:nvSpPr>
-          <p:cNvPr id="40" name="Text 36"/>
-          <p:cNvSpPr/>
-          <p:nvPr/>
-        </p:nvSpPr>
-        <p:spPr>
-          <a:xfrm>
             <a:off x="228600" y="3886200"/>
             <a:ext cx="914400" cy="201168"/>
           </a:xfrm>
@@ -11664,7 +10746,7 @@
           <a:ln/>
         </p:spPr>
         <p:txBody>
-          <a:bodyPr wrap="square" lIns="0" tIns="0" rIns="0" bIns="0" rtlCol="0" anchor="ctr"/>
+          <a:bodyPr wrap="square" rtlCol="0" anchor="ctr"/>
           <a:lstStyle/>
           <a:p>
             <a:pPr indent="0" marL="0">
@@ -11675,9 +10757,6 @@
                 <a:solidFill>
                   <a:srgbClr val="FF6359"/>
                 </a:solidFill>
-                <a:latin typeface="Calibri" pitchFamily="34" charset="0"/>
-                <a:ea typeface="Calibri" pitchFamily="34" charset="-122"/>
-                <a:cs typeface="Calibri" pitchFamily="34" charset="-120"/>
               </a:rPr>
               <a:t>PI Planning</a:t>
             </a:r>
@@ -11687,14 +10766,14 @@
       </p:sp>
       <p:sp>
         <p:nvSpPr>
-          <p:cNvPr id="41" name="Shape 37"/>
+          <p:cNvPr id="39" name="Shape 35"/>
           <p:cNvSpPr/>
           <p:nvPr/>
         </p:nvSpPr>
         <p:spPr>
           <a:xfrm>
             <a:off x="228600" y="4114800"/>
-            <a:ext cx="2743200" cy="566928"/>
+            <a:ext cx="2743200" cy="658368"/>
           </a:xfrm>
           <a:prstGeom prst="rect">
             <a:avLst/>
@@ -11702,17 +10781,12 @@
           <a:solidFill>
             <a:srgbClr val="D0D7D7"/>
           </a:solidFill>
-          <a:ln w="12700">
-            <a:solidFill>
-              <a:srgbClr val="D0D7D7"/>
-            </a:solidFill>
-            <a:prstDash val="solid"/>
-          </a:ln>
-        </p:spPr>
-      </p:sp>
-      <p:sp>
-        <p:nvSpPr>
-          <p:cNvPr id="42" name="Text 38"/>
+          <a:ln/>
+        </p:spPr>
+      </p:sp>
+      <p:sp>
+        <p:nvSpPr>
+          <p:cNvPr id="40" name="Text 36"/>
           <p:cNvSpPr/>
           <p:nvPr/>
         </p:nvSpPr>
@@ -11728,7 +10802,7 @@
           <a:ln/>
         </p:spPr>
         <p:txBody>
-          <a:bodyPr wrap="square" lIns="0" tIns="0" rIns="0" bIns="0" rtlCol="0" anchor="ctr"/>
+          <a:bodyPr wrap="square" rtlCol="0" anchor="ctr"/>
           <a:lstStyle/>
           <a:p>
             <a:pPr indent="0" marL="0">
@@ -11737,11 +10811,8 @@
             <a:r>
               <a:rPr lang="en-US" sz="1000" b="1" dirty="0">
                 <a:solidFill>
-                  <a:srgbClr val="4A5C5A"/>
-                </a:solidFill>
-                <a:latin typeface="Calibri" pitchFamily="34" charset="0"/>
-                <a:ea typeface="Calibri" pitchFamily="34" charset="-122"/>
-                <a:cs typeface="Calibri" pitchFamily="34" charset="-120"/>
+                  <a:srgbClr val="FFD282"/>
+                </a:solidFill>
               </a:rPr>
               <a:t>PI27</a:t>
             </a:r>
@@ -11751,23 +10822,23 @@
       </p:sp>
       <p:sp>
         <p:nvSpPr>
-          <p:cNvPr id="43" name="Text 39"/>
+          <p:cNvPr id="41" name="Text 37"/>
           <p:cNvSpPr/>
           <p:nvPr/>
         </p:nvSpPr>
         <p:spPr>
           <a:xfrm>
             <a:off x="850392" y="4133088"/>
-            <a:ext cx="2057400" cy="310896"/>
-          </a:xfrm>
-          <a:prstGeom prst="rect">
-            <a:avLst/>
-          </a:prstGeom>
-          <a:noFill/>
-          <a:ln/>
-        </p:spPr>
-        <p:txBody>
-          <a:bodyPr wrap="square" lIns="0" tIns="0" rIns="0" bIns="0" rtlCol="0" anchor="ctr"/>
+            <a:ext cx="2057400" cy="402336"/>
+          </a:xfrm>
+          <a:prstGeom prst="rect">
+            <a:avLst/>
+          </a:prstGeom>
+          <a:noFill/>
+          <a:ln/>
+        </p:spPr>
+        <p:txBody>
+          <a:bodyPr wrap="square" rtlCol="0" anchor="ctr"/>
           <a:lstStyle/>
           <a:p>
             <a:pPr indent="0" marL="0">
@@ -11776,11 +10847,8 @@
             <a:r>
               <a:rPr lang="en-US" sz="800" dirty="0">
                 <a:solidFill>
-                  <a:srgbClr val="718886"/>
-                </a:solidFill>
-                <a:latin typeface="Calibri" pitchFamily="34" charset="0"/>
-                <a:ea typeface="Calibri" pitchFamily="34" charset="-122"/>
-                <a:cs typeface="Calibri" pitchFamily="34" charset="-120"/>
+                  <a:srgbClr val="FFFFFF"/>
+                </a:solidFill>
               </a:rPr>
               <a:t>No features</a:t>
             </a:r>
@@ -11790,14 +10858,14 @@
       </p:sp>
       <p:sp>
         <p:nvSpPr>
-          <p:cNvPr id="44" name="Shape 40"/>
+          <p:cNvPr id="42" name="Shape 38"/>
           <p:cNvSpPr/>
           <p:nvPr/>
         </p:nvSpPr>
         <p:spPr>
           <a:xfrm>
             <a:off x="3127248" y="4114800"/>
-            <a:ext cx="2743200" cy="566928"/>
+            <a:ext cx="2743200" cy="658368"/>
           </a:xfrm>
           <a:prstGeom prst="rect">
             <a:avLst/>
@@ -11805,17 +10873,12 @@
           <a:solidFill>
             <a:srgbClr val="123836"/>
           </a:solidFill>
-          <a:ln w="12700">
-            <a:solidFill>
-              <a:srgbClr val="123836"/>
-            </a:solidFill>
-            <a:prstDash val="solid"/>
-          </a:ln>
-        </p:spPr>
-      </p:sp>
-      <p:sp>
-        <p:nvSpPr>
-          <p:cNvPr id="45" name="Text 41"/>
+          <a:ln/>
+        </p:spPr>
+      </p:sp>
+      <p:sp>
+        <p:nvSpPr>
+          <p:cNvPr id="43" name="Text 39"/>
           <p:cNvSpPr/>
           <p:nvPr/>
         </p:nvSpPr>
@@ -11831,7 +10894,7 @@
           <a:ln/>
         </p:spPr>
         <p:txBody>
-          <a:bodyPr wrap="square" lIns="0" tIns="0" rIns="0" bIns="0" rtlCol="0" anchor="ctr"/>
+          <a:bodyPr wrap="square" rtlCol="0" anchor="ctr"/>
           <a:lstStyle/>
           <a:p>
             <a:pPr indent="0" marL="0">
@@ -11842,9 +10905,6 @@
                 <a:solidFill>
                   <a:srgbClr val="FFD282"/>
                 </a:solidFill>
-                <a:latin typeface="Calibri" pitchFamily="34" charset="0"/>
-                <a:ea typeface="Calibri" pitchFamily="34" charset="-122"/>
-                <a:cs typeface="Calibri" pitchFamily="34" charset="-120"/>
               </a:rPr>
               <a:t>PI28</a:t>
             </a:r>
@@ -11854,23 +10914,23 @@
       </p:sp>
       <p:sp>
         <p:nvSpPr>
-          <p:cNvPr id="46" name="Text 42"/>
+          <p:cNvPr id="44" name="Text 40"/>
           <p:cNvSpPr/>
           <p:nvPr/>
         </p:nvSpPr>
         <p:spPr>
           <a:xfrm>
             <a:off x="3749040" y="4133088"/>
-            <a:ext cx="2057400" cy="310896"/>
-          </a:xfrm>
-          <a:prstGeom prst="rect">
-            <a:avLst/>
-          </a:prstGeom>
-          <a:noFill/>
-          <a:ln/>
-        </p:spPr>
-        <p:txBody>
-          <a:bodyPr wrap="square" lIns="0" tIns="0" rIns="0" bIns="0" rtlCol="0" anchor="ctr"/>
+            <a:ext cx="2057400" cy="402336"/>
+          </a:xfrm>
+          <a:prstGeom prst="rect">
+            <a:avLst/>
+          </a:prstGeom>
+          <a:noFill/>
+          <a:ln/>
+        </p:spPr>
+        <p:txBody>
+          <a:bodyPr wrap="square" rtlCol="0" anchor="ctr"/>
           <a:lstStyle/>
           <a:p>
             <a:pPr indent="0" marL="0">
@@ -11881,9 +10941,6 @@
                 <a:solidFill>
                   <a:srgbClr val="FFFFFF"/>
                 </a:solidFill>
-                <a:latin typeface="Calibri" pitchFamily="34" charset="0"/>
-                <a:ea typeface="Calibri" pitchFamily="34" charset="-122"/>
-                <a:cs typeface="Calibri" pitchFamily="34" charset="-120"/>
               </a:rPr>
               <a:t>General Ledger Core · Transaction Processing</a:t>
             </a:r>
@@ -11893,14 +10950,14 @@
       </p:sp>
       <p:sp>
         <p:nvSpPr>
-          <p:cNvPr id="47" name="Shape 43"/>
+          <p:cNvPr id="45" name="Shape 41"/>
           <p:cNvSpPr/>
           <p:nvPr/>
         </p:nvSpPr>
         <p:spPr>
           <a:xfrm>
             <a:off x="6025896" y="4114800"/>
-            <a:ext cx="2743200" cy="566928"/>
+            <a:ext cx="2743200" cy="658368"/>
           </a:xfrm>
           <a:prstGeom prst="rect">
             <a:avLst/>
@@ -11908,17 +10965,12 @@
           <a:solidFill>
             <a:srgbClr val="1B5E52"/>
           </a:solidFill>
-          <a:ln w="12700">
-            <a:solidFill>
-              <a:srgbClr val="1B5E52"/>
-            </a:solidFill>
-            <a:prstDash val="solid"/>
-          </a:ln>
-        </p:spPr>
-      </p:sp>
-      <p:sp>
-        <p:nvSpPr>
-          <p:cNvPr id="48" name="Text 44"/>
+          <a:ln/>
+        </p:spPr>
+      </p:sp>
+      <p:sp>
+        <p:nvSpPr>
+          <p:cNvPr id="46" name="Text 42"/>
           <p:cNvSpPr/>
           <p:nvPr/>
         </p:nvSpPr>
@@ -11934,7 +10986,7 @@
           <a:ln/>
         </p:spPr>
         <p:txBody>
-          <a:bodyPr wrap="square" lIns="0" tIns="0" rIns="0" bIns="0" rtlCol="0" anchor="ctr"/>
+          <a:bodyPr wrap="square" rtlCol="0" anchor="ctr"/>
           <a:lstStyle/>
           <a:p>
             <a:pPr indent="0" marL="0">
@@ -11945,9 +10997,6 @@
                 <a:solidFill>
                   <a:srgbClr val="FFD282"/>
                 </a:solidFill>
-                <a:latin typeface="Calibri" pitchFamily="34" charset="0"/>
-                <a:ea typeface="Calibri" pitchFamily="34" charset="-122"/>
-                <a:cs typeface="Calibri" pitchFamily="34" charset="-120"/>
               </a:rPr>
               <a:t>PI29</a:t>
             </a:r>
@@ -11957,23 +11006,23 @@
       </p:sp>
       <p:sp>
         <p:nvSpPr>
-          <p:cNvPr id="49" name="Text 45"/>
+          <p:cNvPr id="47" name="Text 43"/>
           <p:cNvSpPr/>
           <p:nvPr/>
         </p:nvSpPr>
         <p:spPr>
           <a:xfrm>
             <a:off x="6647688" y="4133088"/>
-            <a:ext cx="2057400" cy="310896"/>
-          </a:xfrm>
-          <a:prstGeom prst="rect">
-            <a:avLst/>
-          </a:prstGeom>
-          <a:noFill/>
-          <a:ln/>
-        </p:spPr>
-        <p:txBody>
-          <a:bodyPr wrap="square" lIns="0" tIns="0" rIns="0" bIns="0" rtlCol="0" anchor="ctr"/>
+            <a:ext cx="2057400" cy="402336"/>
+          </a:xfrm>
+          <a:prstGeom prst="rect">
+            <a:avLst/>
+          </a:prstGeom>
+          <a:noFill/>
+          <a:ln/>
+        </p:spPr>
+        <p:txBody>
+          <a:bodyPr wrap="square" rtlCol="0" anchor="ctr"/>
           <a:lstStyle/>
           <a:p>
             <a:pPr indent="0" marL="0">
@@ -11984,9 +11033,6 @@
                 <a:solidFill>
                   <a:srgbClr val="FFFFFF"/>
                 </a:solidFill>
-                <a:latin typeface="Calibri" pitchFamily="34" charset="0"/>
-                <a:ea typeface="Calibri" pitchFamily="34" charset="-122"/>
-                <a:cs typeface="Calibri" pitchFamily="34" charset="-120"/>
               </a:rPr>
               <a:t>Account Reconciliation · Balance Management</a:t>
             </a:r>
@@ -11996,7 +11042,7 @@
       </p:sp>
       <p:sp>
         <p:nvSpPr>
-          <p:cNvPr id="50" name="Shape 46"/>
+          <p:cNvPr id="48" name="Shape 44"/>
           <p:cNvSpPr/>
           <p:nvPr/>
         </p:nvSpPr>
@@ -12011,17 +11057,12 @@
           <a:solidFill>
             <a:srgbClr val="123836"/>
           </a:solidFill>
-          <a:ln w="12700">
-            <a:solidFill>
-              <a:srgbClr val="123836"/>
-            </a:solidFill>
-            <a:prstDash val="solid"/>
-          </a:ln>
-        </p:spPr>
-      </p:sp>
-      <p:sp>
-        <p:nvSpPr>
-          <p:cNvPr id="51" name="Shape 47"/>
+          <a:ln/>
+        </p:spPr>
+      </p:sp>
+      <p:sp>
+        <p:nvSpPr>
+          <p:cNvPr id="49" name="Shape 45"/>
           <p:cNvSpPr/>
           <p:nvPr/>
         </p:nvSpPr>
@@ -12036,85 +11077,38 @@
           <a:solidFill>
             <a:srgbClr val="FFD282"/>
           </a:solidFill>
-          <a:ln w="12700">
-            <a:solidFill>
-              <a:srgbClr val="FFD282"/>
-            </a:solidFill>
-            <a:prstDash val="solid"/>
-          </a:ln>
-        </p:spPr>
-      </p:sp>
-      <p:sp>
-        <p:nvSpPr>
-          <p:cNvPr id="52" name="Text 48"/>
+          <a:ln/>
+        </p:spPr>
+      </p:sp>
+      <p:sp>
+        <p:nvSpPr>
+          <p:cNvPr id="50" name="Text 46"/>
           <p:cNvSpPr/>
           <p:nvPr/>
         </p:nvSpPr>
         <p:spPr>
           <a:xfrm>
             <a:off x="137160" y="4617720"/>
-            <a:ext cx="1920240" cy="347472"/>
-          </a:xfrm>
-          <a:prstGeom prst="rect">
-            <a:avLst/>
-          </a:prstGeom>
-          <a:noFill/>
-          <a:ln/>
-        </p:spPr>
-        <p:txBody>
-          <a:bodyPr wrap="square" lIns="0" tIns="0" rIns="0" bIns="0" rtlCol="0" anchor="ctr"/>
+            <a:ext cx="8869680" cy="347472"/>
+          </a:xfrm>
+          <a:prstGeom prst="rect">
+            <a:avLst/>
+          </a:prstGeom>
+          <a:noFill/>
+          <a:ln/>
+        </p:spPr>
+        <p:txBody>
+          <a:bodyPr wrap="square" rtlCol="0" anchor="ctr"/>
           <a:lstStyle/>
           <a:p>
             <a:pPr indent="0" marL="0">
               <a:buNone/>
             </a:pPr>
             <a:r>
-              <a:rPr lang="en-US" sz="800" b="1" dirty="0">
-                <a:solidFill>
-                  <a:srgbClr val="FFD282"/>
-                </a:solidFill>
-                <a:latin typeface="Calibri" pitchFamily="34" charset="0"/>
-                <a:ea typeface="Calibri" pitchFamily="34" charset="-122"/>
-                <a:cs typeface="Calibri" pitchFamily="34" charset="-120"/>
-              </a:rPr>
-              <a:t>Key Talking Points for SteerCo:</a:t>
-            </a:r>
-            <a:endParaRPr lang="en-US" sz="800" dirty="0"/>
-          </a:p>
-        </p:txBody>
-      </p:sp>
-      <p:sp>
-        <p:nvSpPr>
-          <p:cNvPr id="53" name="Text 49"/>
-          <p:cNvSpPr/>
-          <p:nvPr/>
-        </p:nvSpPr>
-        <p:spPr>
-          <a:xfrm>
-            <a:off x="2103120" y="4617720"/>
-            <a:ext cx="6903720" cy="347472"/>
-          </a:xfrm>
-          <a:prstGeom prst="rect">
-            <a:avLst/>
-          </a:prstGeom>
-          <a:noFill/>
-          <a:ln/>
-        </p:spPr>
-        <p:txBody>
-          <a:bodyPr wrap="square" lIns="0" tIns="0" rIns="0" bIns="0" rtlCol="0" anchor="ctr"/>
-          <a:lstStyle/>
-          <a:p>
-            <a:pPr indent="0" marL="0">
-              <a:buNone/>
-            </a:pPr>
-            <a:r>
               <a:rPr lang="en-US" sz="750" dirty="0">
                 <a:solidFill>
                   <a:srgbClr val="D0D7D7"/>
                 </a:solidFill>
-                <a:latin typeface="Calibri" pitchFamily="34" charset="0"/>
-                <a:ea typeface="Calibri" pitchFamily="34" charset="-122"/>
-                <a:cs typeface="Calibri" pitchFamily="34" charset="-120"/>
               </a:rPr>
               <a:t>Second-largest investment — foundational to revenue assurance   ·   PI28 delivery must be confirmed   ·   All features P1/P2 — no descoping without revenue risk</a:t>
             </a:r>
@@ -12171,12 +11165,7 @@
           <a:solidFill>
             <a:srgbClr val="123836"/>
           </a:solidFill>
-          <a:ln w="12700">
-            <a:solidFill>
-              <a:srgbClr val="123836"/>
-            </a:solidFill>
-            <a:prstDash val="solid"/>
-          </a:ln>
+          <a:ln/>
         </p:spPr>
       </p:sp>
       <p:sp>
@@ -12196,12 +11185,7 @@
           <a:solidFill>
             <a:srgbClr val="FF6359"/>
           </a:solidFill>
-          <a:ln w="12700">
-            <a:solidFill>
-              <a:srgbClr val="FF6359"/>
-            </a:solidFill>
-            <a:prstDash val="solid"/>
-          </a:ln>
+          <a:ln/>
         </p:spPr>
       </p:sp>
       <p:sp>
@@ -12222,7 +11206,7 @@
           <a:ln/>
         </p:spPr>
         <p:txBody>
-          <a:bodyPr wrap="square" lIns="0" tIns="0" rIns="0" bIns="0" rtlCol="0" anchor="ctr"/>
+          <a:bodyPr wrap="square" rtlCol="0" anchor="ctr"/>
           <a:lstStyle/>
           <a:p>
             <a:pPr indent="0" marL="0">
@@ -12261,7 +11245,7 @@
           <a:ln/>
         </p:spPr>
         <p:txBody>
-          <a:bodyPr wrap="square" lIns="0" tIns="0" rIns="0" bIns="0" rtlCol="0" anchor="ctr"/>
+          <a:bodyPr wrap="square" rtlCol="0" anchor="ctr"/>
           <a:lstStyle/>
           <a:p>
             <a:pPr indent="0" marL="0">
@@ -12300,7 +11284,7 @@
           <a:ln/>
         </p:spPr>
         <p:txBody>
-          <a:bodyPr wrap="square" lIns="0" tIns="0" rIns="0" bIns="0" rtlCol="0" anchor="ctr"/>
+          <a:bodyPr wrap="square" rtlCol="0" anchor="ctr"/>
           <a:lstStyle/>
           <a:p>
             <a:pPr algn="r" indent="0" marL="0">
@@ -12338,12 +11322,7 @@
           <a:solidFill>
             <a:srgbClr val="123836"/>
           </a:solidFill>
-          <a:ln w="12700">
-            <a:solidFill>
-              <a:srgbClr val="123836"/>
-            </a:solidFill>
-            <a:prstDash val="solid"/>
-          </a:ln>
+          <a:ln/>
         </p:spPr>
       </p:sp>
       <p:sp>
@@ -12364,7 +11343,7 @@
           <a:ln/>
         </p:spPr>
         <p:txBody>
-          <a:bodyPr wrap="square" lIns="0" tIns="0" rIns="0" bIns="0" rtlCol="0" anchor="ctr"/>
+          <a:bodyPr wrap="square" rtlCol="0" anchor="ctr"/>
           <a:lstStyle/>
           <a:p>
             <a:pPr indent="0" marL="0">
@@ -12403,7 +11382,7 @@
           <a:ln/>
         </p:spPr>
         <p:txBody>
-          <a:bodyPr wrap="square" lIns="0" tIns="0" rIns="0" bIns="0" rtlCol="0" anchor="ctr"/>
+          <a:bodyPr wrap="square" rtlCol="0" anchor="ctr"/>
           <a:lstStyle/>
           <a:p>
             <a:pPr algn="r" indent="0" marL="0">
@@ -12473,12 +11452,7 @@
           <a:solidFill>
             <a:srgbClr val="FF6359"/>
           </a:solidFill>
-          <a:ln w="12700">
-            <a:solidFill>
-              <a:srgbClr val="FF6359"/>
-            </a:solidFill>
-            <a:prstDash val="solid"/>
-          </a:ln>
+          <a:ln/>
         </p:spPr>
       </p:sp>
       <p:sp>
@@ -12499,7 +11473,7 @@
           <a:ln/>
         </p:spPr>
         <p:txBody>
-          <a:bodyPr wrap="square" lIns="0" tIns="0" rIns="0" bIns="0" rtlCol="0" anchor="ctr"/>
+          <a:bodyPr wrap="square" rtlCol="0" anchor="ctr"/>
           <a:lstStyle/>
           <a:p>
             <a:pPr algn="ctr" indent="0" marL="0">
@@ -12538,7 +11512,7 @@
           <a:ln/>
         </p:spPr>
         <p:txBody>
-          <a:bodyPr wrap="square" lIns="0" tIns="0" rIns="0" bIns="0" rtlCol="0" anchor="ctr"/>
+          <a:bodyPr wrap="square" rtlCol="0" anchor="ctr"/>
           <a:lstStyle/>
           <a:p>
             <a:pPr algn="ctr" indent="0" marL="0">
@@ -12577,7 +11551,7 @@
           <a:ln/>
         </p:spPr>
         <p:txBody>
-          <a:bodyPr wrap="square" lIns="0" tIns="0" rIns="0" bIns="0" rtlCol="0" anchor="ctr"/>
+          <a:bodyPr wrap="square" rtlCol="0" anchor="ctr"/>
           <a:lstStyle/>
           <a:p>
             <a:pPr algn="ctr" indent="0" marL="0">
@@ -12647,12 +11621,7 @@
           <a:solidFill>
             <a:srgbClr val="FF6359"/>
           </a:solidFill>
-          <a:ln w="12700">
-            <a:solidFill>
-              <a:srgbClr val="FF6359"/>
-            </a:solidFill>
-            <a:prstDash val="solid"/>
-          </a:ln>
+          <a:ln/>
         </p:spPr>
       </p:sp>
       <p:sp>
@@ -12673,7 +11642,7 @@
           <a:ln/>
         </p:spPr>
         <p:txBody>
-          <a:bodyPr wrap="square" lIns="0" tIns="0" rIns="0" bIns="0" rtlCol="0" anchor="ctr"/>
+          <a:bodyPr wrap="square" rtlCol="0" anchor="ctr"/>
           <a:lstStyle/>
           <a:p>
             <a:pPr algn="ctr" indent="0" marL="0">
@@ -12712,7 +11681,7 @@
           <a:ln/>
         </p:spPr>
         <p:txBody>
-          <a:bodyPr wrap="square" lIns="0" tIns="0" rIns="0" bIns="0" rtlCol="0" anchor="ctr"/>
+          <a:bodyPr wrap="square" rtlCol="0" anchor="ctr"/>
           <a:lstStyle/>
           <a:p>
             <a:pPr algn="ctr" indent="0" marL="0">
@@ -12751,7 +11720,7 @@
           <a:ln/>
         </p:spPr>
         <p:txBody>
-          <a:bodyPr wrap="square" lIns="0" tIns="0" rIns="0" bIns="0" rtlCol="0" anchor="ctr"/>
+          <a:bodyPr wrap="square" rtlCol="0" anchor="ctr"/>
           <a:lstStyle/>
           <a:p>
             <a:pPr algn="ctr" indent="0" marL="0">
@@ -12821,12 +11790,7 @@
           <a:solidFill>
             <a:srgbClr val="FF6359"/>
           </a:solidFill>
-          <a:ln w="12700">
-            <a:solidFill>
-              <a:srgbClr val="FF6359"/>
-            </a:solidFill>
-            <a:prstDash val="solid"/>
-          </a:ln>
+          <a:ln/>
         </p:spPr>
       </p:sp>
       <p:sp>
@@ -12847,7 +11811,7 @@
           <a:ln/>
         </p:spPr>
         <p:txBody>
-          <a:bodyPr wrap="square" lIns="0" tIns="0" rIns="0" bIns="0" rtlCol="0" anchor="ctr"/>
+          <a:bodyPr wrap="square" rtlCol="0" anchor="ctr"/>
           <a:lstStyle/>
           <a:p>
             <a:pPr algn="ctr" indent="0" marL="0">
@@ -12886,7 +11850,7 @@
           <a:ln/>
         </p:spPr>
         <p:txBody>
-          <a:bodyPr wrap="square" lIns="0" tIns="0" rIns="0" bIns="0" rtlCol="0" anchor="ctr"/>
+          <a:bodyPr wrap="square" rtlCol="0" anchor="ctr"/>
           <a:lstStyle/>
           <a:p>
             <a:pPr algn="ctr" indent="0" marL="0">
@@ -12925,7 +11889,7 @@
           <a:ln/>
         </p:spPr>
         <p:txBody>
-          <a:bodyPr wrap="square" lIns="0" tIns="0" rIns="0" bIns="0" rtlCol="0" anchor="ctr"/>
+          <a:bodyPr wrap="square" rtlCol="0" anchor="ctr"/>
           <a:lstStyle/>
           <a:p>
             <a:pPr algn="ctr" indent="0" marL="0">
@@ -12995,12 +11959,7 @@
           <a:solidFill>
             <a:srgbClr val="FF6359"/>
           </a:solidFill>
-          <a:ln w="12700">
-            <a:solidFill>
-              <a:srgbClr val="FF6359"/>
-            </a:solidFill>
-            <a:prstDash val="solid"/>
-          </a:ln>
+          <a:ln/>
         </p:spPr>
       </p:sp>
       <p:sp>
@@ -13021,7 +11980,7 @@
           <a:ln/>
         </p:spPr>
         <p:txBody>
-          <a:bodyPr wrap="square" lIns="0" tIns="0" rIns="0" bIns="0" rtlCol="0" anchor="ctr"/>
+          <a:bodyPr wrap="square" rtlCol="0" anchor="ctr"/>
           <a:lstStyle/>
           <a:p>
             <a:pPr algn="ctr" indent="0" marL="0">
@@ -13060,7 +12019,7 @@
           <a:ln/>
         </p:spPr>
         <p:txBody>
-          <a:bodyPr wrap="square" lIns="0" tIns="0" rIns="0" bIns="0" rtlCol="0" anchor="ctr"/>
+          <a:bodyPr wrap="square" rtlCol="0" anchor="ctr"/>
           <a:lstStyle/>
           <a:p>
             <a:pPr algn="ctr" indent="0" marL="0">
@@ -13099,7 +12058,7 @@
           <a:ln/>
         </p:spPr>
         <p:txBody>
-          <a:bodyPr wrap="square" lIns="0" tIns="0" rIns="0" bIns="0" rtlCol="0" anchor="ctr"/>
+          <a:bodyPr wrap="square" rtlCol="0" anchor="ctr"/>
           <a:lstStyle/>
           <a:p>
             <a:pPr algn="ctr" indent="0" marL="0">
@@ -13128,17 +12087,17 @@
         </p:nvSpPr>
         <p:spPr>
           <a:xfrm>
-            <a:off x="228600" y="2011680"/>
-            <a:ext cx="4114800" cy="228600"/>
-          </a:xfrm>
-          <a:prstGeom prst="rect">
-            <a:avLst/>
-          </a:prstGeom>
-          <a:noFill/>
-          <a:ln/>
-        </p:spPr>
-        <p:txBody>
-          <a:bodyPr wrap="square" lIns="0" tIns="0" rIns="0" bIns="0" rtlCol="0" anchor="ctr"/>
+            <a:off x="228600" y="1965960"/>
+            <a:ext cx="2743200" cy="228600"/>
+          </a:xfrm>
+          <a:prstGeom prst="rect">
+            <a:avLst/>
+          </a:prstGeom>
+          <a:noFill/>
+          <a:ln/>
+        </p:spPr>
+        <p:txBody>
+          <a:bodyPr wrap="square" rtlCol="0" anchor="ctr"/>
           <a:lstStyle/>
           <a:p>
             <a:pPr indent="0" marL="0">
@@ -13149,9 +12108,6 @@
                 <a:solidFill>
                   <a:srgbClr val="FF6359"/>
                 </a:solidFill>
-                <a:latin typeface="Calibri" pitchFamily="34" charset="0"/>
-                <a:ea typeface="Calibri" pitchFamily="34" charset="-122"/>
-                <a:cs typeface="Calibri" pitchFamily="34" charset="-120"/>
               </a:rPr>
               <a:t>Business Scope</a:t>
             </a:r>
@@ -13167,34 +12123,31 @@
         </p:nvSpPr>
         <p:spPr>
           <a:xfrm>
-            <a:off x="228600" y="2258568"/>
-            <a:ext cx="4114800" cy="822960"/>
-          </a:xfrm>
-          <a:prstGeom prst="rect">
-            <a:avLst/>
-          </a:prstGeom>
-          <a:noFill/>
-          <a:ln/>
-        </p:spPr>
-        <p:txBody>
-          <a:bodyPr wrap="square" lIns="0" tIns="0" rIns="0" bIns="0" rtlCol="0" anchor="ctr"/>
+            <a:off x="228600" y="2212848"/>
+            <a:ext cx="2743200" cy="685800"/>
+          </a:xfrm>
+          <a:prstGeom prst="rect">
+            <a:avLst/>
+          </a:prstGeom>
+          <a:noFill/>
+          <a:ln/>
+        </p:spPr>
+        <p:txBody>
+          <a:bodyPr wrap="square" rtlCol="0" anchor="ctr"/>
           <a:lstStyle/>
           <a:p>
             <a:pPr indent="0" marL="0">
               <a:buNone/>
             </a:pPr>
             <a:r>
-              <a:rPr lang="en-US" sz="950" dirty="0">
+              <a:rPr lang="en-US" sz="900" dirty="0">
                 <a:solidFill>
                   <a:srgbClr val="141E1E"/>
                 </a:solidFill>
-                <a:latin typeface="Calibri" pitchFamily="34" charset="0"/>
-                <a:ea typeface="Calibri" pitchFamily="34" charset="-122"/>
-                <a:cs typeface="Calibri" pitchFamily="34" charset="-120"/>
               </a:rPr>
               <a:t>Manages the generation, issuance, and tracking of tax bills and formal assessments, alongside configurable installment plan management. Enables revenue authorities to systematically collect outstanding liabilities while offering structured repayment arrangements to taxpayers.</a:t>
             </a:r>
-            <a:endParaRPr lang="en-US" sz="950" dirty="0"/>
+            <a:endParaRPr lang="en-US" sz="900" dirty="0"/>
           </a:p>
         </p:txBody>
       </p:sp>
@@ -13206,17 +12159,17 @@
         </p:nvSpPr>
         <p:spPr>
           <a:xfrm>
-            <a:off x="228600" y="3127248"/>
-            <a:ext cx="4114800" cy="228600"/>
-          </a:xfrm>
-          <a:prstGeom prst="rect">
-            <a:avLst/>
-          </a:prstGeom>
-          <a:noFill/>
-          <a:ln/>
-        </p:spPr>
-        <p:txBody>
-          <a:bodyPr wrap="square" lIns="0" tIns="0" rIns="0" bIns="0" rtlCol="0" anchor="ctr"/>
+            <a:off x="228600" y="2944368"/>
+            <a:ext cx="2743200" cy="201168"/>
+          </a:xfrm>
+          <a:prstGeom prst="rect">
+            <a:avLst/>
+          </a:prstGeom>
+          <a:noFill/>
+          <a:ln/>
+        </p:spPr>
+        <p:txBody>
+          <a:bodyPr wrap="square" rtlCol="0" anchor="ctr"/>
           <a:lstStyle/>
           <a:p>
             <a:pPr indent="0" marL="0">
@@ -13227,9 +12180,6 @@
                 <a:solidFill>
                   <a:srgbClr val="FF6359"/>
                 </a:solidFill>
-                <a:latin typeface="Calibri" pitchFamily="34" charset="0"/>
-                <a:ea typeface="Calibri" pitchFamily="34" charset="-122"/>
-                <a:cs typeface="Calibri" pitchFamily="34" charset="-120"/>
               </a:rPr>
               <a:t>Key Investment Benefits</a:t>
             </a:r>
@@ -13245,8 +12195,8 @@
         </p:nvSpPr>
         <p:spPr>
           <a:xfrm>
-            <a:off x="228600" y="3383280"/>
-            <a:ext cx="4114800" cy="1234440"/>
+            <a:off x="228600" y="3172968"/>
+            <a:ext cx="2743200" cy="749808"/>
           </a:xfrm>
           <a:prstGeom prst="rect">
             <a:avLst/>
@@ -13267,9 +12217,6 @@
                 <a:solidFill>
                   <a:srgbClr val="4A5C5A"/>
                 </a:solidFill>
-                <a:latin typeface="Calibri" pitchFamily="34" charset="0"/>
-                <a:ea typeface="Calibri" pitchFamily="34" charset="-122"/>
-                <a:cs typeface="Calibri" pitchFamily="34" charset="-120"/>
               </a:rPr>
               <a:t>Automated billing reduces manual officer workload and accelerates revenue collection cycles</a:t>
             </a:r>
@@ -13285,9 +12232,6 @@
                 <a:solidFill>
                   <a:srgbClr val="4A5C5A"/>
                 </a:solidFill>
-                <a:latin typeface="Calibri" pitchFamily="34" charset="0"/>
-                <a:ea typeface="Calibri" pitchFamily="34" charset="-122"/>
-                <a:cs typeface="Calibri" pitchFamily="34" charset="-120"/>
               </a:rPr>
               <a:t>Structured installment plans increase voluntary compliance and recovery rates</a:t>
             </a:r>
@@ -13303,9 +12247,6 @@
                 <a:solidFill>
                   <a:srgbClr val="4A5C5A"/>
                 </a:solidFill>
-                <a:latin typeface="Calibri" pitchFamily="34" charset="0"/>
-                <a:ea typeface="Calibri" pitchFamily="34" charset="-122"/>
-                <a:cs typeface="Calibri" pitchFamily="34" charset="-120"/>
               </a:rPr>
               <a:t>Formal assessment workflows create enforceable legal liability records</a:t>
             </a:r>
@@ -13321,9 +12262,6 @@
                 <a:solidFill>
                   <a:srgbClr val="4A5C5A"/>
                 </a:solidFill>
-                <a:latin typeface="Calibri" pitchFamily="34" charset="0"/>
-                <a:ea typeface="Calibri" pitchFamily="34" charset="-122"/>
-                <a:cs typeface="Calibri" pitchFamily="34" charset="-120"/>
               </a:rPr>
               <a:t>Reduces revenue leakage by ensuring all liabilities are captured and tracked</a:t>
             </a:r>
@@ -13339,17 +12277,17 @@
         </p:nvSpPr>
         <p:spPr>
           <a:xfrm>
-            <a:off x="4480560" y="2011680"/>
-            <a:ext cx="4434840" cy="228600"/>
-          </a:xfrm>
-          <a:prstGeom prst="rect">
-            <a:avLst/>
-          </a:prstGeom>
-          <a:noFill/>
-          <a:ln/>
-        </p:spPr>
-        <p:txBody>
-          <a:bodyPr wrap="square" lIns="0" tIns="0" rIns="0" bIns="0" rtlCol="0" anchor="ctr"/>
+            <a:off x="3108960" y="1965960"/>
+            <a:ext cx="3017520" cy="228600"/>
+          </a:xfrm>
+          <a:prstGeom prst="rect">
+            <a:avLst/>
+          </a:prstGeom>
+          <a:noFill/>
+          <a:ln/>
+        </p:spPr>
+        <p:txBody>
+          <a:bodyPr wrap="square" rtlCol="0" anchor="ctr"/>
           <a:lstStyle/>
           <a:p>
             <a:pPr indent="0" marL="0">
@@ -13360,11 +12298,8 @@
                 <a:solidFill>
                   <a:srgbClr val="FF6359"/>
                 </a:solidFill>
-                <a:latin typeface="Calibri" pitchFamily="34" charset="0"/>
-                <a:ea typeface="Calibri" pitchFamily="34" charset="-122"/>
-                <a:cs typeface="Calibri" pitchFamily="34" charset="-120"/>
-              </a:rPr>
-              <a:t>Feature Breakdown &amp; PI Planning</a:t>
+              </a:rPr>
+              <a:t>Estimated Effort by Feature Area</a:t>
             </a:r>
             <a:endParaRPr lang="en-US" sz="1000" dirty="0"/>
           </a:p>
@@ -13372,1420 +12307,13 @@
       </p:sp>
       <p:graphicFrame>
         <p:nvGraphicFramePr>
-          <p:cNvPr id="7" name="Table 0"/>
-          <p:cNvGraphicFramePr>
-            <a:graphicFrameLocks noGrp="1"/>
-          </p:cNvGraphicFramePr>
-          <p:nvPr>
-            <p:extLst>
-              <p:ext uri="{D42A27DB-BD31-4B8C-83A1-F6EECF244321}">
-                <p14:modId xmlns:p14="http://schemas.microsoft.com/office/powerpoint/2010/main" val="1579011935"/>
-              </p:ext>
-            </p:extLst>
-          </p:nvPr>
+          <p:cNvPr id="35" name="Chart 0" descr=""/>
+          <p:cNvGraphicFramePr/>
+          <p:nvPr/>
         </p:nvGraphicFramePr>
         <p:xfrm>
-          <a:off x="4480560" y="2267712"/>
-          <a:ext cx="4434840" cy="1005840"/>
-        </p:xfrm>
-        <a:graphic>
-          <a:graphicData uri="http://schemas.openxmlformats.org/drawingml/2006/table">
-            <a:tbl>
-              <a:tblPr/>
-              <a:tblGrid>
-                <a:gridCol w="1920240"/>
-                <a:gridCol w="777240"/>
-                <a:gridCol w="640080"/>
-                <a:gridCol w="548640"/>
-                <a:gridCol w="548640"/>
-              </a:tblGrid>
-              <a:tr h="251460">
-                <a:tc>
-                  <a:txBody>
-                    <a:bodyPr/>
-                    <a:lstStyle/>
-                    <a:p>
-                      <a:pPr indent="0" marL="0">
-                        <a:buNone/>
-                      </a:pPr>
-                      <a:r>
-                        <a:rPr lang="en-US" sz="900" b="1" dirty="0">
-                          <a:solidFill>
-                            <a:srgbClr val="FFFFFF"/>
-                          </a:solidFill>
-                          <a:latin typeface="Calibri" pitchFamily="34" charset="0"/>
-                          <a:ea typeface="Calibri" pitchFamily="34" charset="-122"/>
-                          <a:cs typeface="Calibri" pitchFamily="34" charset="-120"/>
-                        </a:rPr>
-                        <a:t>Feature</a:t>
-                      </a:r>
-                      <a:endParaRPr lang="en-US" sz="900" dirty="0">
-                        <a:latin typeface="Calibri" charset="0"/>
-                        <a:ea typeface="Calibri" charset="0"/>
-                        <a:cs typeface="Calibri" charset="0"/>
-                      </a:endParaRPr>
-                    </a:p>
-                  </a:txBody>
-                  <a:tcPr marL="91440" marR="91440" marT="45720" marB="45720">
-                    <a:lnL w="6350" cap="flat" cmpd="sng" algn="ctr">
-                      <a:solidFill>
-                        <a:srgbClr val="D0D7D7"/>
-                      </a:solidFill>
-                      <a:prstDash val="solid"/>
-                      <a:round/>
-                      <a:headEnd type="none" w="med" len="med"/>
-                      <a:tailEnd type="none" w="med" len="med"/>
-                    </a:lnL>
-                    <a:lnR w="6350" cap="flat" cmpd="sng" algn="ctr">
-                      <a:solidFill>
-                        <a:srgbClr val="D0D7D7"/>
-                      </a:solidFill>
-                      <a:prstDash val="solid"/>
-                      <a:round/>
-                      <a:headEnd type="none" w="med" len="med"/>
-                      <a:tailEnd type="none" w="med" len="med"/>
-                    </a:lnR>
-                    <a:lnT w="6350" cap="flat" cmpd="sng" algn="ctr">
-                      <a:solidFill>
-                        <a:srgbClr val="D0D7D7"/>
-                      </a:solidFill>
-                      <a:prstDash val="solid"/>
-                      <a:round/>
-                      <a:headEnd type="none" w="med" len="med"/>
-                      <a:tailEnd type="none" w="med" len="med"/>
-                    </a:lnT>
-                    <a:lnB w="6350" cap="flat" cmpd="sng" algn="ctr">
-                      <a:solidFill>
-                        <a:srgbClr val="D0D7D7"/>
-                      </a:solidFill>
-                      <a:prstDash val="solid"/>
-                      <a:round/>
-                      <a:headEnd type="none" w="med" len="med"/>
-                      <a:tailEnd type="none" w="med" len="med"/>
-                    </a:lnB>
-                    <a:solidFill>
-                      <a:srgbClr val="123836"/>
-                    </a:solidFill>
-                  </a:tcPr>
-                </a:tc>
-                <a:tc>
-                  <a:txBody>
-                    <a:bodyPr/>
-                    <a:lstStyle/>
-                    <a:p>
-                      <a:pPr algn="ctr" indent="0" marL="0">
-                        <a:buNone/>
-                      </a:pPr>
-                      <a:r>
-                        <a:rPr lang="en-US" sz="900" b="1" dirty="0">
-                          <a:solidFill>
-                            <a:srgbClr val="FFFFFF"/>
-                          </a:solidFill>
-                          <a:latin typeface="Calibri" pitchFamily="34" charset="0"/>
-                          <a:ea typeface="Calibri" pitchFamily="34" charset="-122"/>
-                          <a:cs typeface="Calibri" pitchFamily="34" charset="-120"/>
-                        </a:rPr>
-                        <a:t>Effort (H)</a:t>
-                      </a:r>
-                      <a:endParaRPr lang="en-US" sz="900" dirty="0">
-                        <a:latin typeface="Calibri" charset="0"/>
-                        <a:ea typeface="Calibri" charset="0"/>
-                        <a:cs typeface="Calibri" charset="0"/>
-                      </a:endParaRPr>
-                    </a:p>
-                  </a:txBody>
-                  <a:tcPr marL="91440" marR="91440" marT="45720" marB="45720">
-                    <a:lnL w="6350" cap="flat" cmpd="sng" algn="ctr">
-                      <a:solidFill>
-                        <a:srgbClr val="D0D7D7"/>
-                      </a:solidFill>
-                      <a:prstDash val="solid"/>
-                      <a:round/>
-                      <a:headEnd type="none" w="med" len="med"/>
-                      <a:tailEnd type="none" w="med" len="med"/>
-                    </a:lnL>
-                    <a:lnR w="6350" cap="flat" cmpd="sng" algn="ctr">
-                      <a:solidFill>
-                        <a:srgbClr val="D0D7D7"/>
-                      </a:solidFill>
-                      <a:prstDash val="solid"/>
-                      <a:round/>
-                      <a:headEnd type="none" w="med" len="med"/>
-                      <a:tailEnd type="none" w="med" len="med"/>
-                    </a:lnR>
-                    <a:lnT w="6350" cap="flat" cmpd="sng" algn="ctr">
-                      <a:solidFill>
-                        <a:srgbClr val="D0D7D7"/>
-                      </a:solidFill>
-                      <a:prstDash val="solid"/>
-                      <a:round/>
-                      <a:headEnd type="none" w="med" len="med"/>
-                      <a:tailEnd type="none" w="med" len="med"/>
-                    </a:lnT>
-                    <a:lnB w="6350" cap="flat" cmpd="sng" algn="ctr">
-                      <a:solidFill>
-                        <a:srgbClr val="D0D7D7"/>
-                      </a:solidFill>
-                      <a:prstDash val="solid"/>
-                      <a:round/>
-                      <a:headEnd type="none" w="med" len="med"/>
-                      <a:tailEnd type="none" w="med" len="med"/>
-                    </a:lnB>
-                    <a:solidFill>
-                      <a:srgbClr val="123836"/>
-                    </a:solidFill>
-                  </a:tcPr>
-                </a:tc>
-                <a:tc>
-                  <a:txBody>
-                    <a:bodyPr/>
-                    <a:lstStyle/>
-                    <a:p>
-                      <a:pPr algn="ctr" indent="0" marL="0">
-                        <a:buNone/>
-                      </a:pPr>
-                      <a:r>
-                        <a:rPr lang="en-US" sz="900" b="1" dirty="0">
-                          <a:solidFill>
-                            <a:srgbClr val="FFFFFF"/>
-                          </a:solidFill>
-                          <a:latin typeface="Calibri" pitchFamily="34" charset="0"/>
-                          <a:ea typeface="Calibri" pitchFamily="34" charset="-122"/>
-                          <a:cs typeface="Calibri" pitchFamily="34" charset="-120"/>
-                        </a:rPr>
-                        <a:t>Priority</a:t>
-                      </a:r>
-                      <a:endParaRPr lang="en-US" sz="900" dirty="0">
-                        <a:latin typeface="Calibri" charset="0"/>
-                        <a:ea typeface="Calibri" charset="0"/>
-                        <a:cs typeface="Calibri" charset="0"/>
-                      </a:endParaRPr>
-                    </a:p>
-                  </a:txBody>
-                  <a:tcPr marL="91440" marR="91440" marT="45720" marB="45720">
-                    <a:lnL w="6350" cap="flat" cmpd="sng" algn="ctr">
-                      <a:solidFill>
-                        <a:srgbClr val="D0D7D7"/>
-                      </a:solidFill>
-                      <a:prstDash val="solid"/>
-                      <a:round/>
-                      <a:headEnd type="none" w="med" len="med"/>
-                      <a:tailEnd type="none" w="med" len="med"/>
-                    </a:lnL>
-                    <a:lnR w="6350" cap="flat" cmpd="sng" algn="ctr">
-                      <a:solidFill>
-                        <a:srgbClr val="D0D7D7"/>
-                      </a:solidFill>
-                      <a:prstDash val="solid"/>
-                      <a:round/>
-                      <a:headEnd type="none" w="med" len="med"/>
-                      <a:tailEnd type="none" w="med" len="med"/>
-                    </a:lnR>
-                    <a:lnT w="6350" cap="flat" cmpd="sng" algn="ctr">
-                      <a:solidFill>
-                        <a:srgbClr val="D0D7D7"/>
-                      </a:solidFill>
-                      <a:prstDash val="solid"/>
-                      <a:round/>
-                      <a:headEnd type="none" w="med" len="med"/>
-                      <a:tailEnd type="none" w="med" len="med"/>
-                    </a:lnT>
-                    <a:lnB w="6350" cap="flat" cmpd="sng" algn="ctr">
-                      <a:solidFill>
-                        <a:srgbClr val="D0D7D7"/>
-                      </a:solidFill>
-                      <a:prstDash val="solid"/>
-                      <a:round/>
-                      <a:headEnd type="none" w="med" len="med"/>
-                      <a:tailEnd type="none" w="med" len="med"/>
-                    </a:lnB>
-                    <a:solidFill>
-                      <a:srgbClr val="123836"/>
-                    </a:solidFill>
-                  </a:tcPr>
-                </a:tc>
-                <a:tc>
-                  <a:txBody>
-                    <a:bodyPr/>
-                    <a:lstStyle/>
-                    <a:p>
-                      <a:pPr algn="ctr" indent="0" marL="0">
-                        <a:buNone/>
-                      </a:pPr>
-                      <a:r>
-                        <a:rPr lang="en-US" sz="900" b="1" dirty="0">
-                          <a:solidFill>
-                            <a:srgbClr val="FFFFFF"/>
-                          </a:solidFill>
-                          <a:latin typeface="Calibri" pitchFamily="34" charset="0"/>
-                          <a:ea typeface="Calibri" pitchFamily="34" charset="-122"/>
-                          <a:cs typeface="Calibri" pitchFamily="34" charset="-120"/>
-                        </a:rPr>
-                        <a:t>PI28</a:t>
-                      </a:r>
-                      <a:endParaRPr lang="en-US" sz="900" dirty="0">
-                        <a:latin typeface="Calibri" charset="0"/>
-                        <a:ea typeface="Calibri" charset="0"/>
-                        <a:cs typeface="Calibri" charset="0"/>
-                      </a:endParaRPr>
-                    </a:p>
-                  </a:txBody>
-                  <a:tcPr marL="91440" marR="91440" marT="45720" marB="45720">
-                    <a:lnL w="6350" cap="flat" cmpd="sng" algn="ctr">
-                      <a:solidFill>
-                        <a:srgbClr val="D0D7D7"/>
-                      </a:solidFill>
-                      <a:prstDash val="solid"/>
-                      <a:round/>
-                      <a:headEnd type="none" w="med" len="med"/>
-                      <a:tailEnd type="none" w="med" len="med"/>
-                    </a:lnL>
-                    <a:lnR w="6350" cap="flat" cmpd="sng" algn="ctr">
-                      <a:solidFill>
-                        <a:srgbClr val="D0D7D7"/>
-                      </a:solidFill>
-                      <a:prstDash val="solid"/>
-                      <a:round/>
-                      <a:headEnd type="none" w="med" len="med"/>
-                      <a:tailEnd type="none" w="med" len="med"/>
-                    </a:lnR>
-                    <a:lnT w="6350" cap="flat" cmpd="sng" algn="ctr">
-                      <a:solidFill>
-                        <a:srgbClr val="D0D7D7"/>
-                      </a:solidFill>
-                      <a:prstDash val="solid"/>
-                      <a:round/>
-                      <a:headEnd type="none" w="med" len="med"/>
-                      <a:tailEnd type="none" w="med" len="med"/>
-                    </a:lnT>
-                    <a:lnB w="6350" cap="flat" cmpd="sng" algn="ctr">
-                      <a:solidFill>
-                        <a:srgbClr val="D0D7D7"/>
-                      </a:solidFill>
-                      <a:prstDash val="solid"/>
-                      <a:round/>
-                      <a:headEnd type="none" w="med" len="med"/>
-                      <a:tailEnd type="none" w="med" len="med"/>
-                    </a:lnB>
-                    <a:solidFill>
-                      <a:srgbClr val="123836"/>
-                    </a:solidFill>
-                  </a:tcPr>
-                </a:tc>
-                <a:tc>
-                  <a:txBody>
-                    <a:bodyPr/>
-                    <a:lstStyle/>
-                    <a:p>
-                      <a:pPr algn="ctr" indent="0" marL="0">
-                        <a:buNone/>
-                      </a:pPr>
-                      <a:r>
-                        <a:rPr lang="en-US" sz="900" b="1" dirty="0">
-                          <a:solidFill>
-                            <a:srgbClr val="FFFFFF"/>
-                          </a:solidFill>
-                          <a:latin typeface="Calibri" pitchFamily="34" charset="0"/>
-                          <a:ea typeface="Calibri" pitchFamily="34" charset="-122"/>
-                          <a:cs typeface="Calibri" pitchFamily="34" charset="-120"/>
-                        </a:rPr>
-                        <a:t>PI29</a:t>
-                      </a:r>
-                      <a:endParaRPr lang="en-US" sz="900" dirty="0">
-                        <a:latin typeface="Calibri" charset="0"/>
-                        <a:ea typeface="Calibri" charset="0"/>
-                        <a:cs typeface="Calibri" charset="0"/>
-                      </a:endParaRPr>
-                    </a:p>
-                  </a:txBody>
-                  <a:tcPr marL="91440" marR="91440" marT="45720" marB="45720">
-                    <a:lnL w="6350" cap="flat" cmpd="sng" algn="ctr">
-                      <a:solidFill>
-                        <a:srgbClr val="D0D7D7"/>
-                      </a:solidFill>
-                      <a:prstDash val="solid"/>
-                      <a:round/>
-                      <a:headEnd type="none" w="med" len="med"/>
-                      <a:tailEnd type="none" w="med" len="med"/>
-                    </a:lnL>
-                    <a:lnR w="6350" cap="flat" cmpd="sng" algn="ctr">
-                      <a:solidFill>
-                        <a:srgbClr val="D0D7D7"/>
-                      </a:solidFill>
-                      <a:prstDash val="solid"/>
-                      <a:round/>
-                      <a:headEnd type="none" w="med" len="med"/>
-                      <a:tailEnd type="none" w="med" len="med"/>
-                    </a:lnR>
-                    <a:lnT w="6350" cap="flat" cmpd="sng" algn="ctr">
-                      <a:solidFill>
-                        <a:srgbClr val="D0D7D7"/>
-                      </a:solidFill>
-                      <a:prstDash val="solid"/>
-                      <a:round/>
-                      <a:headEnd type="none" w="med" len="med"/>
-                      <a:tailEnd type="none" w="med" len="med"/>
-                    </a:lnT>
-                    <a:lnB w="6350" cap="flat" cmpd="sng" algn="ctr">
-                      <a:solidFill>
-                        <a:srgbClr val="D0D7D7"/>
-                      </a:solidFill>
-                      <a:prstDash val="solid"/>
-                      <a:round/>
-                      <a:headEnd type="none" w="med" len="med"/>
-                      <a:tailEnd type="none" w="med" len="med"/>
-                    </a:lnB>
-                    <a:solidFill>
-                      <a:srgbClr val="123836"/>
-                    </a:solidFill>
-                  </a:tcPr>
-                </a:tc>
-              </a:tr>
-              <a:tr h="251460">
-                <a:tc>
-                  <a:txBody>
-                    <a:bodyPr/>
-                    <a:lstStyle/>
-                    <a:p>
-                      <a:pPr algn="l" indent="0" marL="0">
-                        <a:buNone/>
-                      </a:pPr>
-                      <a:r>
-                        <a:rPr lang="en-US" sz="900" dirty="0">
-                          <a:solidFill>
-                            <a:srgbClr val="141E1E"/>
-                          </a:solidFill>
-                          <a:latin typeface="Calibri" pitchFamily="34" charset="0"/>
-                          <a:ea typeface="Calibri" pitchFamily="34" charset="-122"/>
-                          <a:cs typeface="Calibri" pitchFamily="34" charset="-120"/>
-                        </a:rPr>
-                        <a:t>Bill Generation &amp; Issuance</a:t>
-                      </a:r>
-                      <a:endParaRPr lang="en-US" sz="900" dirty="0">
-                        <a:latin typeface="Calibri" charset="0"/>
-                        <a:ea typeface="Calibri" charset="0"/>
-                        <a:cs typeface="Calibri" charset="0"/>
-                      </a:endParaRPr>
-                    </a:p>
-                  </a:txBody>
-                  <a:tcPr marL="91440" marR="91440" marT="45720" marB="45720">
-                    <a:lnL w="6350" cap="flat" cmpd="sng" algn="ctr">
-                      <a:solidFill>
-                        <a:srgbClr val="D0D7D7"/>
-                      </a:solidFill>
-                      <a:prstDash val="solid"/>
-                      <a:round/>
-                      <a:headEnd type="none" w="med" len="med"/>
-                      <a:tailEnd type="none" w="med" len="med"/>
-                    </a:lnL>
-                    <a:lnR w="6350" cap="flat" cmpd="sng" algn="ctr">
-                      <a:solidFill>
-                        <a:srgbClr val="D0D7D7"/>
-                      </a:solidFill>
-                      <a:prstDash val="solid"/>
-                      <a:round/>
-                      <a:headEnd type="none" w="med" len="med"/>
-                      <a:tailEnd type="none" w="med" len="med"/>
-                    </a:lnR>
-                    <a:lnT w="6350" cap="flat" cmpd="sng" algn="ctr">
-                      <a:solidFill>
-                        <a:srgbClr val="D0D7D7"/>
-                      </a:solidFill>
-                      <a:prstDash val="solid"/>
-                      <a:round/>
-                      <a:headEnd type="none" w="med" len="med"/>
-                      <a:tailEnd type="none" w="med" len="med"/>
-                    </a:lnT>
-                    <a:lnB w="6350" cap="flat" cmpd="sng" algn="ctr">
-                      <a:solidFill>
-                        <a:srgbClr val="D0D7D7"/>
-                      </a:solidFill>
-                      <a:prstDash val="solid"/>
-                      <a:round/>
-                      <a:headEnd type="none" w="med" len="med"/>
-                      <a:tailEnd type="none" w="med" len="med"/>
-                    </a:lnB>
-                    <a:solidFill>
-                      <a:srgbClr val="FFFFFF"/>
-                    </a:solidFill>
-                  </a:tcPr>
-                </a:tc>
-                <a:tc>
-                  <a:txBody>
-                    <a:bodyPr/>
-                    <a:lstStyle/>
-                    <a:p>
-                      <a:pPr algn="ctr" indent="0" marL="0">
-                        <a:buNone/>
-                      </a:pPr>
-                      <a:r>
-                        <a:rPr lang="en-US" sz="900" dirty="0">
-                          <a:solidFill>
-                            <a:srgbClr val="141E1E"/>
-                          </a:solidFill>
-                          <a:latin typeface="Calibri" pitchFamily="34" charset="0"/>
-                          <a:ea typeface="Calibri" pitchFamily="34" charset="-122"/>
-                          <a:cs typeface="Calibri" pitchFamily="34" charset="-120"/>
-                        </a:rPr>
-                        <a:t>1,280</a:t>
-                      </a:r>
-                      <a:endParaRPr lang="en-US" sz="900" dirty="0">
-                        <a:latin typeface="Calibri" charset="0"/>
-                        <a:ea typeface="Calibri" charset="0"/>
-                        <a:cs typeface="Calibri" charset="0"/>
-                      </a:endParaRPr>
-                    </a:p>
-                  </a:txBody>
-                  <a:tcPr marL="91440" marR="91440" marT="45720" marB="45720">
-                    <a:lnL w="6350" cap="flat" cmpd="sng" algn="ctr">
-                      <a:solidFill>
-                        <a:srgbClr val="D0D7D7"/>
-                      </a:solidFill>
-                      <a:prstDash val="solid"/>
-                      <a:round/>
-                      <a:headEnd type="none" w="med" len="med"/>
-                      <a:tailEnd type="none" w="med" len="med"/>
-                    </a:lnL>
-                    <a:lnR w="6350" cap="flat" cmpd="sng" algn="ctr">
-                      <a:solidFill>
-                        <a:srgbClr val="D0D7D7"/>
-                      </a:solidFill>
-                      <a:prstDash val="solid"/>
-                      <a:round/>
-                      <a:headEnd type="none" w="med" len="med"/>
-                      <a:tailEnd type="none" w="med" len="med"/>
-                    </a:lnR>
-                    <a:lnT w="6350" cap="flat" cmpd="sng" algn="ctr">
-                      <a:solidFill>
-                        <a:srgbClr val="D0D7D7"/>
-                      </a:solidFill>
-                      <a:prstDash val="solid"/>
-                      <a:round/>
-                      <a:headEnd type="none" w="med" len="med"/>
-                      <a:tailEnd type="none" w="med" len="med"/>
-                    </a:lnT>
-                    <a:lnB w="6350" cap="flat" cmpd="sng" algn="ctr">
-                      <a:solidFill>
-                        <a:srgbClr val="D0D7D7"/>
-                      </a:solidFill>
-                      <a:prstDash val="solid"/>
-                      <a:round/>
-                      <a:headEnd type="none" w="med" len="med"/>
-                      <a:tailEnd type="none" w="med" len="med"/>
-                    </a:lnB>
-                    <a:solidFill>
-                      <a:srgbClr val="FFFFFF"/>
-                    </a:solidFill>
-                  </a:tcPr>
-                </a:tc>
-                <a:tc>
-                  <a:txBody>
-                    <a:bodyPr/>
-                    <a:lstStyle/>
-                    <a:p>
-                      <a:pPr algn="ctr" indent="0" marL="0">
-                        <a:buNone/>
-                      </a:pPr>
-                      <a:r>
-                        <a:rPr lang="en-US" sz="900" dirty="0">
-                          <a:solidFill>
-                            <a:srgbClr val="141E1E"/>
-                          </a:solidFill>
-                          <a:latin typeface="Calibri" pitchFamily="34" charset="0"/>
-                          <a:ea typeface="Calibri" pitchFamily="34" charset="-122"/>
-                          <a:cs typeface="Calibri" pitchFamily="34" charset="-120"/>
-                        </a:rPr>
-                        <a:t>P1</a:t>
-                      </a:r>
-                      <a:endParaRPr lang="en-US" sz="900" dirty="0">
-                        <a:latin typeface="Calibri" charset="0"/>
-                        <a:ea typeface="Calibri" charset="0"/>
-                        <a:cs typeface="Calibri" charset="0"/>
-                      </a:endParaRPr>
-                    </a:p>
-                  </a:txBody>
-                  <a:tcPr marL="91440" marR="91440" marT="45720" marB="45720">
-                    <a:lnL w="6350" cap="flat" cmpd="sng" algn="ctr">
-                      <a:solidFill>
-                        <a:srgbClr val="D0D7D7"/>
-                      </a:solidFill>
-                      <a:prstDash val="solid"/>
-                      <a:round/>
-                      <a:headEnd type="none" w="med" len="med"/>
-                      <a:tailEnd type="none" w="med" len="med"/>
-                    </a:lnL>
-                    <a:lnR w="6350" cap="flat" cmpd="sng" algn="ctr">
-                      <a:solidFill>
-                        <a:srgbClr val="D0D7D7"/>
-                      </a:solidFill>
-                      <a:prstDash val="solid"/>
-                      <a:round/>
-                      <a:headEnd type="none" w="med" len="med"/>
-                      <a:tailEnd type="none" w="med" len="med"/>
-                    </a:lnR>
-                    <a:lnT w="6350" cap="flat" cmpd="sng" algn="ctr">
-                      <a:solidFill>
-                        <a:srgbClr val="D0D7D7"/>
-                      </a:solidFill>
-                      <a:prstDash val="solid"/>
-                      <a:round/>
-                      <a:headEnd type="none" w="med" len="med"/>
-                      <a:tailEnd type="none" w="med" len="med"/>
-                    </a:lnT>
-                    <a:lnB w="6350" cap="flat" cmpd="sng" algn="ctr">
-                      <a:solidFill>
-                        <a:srgbClr val="D0D7D7"/>
-                      </a:solidFill>
-                      <a:prstDash val="solid"/>
-                      <a:round/>
-                      <a:headEnd type="none" w="med" len="med"/>
-                      <a:tailEnd type="none" w="med" len="med"/>
-                    </a:lnB>
-                    <a:solidFill>
-                      <a:srgbClr val="FFFFFF"/>
-                    </a:solidFill>
-                  </a:tcPr>
-                </a:tc>
-                <a:tc>
-                  <a:txBody>
-                    <a:bodyPr/>
-                    <a:lstStyle/>
-                    <a:p>
-                      <a:pPr algn="ctr" indent="0" marL="0">
-                        <a:buNone/>
-                      </a:pPr>
-                      <a:r>
-                        <a:rPr lang="en-US" sz="900" b="1" dirty="0">
-                          <a:solidFill>
-                            <a:srgbClr val="123836"/>
-                          </a:solidFill>
-                          <a:latin typeface="Calibri" pitchFamily="34" charset="0"/>
-                          <a:ea typeface="Calibri" pitchFamily="34" charset="-122"/>
-                          <a:cs typeface="Calibri" pitchFamily="34" charset="-120"/>
-                        </a:rPr>
-                        <a:t>✓</a:t>
-                      </a:r>
-                      <a:endParaRPr lang="en-US" sz="900" dirty="0">
-                        <a:latin typeface="Calibri" charset="0"/>
-                        <a:ea typeface="Calibri" charset="0"/>
-                        <a:cs typeface="Calibri" charset="0"/>
-                      </a:endParaRPr>
-                    </a:p>
-                  </a:txBody>
-                  <a:tcPr marL="91440" marR="91440" marT="45720" marB="45720">
-                    <a:lnL w="6350" cap="flat" cmpd="sng" algn="ctr">
-                      <a:solidFill>
-                        <a:srgbClr val="D0D7D7"/>
-                      </a:solidFill>
-                      <a:prstDash val="solid"/>
-                      <a:round/>
-                      <a:headEnd type="none" w="med" len="med"/>
-                      <a:tailEnd type="none" w="med" len="med"/>
-                    </a:lnL>
-                    <a:lnR w="6350" cap="flat" cmpd="sng" algn="ctr">
-                      <a:solidFill>
-                        <a:srgbClr val="D0D7D7"/>
-                      </a:solidFill>
-                      <a:prstDash val="solid"/>
-                      <a:round/>
-                      <a:headEnd type="none" w="med" len="med"/>
-                      <a:tailEnd type="none" w="med" len="med"/>
-                    </a:lnR>
-                    <a:lnT w="6350" cap="flat" cmpd="sng" algn="ctr">
-                      <a:solidFill>
-                        <a:srgbClr val="D0D7D7"/>
-                      </a:solidFill>
-                      <a:prstDash val="solid"/>
-                      <a:round/>
-                      <a:headEnd type="none" w="med" len="med"/>
-                      <a:tailEnd type="none" w="med" len="med"/>
-                    </a:lnT>
-                    <a:lnB w="6350" cap="flat" cmpd="sng" algn="ctr">
-                      <a:solidFill>
-                        <a:srgbClr val="D0D7D7"/>
-                      </a:solidFill>
-                      <a:prstDash val="solid"/>
-                      <a:round/>
-                      <a:headEnd type="none" w="med" len="med"/>
-                      <a:tailEnd type="none" w="med" len="med"/>
-                    </a:lnB>
-                    <a:solidFill>
-                      <a:srgbClr val="FFFFFF"/>
-                    </a:solidFill>
-                  </a:tcPr>
-                </a:tc>
-                <a:tc>
-                  <a:txBody>
-                    <a:bodyPr/>
-                    <a:lstStyle/>
-                    <a:p>
-                      <a:pPr algn="ctr" indent="0" marL="0">
-                        <a:buNone/>
-                      </a:pPr>
-                      <a:endParaRPr lang="en-US" sz="900" dirty="0">
-                        <a:latin typeface="Calibri" charset="0"/>
-                        <a:ea typeface="Calibri" charset="0"/>
-                        <a:cs typeface="Calibri" charset="0"/>
-                      </a:endParaRPr>
-                    </a:p>
-                  </a:txBody>
-                  <a:tcPr marL="91440" marR="91440" marT="45720" marB="45720">
-                    <a:lnL w="6350" cap="flat" cmpd="sng" algn="ctr">
-                      <a:solidFill>
-                        <a:srgbClr val="D0D7D7"/>
-                      </a:solidFill>
-                      <a:prstDash val="solid"/>
-                      <a:round/>
-                      <a:headEnd type="none" w="med" len="med"/>
-                      <a:tailEnd type="none" w="med" len="med"/>
-                    </a:lnL>
-                    <a:lnR w="6350" cap="flat" cmpd="sng" algn="ctr">
-                      <a:solidFill>
-                        <a:srgbClr val="D0D7D7"/>
-                      </a:solidFill>
-                      <a:prstDash val="solid"/>
-                      <a:round/>
-                      <a:headEnd type="none" w="med" len="med"/>
-                      <a:tailEnd type="none" w="med" len="med"/>
-                    </a:lnR>
-                    <a:lnT w="6350" cap="flat" cmpd="sng" algn="ctr">
-                      <a:solidFill>
-                        <a:srgbClr val="D0D7D7"/>
-                      </a:solidFill>
-                      <a:prstDash val="solid"/>
-                      <a:round/>
-                      <a:headEnd type="none" w="med" len="med"/>
-                      <a:tailEnd type="none" w="med" len="med"/>
-                    </a:lnT>
-                    <a:lnB w="6350" cap="flat" cmpd="sng" algn="ctr">
-                      <a:solidFill>
-                        <a:srgbClr val="D0D7D7"/>
-                      </a:solidFill>
-                      <a:prstDash val="solid"/>
-                      <a:round/>
-                      <a:headEnd type="none" w="med" len="med"/>
-                      <a:tailEnd type="none" w="med" len="med"/>
-                    </a:lnB>
-                    <a:solidFill>
-                      <a:srgbClr val="FFFFFF"/>
-                    </a:solidFill>
-                  </a:tcPr>
-                </a:tc>
-              </a:tr>
-              <a:tr h="251460">
-                <a:tc>
-                  <a:txBody>
-                    <a:bodyPr/>
-                    <a:lstStyle/>
-                    <a:p>
-                      <a:pPr algn="l" indent="0" marL="0">
-                        <a:buNone/>
-                      </a:pPr>
-                      <a:r>
-                        <a:rPr lang="en-US" sz="900" dirty="0">
-                          <a:solidFill>
-                            <a:srgbClr val="141E1E"/>
-                          </a:solidFill>
-                          <a:latin typeface="Calibri" pitchFamily="34" charset="0"/>
-                          <a:ea typeface="Calibri" pitchFamily="34" charset="-122"/>
-                          <a:cs typeface="Calibri" pitchFamily="34" charset="-120"/>
-                        </a:rPr>
-                        <a:t>Formal Assessment Management</a:t>
-                      </a:r>
-                      <a:endParaRPr lang="en-US" sz="900" dirty="0">
-                        <a:latin typeface="Calibri" charset="0"/>
-                        <a:ea typeface="Calibri" charset="0"/>
-                        <a:cs typeface="Calibri" charset="0"/>
-                      </a:endParaRPr>
-                    </a:p>
-                  </a:txBody>
-                  <a:tcPr marL="91440" marR="91440" marT="45720" marB="45720">
-                    <a:lnL w="6350" cap="flat" cmpd="sng" algn="ctr">
-                      <a:solidFill>
-                        <a:srgbClr val="D0D7D7"/>
-                      </a:solidFill>
-                      <a:prstDash val="solid"/>
-                      <a:round/>
-                      <a:headEnd type="none" w="med" len="med"/>
-                      <a:tailEnd type="none" w="med" len="med"/>
-                    </a:lnL>
-                    <a:lnR w="6350" cap="flat" cmpd="sng" algn="ctr">
-                      <a:solidFill>
-                        <a:srgbClr val="D0D7D7"/>
-                      </a:solidFill>
-                      <a:prstDash val="solid"/>
-                      <a:round/>
-                      <a:headEnd type="none" w="med" len="med"/>
-                      <a:tailEnd type="none" w="med" len="med"/>
-                    </a:lnR>
-                    <a:lnT w="6350" cap="flat" cmpd="sng" algn="ctr">
-                      <a:solidFill>
-                        <a:srgbClr val="D0D7D7"/>
-                      </a:solidFill>
-                      <a:prstDash val="solid"/>
-                      <a:round/>
-                      <a:headEnd type="none" w="med" len="med"/>
-                      <a:tailEnd type="none" w="med" len="med"/>
-                    </a:lnT>
-                    <a:lnB w="6350" cap="flat" cmpd="sng" algn="ctr">
-                      <a:solidFill>
-                        <a:srgbClr val="D0D7D7"/>
-                      </a:solidFill>
-                      <a:prstDash val="solid"/>
-                      <a:round/>
-                      <a:headEnd type="none" w="med" len="med"/>
-                      <a:tailEnd type="none" w="med" len="med"/>
-                    </a:lnB>
-                    <a:solidFill>
-                      <a:srgbClr val="EEF3F2"/>
-                    </a:solidFill>
-                  </a:tcPr>
-                </a:tc>
-                <a:tc>
-                  <a:txBody>
-                    <a:bodyPr/>
-                    <a:lstStyle/>
-                    <a:p>
-                      <a:pPr algn="ctr" indent="0" marL="0">
-                        <a:buNone/>
-                      </a:pPr>
-                      <a:r>
-                        <a:rPr lang="en-US" sz="900" dirty="0">
-                          <a:solidFill>
-                            <a:srgbClr val="141E1E"/>
-                          </a:solidFill>
-                          <a:latin typeface="Calibri" pitchFamily="34" charset="0"/>
-                          <a:ea typeface="Calibri" pitchFamily="34" charset="-122"/>
-                          <a:cs typeface="Calibri" pitchFamily="34" charset="-120"/>
-                        </a:rPr>
-                        <a:t>1,040</a:t>
-                      </a:r>
-                      <a:endParaRPr lang="en-US" sz="900" dirty="0">
-                        <a:latin typeface="Calibri" charset="0"/>
-                        <a:ea typeface="Calibri" charset="0"/>
-                        <a:cs typeface="Calibri" charset="0"/>
-                      </a:endParaRPr>
-                    </a:p>
-                  </a:txBody>
-                  <a:tcPr marL="91440" marR="91440" marT="45720" marB="45720">
-                    <a:lnL w="6350" cap="flat" cmpd="sng" algn="ctr">
-                      <a:solidFill>
-                        <a:srgbClr val="D0D7D7"/>
-                      </a:solidFill>
-                      <a:prstDash val="solid"/>
-                      <a:round/>
-                      <a:headEnd type="none" w="med" len="med"/>
-                      <a:tailEnd type="none" w="med" len="med"/>
-                    </a:lnL>
-                    <a:lnR w="6350" cap="flat" cmpd="sng" algn="ctr">
-                      <a:solidFill>
-                        <a:srgbClr val="D0D7D7"/>
-                      </a:solidFill>
-                      <a:prstDash val="solid"/>
-                      <a:round/>
-                      <a:headEnd type="none" w="med" len="med"/>
-                      <a:tailEnd type="none" w="med" len="med"/>
-                    </a:lnR>
-                    <a:lnT w="6350" cap="flat" cmpd="sng" algn="ctr">
-                      <a:solidFill>
-                        <a:srgbClr val="D0D7D7"/>
-                      </a:solidFill>
-                      <a:prstDash val="solid"/>
-                      <a:round/>
-                      <a:headEnd type="none" w="med" len="med"/>
-                      <a:tailEnd type="none" w="med" len="med"/>
-                    </a:lnT>
-                    <a:lnB w="6350" cap="flat" cmpd="sng" algn="ctr">
-                      <a:solidFill>
-                        <a:srgbClr val="D0D7D7"/>
-                      </a:solidFill>
-                      <a:prstDash val="solid"/>
-                      <a:round/>
-                      <a:headEnd type="none" w="med" len="med"/>
-                      <a:tailEnd type="none" w="med" len="med"/>
-                    </a:lnB>
-                    <a:solidFill>
-                      <a:srgbClr val="EEF3F2"/>
-                    </a:solidFill>
-                  </a:tcPr>
-                </a:tc>
-                <a:tc>
-                  <a:txBody>
-                    <a:bodyPr/>
-                    <a:lstStyle/>
-                    <a:p>
-                      <a:pPr algn="ctr" indent="0" marL="0">
-                        <a:buNone/>
-                      </a:pPr>
-                      <a:r>
-                        <a:rPr lang="en-US" sz="900" dirty="0">
-                          <a:solidFill>
-                            <a:srgbClr val="141E1E"/>
-                          </a:solidFill>
-                          <a:latin typeface="Calibri" pitchFamily="34" charset="0"/>
-                          <a:ea typeface="Calibri" pitchFamily="34" charset="-122"/>
-                          <a:cs typeface="Calibri" pitchFamily="34" charset="-120"/>
-                        </a:rPr>
-                        <a:t>P1</a:t>
-                      </a:r>
-                      <a:endParaRPr lang="en-US" sz="900" dirty="0">
-                        <a:latin typeface="Calibri" charset="0"/>
-                        <a:ea typeface="Calibri" charset="0"/>
-                        <a:cs typeface="Calibri" charset="0"/>
-                      </a:endParaRPr>
-                    </a:p>
-                  </a:txBody>
-                  <a:tcPr marL="91440" marR="91440" marT="45720" marB="45720">
-                    <a:lnL w="6350" cap="flat" cmpd="sng" algn="ctr">
-                      <a:solidFill>
-                        <a:srgbClr val="D0D7D7"/>
-                      </a:solidFill>
-                      <a:prstDash val="solid"/>
-                      <a:round/>
-                      <a:headEnd type="none" w="med" len="med"/>
-                      <a:tailEnd type="none" w="med" len="med"/>
-                    </a:lnL>
-                    <a:lnR w="6350" cap="flat" cmpd="sng" algn="ctr">
-                      <a:solidFill>
-                        <a:srgbClr val="D0D7D7"/>
-                      </a:solidFill>
-                      <a:prstDash val="solid"/>
-                      <a:round/>
-                      <a:headEnd type="none" w="med" len="med"/>
-                      <a:tailEnd type="none" w="med" len="med"/>
-                    </a:lnR>
-                    <a:lnT w="6350" cap="flat" cmpd="sng" algn="ctr">
-                      <a:solidFill>
-                        <a:srgbClr val="D0D7D7"/>
-                      </a:solidFill>
-                      <a:prstDash val="solid"/>
-                      <a:round/>
-                      <a:headEnd type="none" w="med" len="med"/>
-                      <a:tailEnd type="none" w="med" len="med"/>
-                    </a:lnT>
-                    <a:lnB w="6350" cap="flat" cmpd="sng" algn="ctr">
-                      <a:solidFill>
-                        <a:srgbClr val="D0D7D7"/>
-                      </a:solidFill>
-                      <a:prstDash val="solid"/>
-                      <a:round/>
-                      <a:headEnd type="none" w="med" len="med"/>
-                      <a:tailEnd type="none" w="med" len="med"/>
-                    </a:lnB>
-                    <a:solidFill>
-                      <a:srgbClr val="EEF3F2"/>
-                    </a:solidFill>
-                  </a:tcPr>
-                </a:tc>
-                <a:tc>
-                  <a:txBody>
-                    <a:bodyPr/>
-                    <a:lstStyle/>
-                    <a:p>
-                      <a:pPr algn="ctr" indent="0" marL="0">
-                        <a:buNone/>
-                      </a:pPr>
-                      <a:r>
-                        <a:rPr lang="en-US" sz="900" b="1" dirty="0">
-                          <a:solidFill>
-                            <a:srgbClr val="123836"/>
-                          </a:solidFill>
-                          <a:latin typeface="Calibri" pitchFamily="34" charset="0"/>
-                          <a:ea typeface="Calibri" pitchFamily="34" charset="-122"/>
-                          <a:cs typeface="Calibri" pitchFamily="34" charset="-120"/>
-                        </a:rPr>
-                        <a:t>✓</a:t>
-                      </a:r>
-                      <a:endParaRPr lang="en-US" sz="900" dirty="0">
-                        <a:latin typeface="Calibri" charset="0"/>
-                        <a:ea typeface="Calibri" charset="0"/>
-                        <a:cs typeface="Calibri" charset="0"/>
-                      </a:endParaRPr>
-                    </a:p>
-                  </a:txBody>
-                  <a:tcPr marL="91440" marR="91440" marT="45720" marB="45720">
-                    <a:lnL w="6350" cap="flat" cmpd="sng" algn="ctr">
-                      <a:solidFill>
-                        <a:srgbClr val="D0D7D7"/>
-                      </a:solidFill>
-                      <a:prstDash val="solid"/>
-                      <a:round/>
-                      <a:headEnd type="none" w="med" len="med"/>
-                      <a:tailEnd type="none" w="med" len="med"/>
-                    </a:lnL>
-                    <a:lnR w="6350" cap="flat" cmpd="sng" algn="ctr">
-                      <a:solidFill>
-                        <a:srgbClr val="D0D7D7"/>
-                      </a:solidFill>
-                      <a:prstDash val="solid"/>
-                      <a:round/>
-                      <a:headEnd type="none" w="med" len="med"/>
-                      <a:tailEnd type="none" w="med" len="med"/>
-                    </a:lnR>
-                    <a:lnT w="6350" cap="flat" cmpd="sng" algn="ctr">
-                      <a:solidFill>
-                        <a:srgbClr val="D0D7D7"/>
-                      </a:solidFill>
-                      <a:prstDash val="solid"/>
-                      <a:round/>
-                      <a:headEnd type="none" w="med" len="med"/>
-                      <a:tailEnd type="none" w="med" len="med"/>
-                    </a:lnT>
-                    <a:lnB w="6350" cap="flat" cmpd="sng" algn="ctr">
-                      <a:solidFill>
-                        <a:srgbClr val="D0D7D7"/>
-                      </a:solidFill>
-                      <a:prstDash val="solid"/>
-                      <a:round/>
-                      <a:headEnd type="none" w="med" len="med"/>
-                      <a:tailEnd type="none" w="med" len="med"/>
-                    </a:lnB>
-                    <a:solidFill>
-                      <a:srgbClr val="EEF3F2"/>
-                    </a:solidFill>
-                  </a:tcPr>
-                </a:tc>
-                <a:tc>
-                  <a:txBody>
-                    <a:bodyPr/>
-                    <a:lstStyle/>
-                    <a:p>
-                      <a:pPr algn="ctr" indent="0" marL="0">
-                        <a:buNone/>
-                      </a:pPr>
-                      <a:endParaRPr lang="en-US" sz="900" dirty="0">
-                        <a:latin typeface="Calibri" charset="0"/>
-                        <a:ea typeface="Calibri" charset="0"/>
-                        <a:cs typeface="Calibri" charset="0"/>
-                      </a:endParaRPr>
-                    </a:p>
-                  </a:txBody>
-                  <a:tcPr marL="91440" marR="91440" marT="45720" marB="45720">
-                    <a:lnL w="6350" cap="flat" cmpd="sng" algn="ctr">
-                      <a:solidFill>
-                        <a:srgbClr val="D0D7D7"/>
-                      </a:solidFill>
-                      <a:prstDash val="solid"/>
-                      <a:round/>
-                      <a:headEnd type="none" w="med" len="med"/>
-                      <a:tailEnd type="none" w="med" len="med"/>
-                    </a:lnL>
-                    <a:lnR w="6350" cap="flat" cmpd="sng" algn="ctr">
-                      <a:solidFill>
-                        <a:srgbClr val="D0D7D7"/>
-                      </a:solidFill>
-                      <a:prstDash val="solid"/>
-                      <a:round/>
-                      <a:headEnd type="none" w="med" len="med"/>
-                      <a:tailEnd type="none" w="med" len="med"/>
-                    </a:lnR>
-                    <a:lnT w="6350" cap="flat" cmpd="sng" algn="ctr">
-                      <a:solidFill>
-                        <a:srgbClr val="D0D7D7"/>
-                      </a:solidFill>
-                      <a:prstDash val="solid"/>
-                      <a:round/>
-                      <a:headEnd type="none" w="med" len="med"/>
-                      <a:tailEnd type="none" w="med" len="med"/>
-                    </a:lnT>
-                    <a:lnB w="6350" cap="flat" cmpd="sng" algn="ctr">
-                      <a:solidFill>
-                        <a:srgbClr val="D0D7D7"/>
-                      </a:solidFill>
-                      <a:prstDash val="solid"/>
-                      <a:round/>
-                      <a:headEnd type="none" w="med" len="med"/>
-                      <a:tailEnd type="none" w="med" len="med"/>
-                    </a:lnB>
-                    <a:solidFill>
-                      <a:srgbClr val="EEF3F2"/>
-                    </a:solidFill>
-                  </a:tcPr>
-                </a:tc>
-              </a:tr>
-              <a:tr h="251460">
-                <a:tc>
-                  <a:txBody>
-                    <a:bodyPr/>
-                    <a:lstStyle/>
-                    <a:p>
-                      <a:pPr algn="l" indent="0" marL="0">
-                        <a:buNone/>
-                      </a:pPr>
-                      <a:r>
-                        <a:rPr lang="en-US" sz="900" dirty="0">
-                          <a:solidFill>
-                            <a:srgbClr val="141E1E"/>
-                          </a:solidFill>
-                          <a:latin typeface="Calibri" pitchFamily="34" charset="0"/>
-                          <a:ea typeface="Calibri" pitchFamily="34" charset="-122"/>
-                          <a:cs typeface="Calibri" pitchFamily="34" charset="-120"/>
-                        </a:rPr>
-                        <a:t>Installment Plan Configuration</a:t>
-                      </a:r>
-                      <a:endParaRPr lang="en-US" sz="900" dirty="0">
-                        <a:latin typeface="Calibri" charset="0"/>
-                        <a:ea typeface="Calibri" charset="0"/>
-                        <a:cs typeface="Calibri" charset="0"/>
-                      </a:endParaRPr>
-                    </a:p>
-                  </a:txBody>
-                  <a:tcPr marL="91440" marR="91440" marT="45720" marB="45720">
-                    <a:lnL w="6350" cap="flat" cmpd="sng" algn="ctr">
-                      <a:solidFill>
-                        <a:srgbClr val="D0D7D7"/>
-                      </a:solidFill>
-                      <a:prstDash val="solid"/>
-                      <a:round/>
-                      <a:headEnd type="none" w="med" len="med"/>
-                      <a:tailEnd type="none" w="med" len="med"/>
-                    </a:lnL>
-                    <a:lnR w="6350" cap="flat" cmpd="sng" algn="ctr">
-                      <a:solidFill>
-                        <a:srgbClr val="D0D7D7"/>
-                      </a:solidFill>
-                      <a:prstDash val="solid"/>
-                      <a:round/>
-                      <a:headEnd type="none" w="med" len="med"/>
-                      <a:tailEnd type="none" w="med" len="med"/>
-                    </a:lnR>
-                    <a:lnT w="6350" cap="flat" cmpd="sng" algn="ctr">
-                      <a:solidFill>
-                        <a:srgbClr val="D0D7D7"/>
-                      </a:solidFill>
-                      <a:prstDash val="solid"/>
-                      <a:round/>
-                      <a:headEnd type="none" w="med" len="med"/>
-                      <a:tailEnd type="none" w="med" len="med"/>
-                    </a:lnT>
-                    <a:lnB w="6350" cap="flat" cmpd="sng" algn="ctr">
-                      <a:solidFill>
-                        <a:srgbClr val="D0D7D7"/>
-                      </a:solidFill>
-                      <a:prstDash val="solid"/>
-                      <a:round/>
-                      <a:headEnd type="none" w="med" len="med"/>
-                      <a:tailEnd type="none" w="med" len="med"/>
-                    </a:lnB>
-                    <a:solidFill>
-                      <a:srgbClr val="FFFFFF"/>
-                    </a:solidFill>
-                  </a:tcPr>
-                </a:tc>
-                <a:tc>
-                  <a:txBody>
-                    <a:bodyPr/>
-                    <a:lstStyle/>
-                    <a:p>
-                      <a:pPr algn="ctr" indent="0" marL="0">
-                        <a:buNone/>
-                      </a:pPr>
-                      <a:r>
-                        <a:rPr lang="en-US" sz="900" dirty="0">
-                          <a:solidFill>
-                            <a:srgbClr val="141E1E"/>
-                          </a:solidFill>
-                          <a:latin typeface="Calibri" pitchFamily="34" charset="0"/>
-                          <a:ea typeface="Calibri" pitchFamily="34" charset="-122"/>
-                          <a:cs typeface="Calibri" pitchFamily="34" charset="-120"/>
-                        </a:rPr>
-                        <a:t>560</a:t>
-                      </a:r>
-                      <a:endParaRPr lang="en-US" sz="900" dirty="0">
-                        <a:latin typeface="Calibri" charset="0"/>
-                        <a:ea typeface="Calibri" charset="0"/>
-                        <a:cs typeface="Calibri" charset="0"/>
-                      </a:endParaRPr>
-                    </a:p>
-                  </a:txBody>
-                  <a:tcPr marL="91440" marR="91440" marT="45720" marB="45720">
-                    <a:lnL w="6350" cap="flat" cmpd="sng" algn="ctr">
-                      <a:solidFill>
-                        <a:srgbClr val="D0D7D7"/>
-                      </a:solidFill>
-                      <a:prstDash val="solid"/>
-                      <a:round/>
-                      <a:headEnd type="none" w="med" len="med"/>
-                      <a:tailEnd type="none" w="med" len="med"/>
-                    </a:lnL>
-                    <a:lnR w="6350" cap="flat" cmpd="sng" algn="ctr">
-                      <a:solidFill>
-                        <a:srgbClr val="D0D7D7"/>
-                      </a:solidFill>
-                      <a:prstDash val="solid"/>
-                      <a:round/>
-                      <a:headEnd type="none" w="med" len="med"/>
-                      <a:tailEnd type="none" w="med" len="med"/>
-                    </a:lnR>
-                    <a:lnT w="6350" cap="flat" cmpd="sng" algn="ctr">
-                      <a:solidFill>
-                        <a:srgbClr val="D0D7D7"/>
-                      </a:solidFill>
-                      <a:prstDash val="solid"/>
-                      <a:round/>
-                      <a:headEnd type="none" w="med" len="med"/>
-                      <a:tailEnd type="none" w="med" len="med"/>
-                    </a:lnT>
-                    <a:lnB w="6350" cap="flat" cmpd="sng" algn="ctr">
-                      <a:solidFill>
-                        <a:srgbClr val="D0D7D7"/>
-                      </a:solidFill>
-                      <a:prstDash val="solid"/>
-                      <a:round/>
-                      <a:headEnd type="none" w="med" len="med"/>
-                      <a:tailEnd type="none" w="med" len="med"/>
-                    </a:lnB>
-                    <a:solidFill>
-                      <a:srgbClr val="FFFFFF"/>
-                    </a:solidFill>
-                  </a:tcPr>
-                </a:tc>
-                <a:tc>
-                  <a:txBody>
-                    <a:bodyPr/>
-                    <a:lstStyle/>
-                    <a:p>
-                      <a:pPr algn="ctr" indent="0" marL="0">
-                        <a:buNone/>
-                      </a:pPr>
-                      <a:r>
-                        <a:rPr lang="en-US" sz="900" dirty="0">
-                          <a:solidFill>
-                            <a:srgbClr val="141E1E"/>
-                          </a:solidFill>
-                          <a:latin typeface="Calibri" pitchFamily="34" charset="0"/>
-                          <a:ea typeface="Calibri" pitchFamily="34" charset="-122"/>
-                          <a:cs typeface="Calibri" pitchFamily="34" charset="-120"/>
-                        </a:rPr>
-                        <a:t>P2</a:t>
-                      </a:r>
-                      <a:endParaRPr lang="en-US" sz="900" dirty="0">
-                        <a:latin typeface="Calibri" charset="0"/>
-                        <a:ea typeface="Calibri" charset="0"/>
-                        <a:cs typeface="Calibri" charset="0"/>
-                      </a:endParaRPr>
-                    </a:p>
-                  </a:txBody>
-                  <a:tcPr marL="91440" marR="91440" marT="45720" marB="45720">
-                    <a:lnL w="6350" cap="flat" cmpd="sng" algn="ctr">
-                      <a:solidFill>
-                        <a:srgbClr val="D0D7D7"/>
-                      </a:solidFill>
-                      <a:prstDash val="solid"/>
-                      <a:round/>
-                      <a:headEnd type="none" w="med" len="med"/>
-                      <a:tailEnd type="none" w="med" len="med"/>
-                    </a:lnL>
-                    <a:lnR w="6350" cap="flat" cmpd="sng" algn="ctr">
-                      <a:solidFill>
-                        <a:srgbClr val="D0D7D7"/>
-                      </a:solidFill>
-                      <a:prstDash val="solid"/>
-                      <a:round/>
-                      <a:headEnd type="none" w="med" len="med"/>
-                      <a:tailEnd type="none" w="med" len="med"/>
-                    </a:lnR>
-                    <a:lnT w="6350" cap="flat" cmpd="sng" algn="ctr">
-                      <a:solidFill>
-                        <a:srgbClr val="D0D7D7"/>
-                      </a:solidFill>
-                      <a:prstDash val="solid"/>
-                      <a:round/>
-                      <a:headEnd type="none" w="med" len="med"/>
-                      <a:tailEnd type="none" w="med" len="med"/>
-                    </a:lnT>
-                    <a:lnB w="6350" cap="flat" cmpd="sng" algn="ctr">
-                      <a:solidFill>
-                        <a:srgbClr val="D0D7D7"/>
-                      </a:solidFill>
-                      <a:prstDash val="solid"/>
-                      <a:round/>
-                      <a:headEnd type="none" w="med" len="med"/>
-                      <a:tailEnd type="none" w="med" len="med"/>
-                    </a:lnB>
-                    <a:solidFill>
-                      <a:srgbClr val="FFFFFF"/>
-                    </a:solidFill>
-                  </a:tcPr>
-                </a:tc>
-                <a:tc>
-                  <a:txBody>
-                    <a:bodyPr/>
-                    <a:lstStyle/>
-                    <a:p>
-                      <a:pPr algn="ctr" indent="0" marL="0">
-                        <a:buNone/>
-                      </a:pPr>
-                      <a:endParaRPr lang="en-US" sz="900" dirty="0">
-                        <a:latin typeface="Calibri" charset="0"/>
-                        <a:ea typeface="Calibri" charset="0"/>
-                        <a:cs typeface="Calibri" charset="0"/>
-                      </a:endParaRPr>
-                    </a:p>
-                  </a:txBody>
-                  <a:tcPr marL="91440" marR="91440" marT="45720" marB="45720">
-                    <a:lnL w="6350" cap="flat" cmpd="sng" algn="ctr">
-                      <a:solidFill>
-                        <a:srgbClr val="D0D7D7"/>
-                      </a:solidFill>
-                      <a:prstDash val="solid"/>
-                      <a:round/>
-                      <a:headEnd type="none" w="med" len="med"/>
-                      <a:tailEnd type="none" w="med" len="med"/>
-                    </a:lnL>
-                    <a:lnR w="6350" cap="flat" cmpd="sng" algn="ctr">
-                      <a:solidFill>
-                        <a:srgbClr val="D0D7D7"/>
-                      </a:solidFill>
-                      <a:prstDash val="solid"/>
-                      <a:round/>
-                      <a:headEnd type="none" w="med" len="med"/>
-                      <a:tailEnd type="none" w="med" len="med"/>
-                    </a:lnR>
-                    <a:lnT w="6350" cap="flat" cmpd="sng" algn="ctr">
-                      <a:solidFill>
-                        <a:srgbClr val="D0D7D7"/>
-                      </a:solidFill>
-                      <a:prstDash val="solid"/>
-                      <a:round/>
-                      <a:headEnd type="none" w="med" len="med"/>
-                      <a:tailEnd type="none" w="med" len="med"/>
-                    </a:lnT>
-                    <a:lnB w="6350" cap="flat" cmpd="sng" algn="ctr">
-                      <a:solidFill>
-                        <a:srgbClr val="D0D7D7"/>
-                      </a:solidFill>
-                      <a:prstDash val="solid"/>
-                      <a:round/>
-                      <a:headEnd type="none" w="med" len="med"/>
-                      <a:tailEnd type="none" w="med" len="med"/>
-                    </a:lnB>
-                    <a:solidFill>
-                      <a:srgbClr val="FFFFFF"/>
-                    </a:solidFill>
-                  </a:tcPr>
-                </a:tc>
-                <a:tc>
-                  <a:txBody>
-                    <a:bodyPr/>
-                    <a:lstStyle/>
-                    <a:p>
-                      <a:pPr algn="ctr" indent="0" marL="0">
-                        <a:buNone/>
-                      </a:pPr>
-                      <a:r>
-                        <a:rPr lang="en-US" sz="900" b="1" dirty="0">
-                          <a:solidFill>
-                            <a:srgbClr val="123836"/>
-                          </a:solidFill>
-                          <a:latin typeface="Calibri" pitchFamily="34" charset="0"/>
-                          <a:ea typeface="Calibri" pitchFamily="34" charset="-122"/>
-                          <a:cs typeface="Calibri" pitchFamily="34" charset="-120"/>
-                        </a:rPr>
-                        <a:t>✓</a:t>
-                      </a:r>
-                      <a:endParaRPr lang="en-US" sz="900" dirty="0">
-                        <a:latin typeface="Calibri" charset="0"/>
-                        <a:ea typeface="Calibri" charset="0"/>
-                        <a:cs typeface="Calibri" charset="0"/>
-                      </a:endParaRPr>
-                    </a:p>
-                  </a:txBody>
-                  <a:tcPr marL="91440" marR="91440" marT="45720" marB="45720">
-                    <a:lnL w="6350" cap="flat" cmpd="sng" algn="ctr">
-                      <a:solidFill>
-                        <a:srgbClr val="D0D7D7"/>
-                      </a:solidFill>
-                      <a:prstDash val="solid"/>
-                      <a:round/>
-                      <a:headEnd type="none" w="med" len="med"/>
-                      <a:tailEnd type="none" w="med" len="med"/>
-                    </a:lnL>
-                    <a:lnR w="6350" cap="flat" cmpd="sng" algn="ctr">
-                      <a:solidFill>
-                        <a:srgbClr val="D0D7D7"/>
-                      </a:solidFill>
-                      <a:prstDash val="solid"/>
-                      <a:round/>
-                      <a:headEnd type="none" w="med" len="med"/>
-                      <a:tailEnd type="none" w="med" len="med"/>
-                    </a:lnR>
-                    <a:lnT w="6350" cap="flat" cmpd="sng" algn="ctr">
-                      <a:solidFill>
-                        <a:srgbClr val="D0D7D7"/>
-                      </a:solidFill>
-                      <a:prstDash val="solid"/>
-                      <a:round/>
-                      <a:headEnd type="none" w="med" len="med"/>
-                      <a:tailEnd type="none" w="med" len="med"/>
-                    </a:lnT>
-                    <a:lnB w="6350" cap="flat" cmpd="sng" algn="ctr">
-                      <a:solidFill>
-                        <a:srgbClr val="D0D7D7"/>
-                      </a:solidFill>
-                      <a:prstDash val="solid"/>
-                      <a:round/>
-                      <a:headEnd type="none" w="med" len="med"/>
-                      <a:tailEnd type="none" w="med" len="med"/>
-                    </a:lnB>
-                    <a:solidFill>
-                      <a:srgbClr val="FFFFFF"/>
-                    </a:solidFill>
-                  </a:tcPr>
-                </a:tc>
-              </a:tr>
-            </a:tbl>
-          </a:graphicData>
-        </a:graphic>
-      </p:graphicFrame>
-      <p:sp>
-        <p:nvSpPr>
-          <p:cNvPr id="36" name="Text 33"/>
-          <p:cNvSpPr/>
-          <p:nvPr/>
-        </p:nvSpPr>
-        <p:spPr>
-          <a:xfrm>
-            <a:off x="4480560" y="3364992"/>
-            <a:ext cx="2103120" cy="228600"/>
-          </a:xfrm>
-          <a:prstGeom prst="rect">
-            <a:avLst/>
-          </a:prstGeom>
-          <a:noFill/>
-          <a:ln/>
-        </p:spPr>
-        <p:txBody>
-          <a:bodyPr wrap="square" lIns="0" tIns="0" rIns="0" bIns="0" rtlCol="0" anchor="ctr"/>
-          <a:lstStyle/>
-          <a:p>
-            <a:pPr indent="0" marL="0">
-              <a:buNone/>
-            </a:pPr>
-            <a:r>
-              <a:rPr lang="en-US" sz="1000" b="1" dirty="0">
-                <a:solidFill>
-                  <a:srgbClr val="FF6359"/>
-                </a:solidFill>
-                <a:latin typeface="Calibri" pitchFamily="34" charset="0"/>
-                <a:ea typeface="Calibri" pitchFamily="34" charset="-122"/>
-                <a:cs typeface="Calibri" pitchFamily="34" charset="-120"/>
-              </a:rPr>
-              <a:t>Priority Distribution</a:t>
-            </a:r>
-            <a:endParaRPr lang="en-US" sz="1000" dirty="0"/>
-          </a:p>
-        </p:txBody>
-      </p:sp>
-      <p:graphicFrame>
-        <p:nvGraphicFramePr>
-          <p:cNvPr id="37" name="Chart 0" descr=""/>
-          <p:cNvGraphicFramePr/>
-          <p:nvPr/>
-        </p:nvGraphicFramePr>
-        <p:xfrm>
-          <a:off x="4480560" y="3611880"/>
-          <a:ext cx="2103120" cy="1371600"/>
+          <a:off x="3108960" y="2212848"/>
+          <a:ext cx="3017520" cy="1828800"/>
         </p:xfrm>
         <a:graphic xmlns:a="http://schemas.openxmlformats.org/drawingml/2006/main">
           <a:graphicData uri="http://schemas.openxmlformats.org/drawingml/2006/chart">
@@ -14795,23 +12323,75 @@
       </p:graphicFrame>
       <p:sp>
         <p:nvSpPr>
+          <p:cNvPr id="36" name="Text 33"/>
+          <p:cNvSpPr/>
+          <p:nvPr/>
+        </p:nvSpPr>
+        <p:spPr>
+          <a:xfrm>
+            <a:off x="6263640" y="1965960"/>
+            <a:ext cx="2651760" cy="228600"/>
+          </a:xfrm>
+          <a:prstGeom prst="rect">
+            <a:avLst/>
+          </a:prstGeom>
+          <a:noFill/>
+          <a:ln/>
+        </p:spPr>
+        <p:txBody>
+          <a:bodyPr wrap="square" rtlCol="0" anchor="ctr"/>
+          <a:lstStyle/>
+          <a:p>
+            <a:pPr indent="0" marL="0">
+              <a:buNone/>
+            </a:pPr>
+            <a:r>
+              <a:rPr lang="en-US" sz="1000" b="1" dirty="0">
+                <a:solidFill>
+                  <a:srgbClr val="FF6359"/>
+                </a:solidFill>
+              </a:rPr>
+              <a:t>Priority Distribution</a:t>
+            </a:r>
+            <a:endParaRPr lang="en-US" sz="1000" dirty="0"/>
+          </a:p>
+        </p:txBody>
+      </p:sp>
+      <p:graphicFrame>
+        <p:nvGraphicFramePr>
+          <p:cNvPr id="37" name="Chart 1" descr=""/>
+          <p:cNvGraphicFramePr/>
+          <p:nvPr/>
+        </p:nvGraphicFramePr>
+        <p:xfrm>
+          <a:off x="6263640" y="2212848"/>
+          <a:ext cx="2651760" cy="914400"/>
+        </p:xfrm>
+        <a:graphic xmlns:a="http://schemas.openxmlformats.org/drawingml/2006/main">
+          <a:graphicData uri="http://schemas.openxmlformats.org/drawingml/2006/chart">
+            <c:chart xmlns:c="http://schemas.openxmlformats.org/drawingml/2006/chart" r:id="rId2"/>
+          </a:graphicData>
+        </a:graphic>
+      </p:graphicFrame>
+      <p:sp>
+        <p:nvSpPr>
           <p:cNvPr id="38" name="Text 34"/>
           <p:cNvSpPr/>
           <p:nvPr/>
         </p:nvSpPr>
         <p:spPr>
           <a:xfrm>
-            <a:off x="6766560" y="3364992"/>
-            <a:ext cx="2148840" cy="228600"/>
-          </a:xfrm>
-          <a:prstGeom prst="rect">
-            <a:avLst/>
-          </a:prstGeom>
-          <a:noFill/>
-          <a:ln/>
-        </p:spPr>
-        <p:txBody>
-          <a:bodyPr wrap="square" lIns="0" tIns="0" rIns="0" bIns="0" rtlCol="0" anchor="ctr"/>
+            <a:off x="228600" y="3886200"/>
+            <a:ext cx="914400" cy="201168"/>
+          </a:xfrm>
+          <a:prstGeom prst="rect">
+            <a:avLst/>
+          </a:prstGeom>
+          <a:noFill/>
+          <a:ln/>
+        </p:spPr>
+        <p:txBody>
+          <a:bodyPr wrap="square" rtlCol="0" anchor="ctr"/>
           <a:lstStyle/>
           <a:p>
             <a:pPr indent="0" marL="0">
@@ -14822,11 +12402,8 @@
                 <a:solidFill>
                   <a:srgbClr val="FF6359"/>
                 </a:solidFill>
-                <a:latin typeface="Calibri" pitchFamily="34" charset="0"/>
-                <a:ea typeface="Calibri" pitchFamily="34" charset="-122"/>
-                <a:cs typeface="Calibri" pitchFamily="34" charset="-120"/>
-              </a:rPr>
-              <a:t>Key Talking Points</a:t>
+              </a:rPr>
+              <a:t>PI Planning</a:t>
             </a:r>
             <a:endParaRPr lang="en-US" sz="1000" dirty="0"/>
           </a:p>
@@ -14834,83 +12411,7 @@
       </p:sp>
       <p:sp>
         <p:nvSpPr>
-          <p:cNvPr id="39" name="Text 35"/>
-          <p:cNvSpPr/>
-          <p:nvPr/>
-        </p:nvSpPr>
-        <p:spPr>
-          <a:xfrm>
-            <a:off x="6766560" y="3611880"/>
-            <a:ext cx="2148840" cy="1554480"/>
-          </a:xfrm>
-          <a:prstGeom prst="rect">
-            <a:avLst/>
-          </a:prstGeom>
-          <a:noFill/>
-          <a:ln/>
-        </p:spPr>
-        <p:txBody>
-          <a:bodyPr wrap="square" rtlCol="0" anchor="ctr"/>
-          <a:lstStyle/>
-          <a:p>
-            <a:pPr marL="342900" indent="-342900">
-              <a:buSzPct val="100000"/>
-              <a:buChar char="•"/>
-            </a:pPr>
-            <a:r>
-              <a:rPr lang="en-US" sz="850" dirty="0">
-                <a:solidFill>
-                  <a:srgbClr val="4A5C5A"/>
-                </a:solidFill>
-                <a:latin typeface="Calibri" pitchFamily="34" charset="0"/>
-                <a:ea typeface="Calibri" pitchFamily="34" charset="-122"/>
-                <a:cs typeface="Calibri" pitchFamily="34" charset="-120"/>
-              </a:rPr>
-              <a:t>Billing and assessments are prerequisites for collections — sequence with Registration PI delivery</a:t>
-            </a:r>
-            <a:endParaRPr lang="en-US" sz="850" dirty="0"/>
-          </a:p>
-          <a:p>
-            <a:pPr marL="342900" indent="-342900">
-              <a:buSzPct val="100000"/>
-              <a:buChar char="•"/>
-            </a:pPr>
-            <a:r>
-              <a:rPr lang="en-US" sz="850" dirty="0">
-                <a:solidFill>
-                  <a:srgbClr val="4A5C5A"/>
-                </a:solidFill>
-                <a:latin typeface="Calibri" pitchFamily="34" charset="0"/>
-                <a:ea typeface="Calibri" pitchFamily="34" charset="-122"/>
-                <a:cs typeface="Calibri" pitchFamily="34" charset="-120"/>
-              </a:rPr>
-              <a:t>Installment plan scope is small and can provide quick win value in PI29</a:t>
-            </a:r>
-            <a:endParaRPr lang="en-US" sz="850" dirty="0"/>
-          </a:p>
-          <a:p>
-            <a:pPr marL="342900" indent="-342900">
-              <a:buSzPct val="100000"/>
-              <a:buChar char="•"/>
-            </a:pPr>
-            <a:r>
-              <a:rPr lang="en-US" sz="850" dirty="0">
-                <a:solidFill>
-                  <a:srgbClr val="4A5C5A"/>
-                </a:solidFill>
-                <a:latin typeface="Calibri" pitchFamily="34" charset="0"/>
-                <a:ea typeface="Calibri" pitchFamily="34" charset="-122"/>
-                <a:cs typeface="Calibri" pitchFamily="34" charset="-120"/>
-              </a:rPr>
-              <a:t>No features currently started — PI28 kickoff planning required immediately</a:t>
-            </a:r>
-            <a:endParaRPr lang="en-US" sz="850" dirty="0"/>
-          </a:p>
-        </p:txBody>
-      </p:sp>
-      <p:sp>
-        <p:nvSpPr>
-          <p:cNvPr id="40" name="Shape 36"/>
+          <p:cNvPr id="39" name="Shape 35"/>
           <p:cNvSpPr/>
           <p:nvPr/>
         </p:nvSpPr>
@@ -14925,17 +12426,12 @@
           <a:solidFill>
             <a:srgbClr val="123836"/>
           </a:solidFill>
-          <a:ln w="12700">
-            <a:solidFill>
-              <a:srgbClr val="123836"/>
-            </a:solidFill>
-            <a:prstDash val="solid"/>
-          </a:ln>
-        </p:spPr>
-      </p:sp>
-      <p:sp>
-        <p:nvSpPr>
-          <p:cNvPr id="41" name="Shape 37"/>
+          <a:ln/>
+        </p:spPr>
+      </p:sp>
+      <p:sp>
+        <p:nvSpPr>
+          <p:cNvPr id="40" name="Shape 36"/>
           <p:cNvSpPr/>
           <p:nvPr/>
         </p:nvSpPr>
@@ -14950,85 +12446,38 @@
           <a:solidFill>
             <a:srgbClr val="FFD282"/>
           </a:solidFill>
-          <a:ln w="12700">
-            <a:solidFill>
-              <a:srgbClr val="FFD282"/>
-            </a:solidFill>
-            <a:prstDash val="solid"/>
-          </a:ln>
-        </p:spPr>
-      </p:sp>
-      <p:sp>
-        <p:nvSpPr>
-          <p:cNvPr id="42" name="Text 38"/>
+          <a:ln/>
+        </p:spPr>
+      </p:sp>
+      <p:sp>
+        <p:nvSpPr>
+          <p:cNvPr id="41" name="Text 37"/>
           <p:cNvSpPr/>
           <p:nvPr/>
         </p:nvSpPr>
         <p:spPr>
           <a:xfrm>
             <a:off x="137160" y="4617720"/>
-            <a:ext cx="1920240" cy="347472"/>
-          </a:xfrm>
-          <a:prstGeom prst="rect">
-            <a:avLst/>
-          </a:prstGeom>
-          <a:noFill/>
-          <a:ln/>
-        </p:spPr>
-        <p:txBody>
-          <a:bodyPr wrap="square" lIns="0" tIns="0" rIns="0" bIns="0" rtlCol="0" anchor="ctr"/>
+            <a:ext cx="8869680" cy="347472"/>
+          </a:xfrm>
+          <a:prstGeom prst="rect">
+            <a:avLst/>
+          </a:prstGeom>
+          <a:noFill/>
+          <a:ln/>
+        </p:spPr>
+        <p:txBody>
+          <a:bodyPr wrap="square" rtlCol="0" anchor="ctr"/>
           <a:lstStyle/>
           <a:p>
             <a:pPr indent="0" marL="0">
               <a:buNone/>
             </a:pPr>
             <a:r>
-              <a:rPr lang="en-US" sz="800" b="1" dirty="0">
-                <a:solidFill>
-                  <a:srgbClr val="FFD282"/>
-                </a:solidFill>
-                <a:latin typeface="Calibri" pitchFamily="34" charset="0"/>
-                <a:ea typeface="Calibri" pitchFamily="34" charset="-122"/>
-                <a:cs typeface="Calibri" pitchFamily="34" charset="-120"/>
-              </a:rPr>
-              <a:t>Key Talking Points for SteerCo:</a:t>
-            </a:r>
-            <a:endParaRPr lang="en-US" sz="800" dirty="0"/>
-          </a:p>
-        </p:txBody>
-      </p:sp>
-      <p:sp>
-        <p:nvSpPr>
-          <p:cNvPr id="43" name="Text 39"/>
-          <p:cNvSpPr/>
-          <p:nvPr/>
-        </p:nvSpPr>
-        <p:spPr>
-          <a:xfrm>
-            <a:off x="2103120" y="4617720"/>
-            <a:ext cx="6903720" cy="347472"/>
-          </a:xfrm>
-          <a:prstGeom prst="rect">
-            <a:avLst/>
-          </a:prstGeom>
-          <a:noFill/>
-          <a:ln/>
-        </p:spPr>
-        <p:txBody>
-          <a:bodyPr wrap="square" lIns="0" tIns="0" rIns="0" bIns="0" rtlCol="0" anchor="ctr"/>
-          <a:lstStyle/>
-          <a:p>
-            <a:pPr indent="0" marL="0">
-              <a:buNone/>
-            </a:pPr>
-            <a:r>
               <a:rPr lang="en-US" sz="750" dirty="0">
                 <a:solidFill>
                   <a:srgbClr val="D0D7D7"/>
                 </a:solidFill>
-                <a:latin typeface="Calibri" pitchFamily="34" charset="0"/>
-                <a:ea typeface="Calibri" pitchFamily="34" charset="-122"/>
-                <a:cs typeface="Calibri" pitchFamily="34" charset="-120"/>
               </a:rPr>
               <a:t>Prerequisite for collections — sequence with Registration   ·   Installment plans = quick win in PI29   ·   No work started — PI28 kickoff required now</a:t>
             </a:r>
@@ -15085,12 +12534,7 @@
           <a:solidFill>
             <a:srgbClr val="123836"/>
           </a:solidFill>
-          <a:ln w="12700">
-            <a:solidFill>
-              <a:srgbClr val="123836"/>
-            </a:solidFill>
-            <a:prstDash val="solid"/>
-          </a:ln>
+          <a:ln/>
         </p:spPr>
       </p:sp>
       <p:sp>
@@ -15110,12 +12554,7 @@
           <a:solidFill>
             <a:srgbClr val="FF6359"/>
           </a:solidFill>
-          <a:ln w="12700">
-            <a:solidFill>
-              <a:srgbClr val="FF6359"/>
-            </a:solidFill>
-            <a:prstDash val="solid"/>
-          </a:ln>
+          <a:ln/>
         </p:spPr>
       </p:sp>
       <p:sp>
@@ -15136,7 +12575,7 @@
           <a:ln/>
         </p:spPr>
         <p:txBody>
-          <a:bodyPr wrap="square" lIns="0" tIns="0" rIns="0" bIns="0" rtlCol="0" anchor="ctr"/>
+          <a:bodyPr wrap="square" rtlCol="0" anchor="ctr"/>
           <a:lstStyle/>
           <a:p>
             <a:pPr indent="0" marL="0">
@@ -15175,7 +12614,7 @@
           <a:ln/>
         </p:spPr>
         <p:txBody>
-          <a:bodyPr wrap="square" lIns="0" tIns="0" rIns="0" bIns="0" rtlCol="0" anchor="ctr"/>
+          <a:bodyPr wrap="square" rtlCol="0" anchor="ctr"/>
           <a:lstStyle/>
           <a:p>
             <a:pPr indent="0" marL="0">
@@ -15214,7 +12653,7 @@
           <a:ln/>
         </p:spPr>
         <p:txBody>
-          <a:bodyPr wrap="square" lIns="0" tIns="0" rIns="0" bIns="0" rtlCol="0" anchor="ctr"/>
+          <a:bodyPr wrap="square" rtlCol="0" anchor="ctr"/>
           <a:lstStyle/>
           <a:p>
             <a:pPr algn="r" indent="0" marL="0">
@@ -15252,12 +12691,7 @@
           <a:solidFill>
             <a:srgbClr val="123836"/>
           </a:solidFill>
-          <a:ln w="12700">
-            <a:solidFill>
-              <a:srgbClr val="123836"/>
-            </a:solidFill>
-            <a:prstDash val="solid"/>
-          </a:ln>
+          <a:ln/>
         </p:spPr>
       </p:sp>
       <p:sp>
@@ -15278,7 +12712,7 @@
           <a:ln/>
         </p:spPr>
         <p:txBody>
-          <a:bodyPr wrap="square" lIns="0" tIns="0" rIns="0" bIns="0" rtlCol="0" anchor="ctr"/>
+          <a:bodyPr wrap="square" rtlCol="0" anchor="ctr"/>
           <a:lstStyle/>
           <a:p>
             <a:pPr indent="0" marL="0">
@@ -15317,7 +12751,7 @@
           <a:ln/>
         </p:spPr>
         <p:txBody>
-          <a:bodyPr wrap="square" lIns="0" tIns="0" rIns="0" bIns="0" rtlCol="0" anchor="ctr"/>
+          <a:bodyPr wrap="square" rtlCol="0" anchor="ctr"/>
           <a:lstStyle/>
           <a:p>
             <a:pPr algn="r" indent="0" marL="0">
@@ -15387,12 +12821,7 @@
           <a:solidFill>
             <a:srgbClr val="FF6359"/>
           </a:solidFill>
-          <a:ln w="12700">
-            <a:solidFill>
-              <a:srgbClr val="FF6359"/>
-            </a:solidFill>
-            <a:prstDash val="solid"/>
-          </a:ln>
+          <a:ln/>
         </p:spPr>
       </p:sp>
       <p:sp>
@@ -15413,7 +12842,7 @@
           <a:ln/>
         </p:spPr>
         <p:txBody>
-          <a:bodyPr wrap="square" lIns="0" tIns="0" rIns="0" bIns="0" rtlCol="0" anchor="ctr"/>
+          <a:bodyPr wrap="square" rtlCol="0" anchor="ctr"/>
           <a:lstStyle/>
           <a:p>
             <a:pPr indent="0" marL="0">
@@ -15424,9 +12853,6 @@
                 <a:solidFill>
                   <a:srgbClr val="123836"/>
                 </a:solidFill>
-                <a:latin typeface="Calibri" pitchFamily="34" charset="0"/>
-                <a:ea typeface="Calibri" pitchFamily="34" charset="-122"/>
-                <a:cs typeface="Calibri" pitchFamily="34" charset="-120"/>
               </a:rPr>
               <a:t>Exemptions</a:t>
             </a:r>
@@ -15451,12 +12877,7 @@
           <a:solidFill>
             <a:srgbClr val="123836"/>
           </a:solidFill>
-          <a:ln w="12700">
-            <a:solidFill>
-              <a:srgbClr val="1B5E52"/>
-            </a:solidFill>
-            <a:prstDash val="solid"/>
-          </a:ln>
+          <a:ln/>
         </p:spPr>
       </p:sp>
       <p:sp>
@@ -15477,7 +12898,7 @@
           <a:ln/>
         </p:spPr>
         <p:txBody>
-          <a:bodyPr wrap="square" lIns="0" tIns="0" rIns="0" bIns="0" rtlCol="0" anchor="b"/>
+          <a:bodyPr wrap="square" rtlCol="0" anchor="b"/>
           <a:lstStyle/>
           <a:p>
             <a:pPr algn="ctr" indent="0" marL="0">
@@ -15488,9 +12909,6 @@
                 <a:solidFill>
                   <a:srgbClr val="FFFFFF"/>
                 </a:solidFill>
-                <a:latin typeface="Calibri" pitchFamily="34" charset="0"/>
-                <a:ea typeface="Calibri" pitchFamily="34" charset="-122"/>
-                <a:cs typeface="Calibri" pitchFamily="34" charset="-120"/>
               </a:rPr>
               <a:t>~390H</a:t>
             </a:r>
@@ -15516,7 +12934,7 @@
           <a:ln/>
         </p:spPr>
         <p:txBody>
-          <a:bodyPr wrap="square" lIns="0" tIns="0" rIns="0" bIns="0" rtlCol="0" anchor="ctr"/>
+          <a:bodyPr wrap="square" rtlCol="0" anchor="ctr"/>
           <a:lstStyle/>
           <a:p>
             <a:pPr algn="ctr" indent="0" marL="0">
@@ -15527,9 +12945,6 @@
                 <a:solidFill>
                   <a:srgbClr val="FFD282"/>
                 </a:solidFill>
-                <a:latin typeface="Calibri" pitchFamily="34" charset="0"/>
-                <a:ea typeface="Calibri" pitchFamily="34" charset="-122"/>
-                <a:cs typeface="Calibri" pitchFamily="34" charset="-120"/>
               </a:rPr>
               <a:t>Effort</a:t>
             </a:r>
@@ -15554,12 +12969,7 @@
           <a:solidFill>
             <a:srgbClr val="123836"/>
           </a:solidFill>
-          <a:ln w="12700">
-            <a:solidFill>
-              <a:srgbClr val="1B5E52"/>
-            </a:solidFill>
-            <a:prstDash val="solid"/>
-          </a:ln>
+          <a:ln/>
         </p:spPr>
       </p:sp>
       <p:sp>
@@ -15580,7 +12990,7 @@
           <a:ln/>
         </p:spPr>
         <p:txBody>
-          <a:bodyPr wrap="square" lIns="0" tIns="0" rIns="0" bIns="0" rtlCol="0" anchor="b"/>
+          <a:bodyPr wrap="square" rtlCol="0" anchor="b"/>
           <a:lstStyle/>
           <a:p>
             <a:pPr algn="ctr" indent="0" marL="0">
@@ -15591,9 +13001,6 @@
                 <a:solidFill>
                   <a:srgbClr val="FFFFFF"/>
                 </a:solidFill>
-                <a:latin typeface="Calibri" pitchFamily="34" charset="0"/>
-                <a:ea typeface="Calibri" pitchFamily="34" charset="-122"/>
-                <a:cs typeface="Calibri" pitchFamily="34" charset="-120"/>
               </a:rPr>
               <a:t>1</a:t>
             </a:r>
@@ -15619,7 +13026,7 @@
           <a:ln/>
         </p:spPr>
         <p:txBody>
-          <a:bodyPr wrap="square" lIns="0" tIns="0" rIns="0" bIns="0" rtlCol="0" anchor="ctr"/>
+          <a:bodyPr wrap="square" rtlCol="0" anchor="ctr"/>
           <a:lstStyle/>
           <a:p>
             <a:pPr algn="ctr" indent="0" marL="0">
@@ -15630,9 +13037,6 @@
                 <a:solidFill>
                   <a:srgbClr val="FFD282"/>
                 </a:solidFill>
-                <a:latin typeface="Calibri" pitchFamily="34" charset="0"/>
-                <a:ea typeface="Calibri" pitchFamily="34" charset="-122"/>
-                <a:cs typeface="Calibri" pitchFamily="34" charset="-120"/>
               </a:rPr>
               <a:t>Features</a:t>
             </a:r>
@@ -15657,12 +13061,7 @@
           <a:solidFill>
             <a:srgbClr val="123836"/>
           </a:solidFill>
-          <a:ln w="12700">
-            <a:solidFill>
-              <a:srgbClr val="1B5E52"/>
-            </a:solidFill>
-            <a:prstDash val="solid"/>
-          </a:ln>
+          <a:ln/>
         </p:spPr>
       </p:sp>
       <p:sp>
@@ -15683,7 +13082,7 @@
           <a:ln/>
         </p:spPr>
         <p:txBody>
-          <a:bodyPr wrap="square" lIns="0" tIns="0" rIns="0" bIns="0" rtlCol="0" anchor="b"/>
+          <a:bodyPr wrap="square" rtlCol="0" anchor="b"/>
           <a:lstStyle/>
           <a:p>
             <a:pPr algn="ctr" indent="0" marL="0">
@@ -15694,9 +13093,6 @@
                 <a:solidFill>
                   <a:srgbClr val="FFFFFF"/>
                 </a:solidFill>
-                <a:latin typeface="Calibri" pitchFamily="34" charset="0"/>
-                <a:ea typeface="Calibri" pitchFamily="34" charset="-122"/>
-                <a:cs typeface="Calibri" pitchFamily="34" charset="-120"/>
               </a:rPr>
               <a:t>P2</a:t>
             </a:r>
@@ -15722,7 +13118,7 @@
           <a:ln/>
         </p:spPr>
         <p:txBody>
-          <a:bodyPr wrap="square" lIns="0" tIns="0" rIns="0" bIns="0" rtlCol="0" anchor="ctr"/>
+          <a:bodyPr wrap="square" rtlCol="0" anchor="ctr"/>
           <a:lstStyle/>
           <a:p>
             <a:pPr algn="ctr" indent="0" marL="0">
@@ -15733,9 +13129,6 @@
                 <a:solidFill>
                   <a:srgbClr val="FFD282"/>
                 </a:solidFill>
-                <a:latin typeface="Calibri" pitchFamily="34" charset="0"/>
-                <a:ea typeface="Calibri" pitchFamily="34" charset="-122"/>
-                <a:cs typeface="Calibri" pitchFamily="34" charset="-120"/>
               </a:rPr>
               <a:t>Priority</a:t>
             </a:r>
@@ -15760,12 +13153,7 @@
           <a:solidFill>
             <a:srgbClr val="123836"/>
           </a:solidFill>
-          <a:ln w="12700">
-            <a:solidFill>
-              <a:srgbClr val="1B5E52"/>
-            </a:solidFill>
-            <a:prstDash val="solid"/>
-          </a:ln>
+          <a:ln/>
         </p:spPr>
       </p:sp>
       <p:sp>
@@ -15786,7 +13174,7 @@
           <a:ln/>
         </p:spPr>
         <p:txBody>
-          <a:bodyPr wrap="square" lIns="0" tIns="0" rIns="0" bIns="0" rtlCol="0" anchor="b"/>
+          <a:bodyPr wrap="square" rtlCol="0" anchor="b"/>
           <a:lstStyle/>
           <a:p>
             <a:pPr algn="ctr" indent="0" marL="0">
@@ -15797,9 +13185,6 @@
                 <a:solidFill>
                   <a:srgbClr val="FFFFFF"/>
                 </a:solidFill>
-                <a:latin typeface="Calibri" pitchFamily="34" charset="0"/>
-                <a:ea typeface="Calibri" pitchFamily="34" charset="-122"/>
-                <a:cs typeface="Calibri" pitchFamily="34" charset="-120"/>
               </a:rPr>
               <a:t>PI28</a:t>
             </a:r>
@@ -15825,7 +13210,7 @@
           <a:ln/>
         </p:spPr>
         <p:txBody>
-          <a:bodyPr wrap="square" lIns="0" tIns="0" rIns="0" bIns="0" rtlCol="0" anchor="ctr"/>
+          <a:bodyPr wrap="square" rtlCol="0" anchor="ctr"/>
           <a:lstStyle/>
           <a:p>
             <a:pPr algn="ctr" indent="0" marL="0">
@@ -15836,11 +13221,8 @@
                 <a:solidFill>
                   <a:srgbClr val="FFD282"/>
                 </a:solidFill>
-                <a:latin typeface="Calibri" pitchFamily="34" charset="0"/>
-                <a:ea typeface="Calibri" pitchFamily="34" charset="-122"/>
-                <a:cs typeface="Calibri" pitchFamily="34" charset="-120"/>
-              </a:rPr>
-              <a:t>PI Window</a:t>
+              </a:rPr>
+              <a:t>PI</a:t>
             </a:r>
             <a:endParaRPr lang="en-US" sz="650" dirty="0"/>
           </a:p>
@@ -15864,7 +13246,7 @@
           <a:ln/>
         </p:spPr>
         <p:txBody>
-          <a:bodyPr wrap="square" lIns="0" tIns="0" rIns="0" bIns="0" rtlCol="0" anchor="ctr"/>
+          <a:bodyPr wrap="square" rtlCol="0" anchor="ctr"/>
           <a:lstStyle/>
           <a:p>
             <a:pPr indent="0" marL="0">
@@ -15875,9 +13257,6 @@
                 <a:solidFill>
                   <a:srgbClr val="FF6359"/>
                 </a:solidFill>
-                <a:latin typeface="Calibri" pitchFamily="34" charset="0"/>
-                <a:ea typeface="Calibri" pitchFamily="34" charset="-122"/>
-                <a:cs typeface="Calibri" pitchFamily="34" charset="-120"/>
               </a:rPr>
               <a:t>Scope</a:t>
             </a:r>
@@ -15903,7 +13282,7 @@
           <a:ln/>
         </p:spPr>
         <p:txBody>
-          <a:bodyPr wrap="square" lIns="0" tIns="0" rIns="0" bIns="0" rtlCol="0" anchor="ctr"/>
+          <a:bodyPr wrap="square" rtlCol="0" anchor="ctr"/>
           <a:lstStyle/>
           <a:p>
             <a:pPr indent="0" marL="0">
@@ -15914,9 +13293,6 @@
                 <a:solidFill>
                   <a:srgbClr val="141E1E"/>
                 </a:solidFill>
-                <a:latin typeface="Calibri" pitchFamily="34" charset="0"/>
-                <a:ea typeface="Calibri" pitchFamily="34" charset="-122"/>
-                <a:cs typeface="Calibri" pitchFamily="34" charset="-120"/>
               </a:rPr>
               <a:t>Manages the application, approval, and recording of tax exemptions for qualifying taxpayers or transactions. Ensures audit-traceable decisions and supports statutory compliance for exemption schemes.</a:t>
             </a:r>
@@ -15942,7 +13318,7 @@
           <a:ln/>
         </p:spPr>
         <p:txBody>
-          <a:bodyPr wrap="square" lIns="0" tIns="0" rIns="0" bIns="0" rtlCol="0" anchor="ctr"/>
+          <a:bodyPr wrap="square" rtlCol="0" anchor="ctr"/>
           <a:lstStyle/>
           <a:p>
             <a:pPr indent="0" marL="0">
@@ -15953,9 +13329,6 @@
                 <a:solidFill>
                   <a:srgbClr val="FF6359"/>
                 </a:solidFill>
-                <a:latin typeface="Calibri" pitchFamily="34" charset="0"/>
-                <a:ea typeface="Calibri" pitchFamily="34" charset="-122"/>
-                <a:cs typeface="Calibri" pitchFamily="34" charset="-120"/>
               </a:rPr>
               <a:t>Benefits</a:t>
             </a:r>
@@ -15993,9 +13366,6 @@
                 <a:solidFill>
                   <a:srgbClr val="4A5C5A"/>
                 </a:solidFill>
-                <a:latin typeface="Calibri" pitchFamily="34" charset="0"/>
-                <a:ea typeface="Calibri" pitchFamily="34" charset="-122"/>
-                <a:cs typeface="Calibri" pitchFamily="34" charset="-120"/>
               </a:rPr>
               <a:t>Reduces manual exemption handling and processing backlogs</a:t>
             </a:r>
@@ -16011,9 +13381,6 @@
                 <a:solidFill>
                   <a:srgbClr val="4A5C5A"/>
                 </a:solidFill>
-                <a:latin typeface="Calibri" pitchFamily="34" charset="0"/>
-                <a:ea typeface="Calibri" pitchFamily="34" charset="-122"/>
-                <a:cs typeface="Calibri" pitchFamily="34" charset="-120"/>
               </a:rPr>
               <a:t>Audit-ready exemption records reduce compliance risk</a:t>
             </a:r>
@@ -16029,9 +13396,6 @@
                 <a:solidFill>
                   <a:srgbClr val="4A5C5A"/>
                 </a:solidFill>
-                <a:latin typeface="Calibri" pitchFamily="34" charset="0"/>
-                <a:ea typeface="Calibri" pitchFamily="34" charset="-122"/>
-                <a:cs typeface="Calibri" pitchFamily="34" charset="-120"/>
               </a:rPr>
               <a:t>Configurable exemption rules support multiple tax types</a:t>
             </a:r>
@@ -16056,12 +13420,7 @@
           <a:solidFill>
             <a:srgbClr val="EEF3F2"/>
           </a:solidFill>
-          <a:ln w="12700">
-            <a:solidFill>
-              <a:srgbClr val="D0D7D7"/>
-            </a:solidFill>
-            <a:prstDash val="solid"/>
-          </a:ln>
+          <a:ln/>
         </p:spPr>
       </p:sp>
       <p:sp>
@@ -16082,7 +13441,7 @@
           <a:ln/>
         </p:spPr>
         <p:txBody>
-          <a:bodyPr wrap="square" lIns="0" tIns="0" rIns="0" bIns="0" rtlCol="0" anchor="ctr"/>
+          <a:bodyPr wrap="square" rtlCol="0" anchor="ctr"/>
           <a:lstStyle/>
           <a:p>
             <a:pPr indent="0" marL="0">
@@ -16093,9 +13452,6 @@
                 <a:solidFill>
                   <a:srgbClr val="123836"/>
                 </a:solidFill>
-                <a:latin typeface="Calibri" pitchFamily="34" charset="0"/>
-                <a:ea typeface="Calibri" pitchFamily="34" charset="-122"/>
-                <a:cs typeface="Calibri" pitchFamily="34" charset="-120"/>
               </a:rPr>
               <a:t>Small scope — good candidate for early delivery to demonstrate value to GRC stakeholders in PI28.</a:t>
             </a:r>
@@ -16152,12 +13508,7 @@
           <a:solidFill>
             <a:srgbClr val="FF6359"/>
           </a:solidFill>
-          <a:ln w="12700">
-            <a:solidFill>
-              <a:srgbClr val="FF6359"/>
-            </a:solidFill>
-            <a:prstDash val="solid"/>
-          </a:ln>
+          <a:ln/>
         </p:spPr>
       </p:sp>
       <p:sp>
@@ -16178,7 +13529,7 @@
           <a:ln/>
         </p:spPr>
         <p:txBody>
-          <a:bodyPr wrap="square" lIns="0" tIns="0" rIns="0" bIns="0" rtlCol="0" anchor="ctr"/>
+          <a:bodyPr wrap="square" rtlCol="0" anchor="ctr"/>
           <a:lstStyle/>
           <a:p>
             <a:pPr indent="0" marL="0">
@@ -16189,9 +13540,6 @@
                 <a:solidFill>
                   <a:srgbClr val="123836"/>
                 </a:solidFill>
-                <a:latin typeface="Calibri" pitchFamily="34" charset="0"/>
-                <a:ea typeface="Calibri" pitchFamily="34" charset="-122"/>
-                <a:cs typeface="Calibri" pitchFamily="34" charset="-120"/>
               </a:rPr>
               <a:t>Penalty &amp; Interest</a:t>
             </a:r>
@@ -16216,12 +13564,7 @@
           <a:solidFill>
             <a:srgbClr val="123836"/>
           </a:solidFill>
-          <a:ln w="12700">
-            <a:solidFill>
-              <a:srgbClr val="1B5E52"/>
-            </a:solidFill>
-            <a:prstDash val="solid"/>
-          </a:ln>
+          <a:ln/>
         </p:spPr>
       </p:sp>
       <p:sp>
@@ -16242,7 +13585,7 @@
           <a:ln/>
         </p:spPr>
         <p:txBody>
-          <a:bodyPr wrap="square" lIns="0" tIns="0" rIns="0" bIns="0" rtlCol="0" anchor="b"/>
+          <a:bodyPr wrap="square" rtlCol="0" anchor="b"/>
           <a:lstStyle/>
           <a:p>
             <a:pPr algn="ctr" indent="0" marL="0">
@@ -16253,9 +13596,6 @@
                 <a:solidFill>
                   <a:srgbClr val="FFFFFF"/>
                 </a:solidFill>
-                <a:latin typeface="Calibri" pitchFamily="34" charset="0"/>
-                <a:ea typeface="Calibri" pitchFamily="34" charset="-122"/>
-                <a:cs typeface="Calibri" pitchFamily="34" charset="-120"/>
               </a:rPr>
               <a:t>TBD</a:t>
             </a:r>
@@ -16281,7 +13621,7 @@
           <a:ln/>
         </p:spPr>
         <p:txBody>
-          <a:bodyPr wrap="square" lIns="0" tIns="0" rIns="0" bIns="0" rtlCol="0" anchor="ctr"/>
+          <a:bodyPr wrap="square" rtlCol="0" anchor="ctr"/>
           <a:lstStyle/>
           <a:p>
             <a:pPr algn="ctr" indent="0" marL="0">
@@ -16292,9 +13632,6 @@
                 <a:solidFill>
                   <a:srgbClr val="FFD282"/>
                 </a:solidFill>
-                <a:latin typeface="Calibri" pitchFamily="34" charset="0"/>
-                <a:ea typeface="Calibri" pitchFamily="34" charset="-122"/>
-                <a:cs typeface="Calibri" pitchFamily="34" charset="-120"/>
               </a:rPr>
               <a:t>Effort</a:t>
             </a:r>
@@ -16319,12 +13656,7 @@
           <a:solidFill>
             <a:srgbClr val="123836"/>
           </a:solidFill>
-          <a:ln w="12700">
-            <a:solidFill>
-              <a:srgbClr val="1B5E52"/>
-            </a:solidFill>
-            <a:prstDash val="solid"/>
-          </a:ln>
+          <a:ln/>
         </p:spPr>
       </p:sp>
       <p:sp>
@@ -16345,7 +13677,7 @@
           <a:ln/>
         </p:spPr>
         <p:txBody>
-          <a:bodyPr wrap="square" lIns="0" tIns="0" rIns="0" bIns="0" rtlCol="0" anchor="b"/>
+          <a:bodyPr wrap="square" rtlCol="0" anchor="b"/>
           <a:lstStyle/>
           <a:p>
             <a:pPr algn="ctr" indent="0" marL="0">
@@ -16356,9 +13688,6 @@
                 <a:solidFill>
                   <a:srgbClr val="FFFFFF"/>
                 </a:solidFill>
-                <a:latin typeface="Calibri" pitchFamily="34" charset="0"/>
-                <a:ea typeface="Calibri" pitchFamily="34" charset="-122"/>
-                <a:cs typeface="Calibri" pitchFamily="34" charset="-120"/>
               </a:rPr>
               <a:t>1</a:t>
             </a:r>
@@ -16384,7 +13713,7 @@
           <a:ln/>
         </p:spPr>
         <p:txBody>
-          <a:bodyPr wrap="square" lIns="0" tIns="0" rIns="0" bIns="0" rtlCol="0" anchor="ctr"/>
+          <a:bodyPr wrap="square" rtlCol="0" anchor="ctr"/>
           <a:lstStyle/>
           <a:p>
             <a:pPr algn="ctr" indent="0" marL="0">
@@ -16395,9 +13724,6 @@
                 <a:solidFill>
                   <a:srgbClr val="FFD282"/>
                 </a:solidFill>
-                <a:latin typeface="Calibri" pitchFamily="34" charset="0"/>
-                <a:ea typeface="Calibri" pitchFamily="34" charset="-122"/>
-                <a:cs typeface="Calibri" pitchFamily="34" charset="-120"/>
               </a:rPr>
               <a:t>Features</a:t>
             </a:r>
@@ -16422,12 +13748,7 @@
           <a:solidFill>
             <a:srgbClr val="123836"/>
           </a:solidFill>
-          <a:ln w="12700">
-            <a:solidFill>
-              <a:srgbClr val="1B5E52"/>
-            </a:solidFill>
-            <a:prstDash val="solid"/>
-          </a:ln>
+          <a:ln/>
         </p:spPr>
       </p:sp>
       <p:sp>
@@ -16448,7 +13769,7 @@
           <a:ln/>
         </p:spPr>
         <p:txBody>
-          <a:bodyPr wrap="square" lIns="0" tIns="0" rIns="0" bIns="0" rtlCol="0" anchor="b"/>
+          <a:bodyPr wrap="square" rtlCol="0" anchor="b"/>
           <a:lstStyle/>
           <a:p>
             <a:pPr algn="ctr" indent="0" marL="0">
@@ -16459,9 +13780,6 @@
                 <a:solidFill>
                   <a:srgbClr val="FFFFFF"/>
                 </a:solidFill>
-                <a:latin typeface="Calibri" pitchFamily="34" charset="0"/>
-                <a:ea typeface="Calibri" pitchFamily="34" charset="-122"/>
-                <a:cs typeface="Calibri" pitchFamily="34" charset="-120"/>
               </a:rPr>
               <a:t>P2</a:t>
             </a:r>
@@ -16487,7 +13805,7 @@
           <a:ln/>
         </p:spPr>
         <p:txBody>
-          <a:bodyPr wrap="square" lIns="0" tIns="0" rIns="0" bIns="0" rtlCol="0" anchor="ctr"/>
+          <a:bodyPr wrap="square" rtlCol="0" anchor="ctr"/>
           <a:lstStyle/>
           <a:p>
             <a:pPr algn="ctr" indent="0" marL="0">
@@ -16498,9 +13816,6 @@
                 <a:solidFill>
                   <a:srgbClr val="FFD282"/>
                 </a:solidFill>
-                <a:latin typeface="Calibri" pitchFamily="34" charset="0"/>
-                <a:ea typeface="Calibri" pitchFamily="34" charset="-122"/>
-                <a:cs typeface="Calibri" pitchFamily="34" charset="-120"/>
               </a:rPr>
               <a:t>Priority</a:t>
             </a:r>
@@ -16525,12 +13840,7 @@
           <a:solidFill>
             <a:srgbClr val="123836"/>
           </a:solidFill>
-          <a:ln w="12700">
-            <a:solidFill>
-              <a:srgbClr val="1B5E52"/>
-            </a:solidFill>
-            <a:prstDash val="solid"/>
-          </a:ln>
+          <a:ln/>
         </p:spPr>
       </p:sp>
       <p:sp>
@@ -16551,7 +13861,7 @@
           <a:ln/>
         </p:spPr>
         <p:txBody>
-          <a:bodyPr wrap="square" lIns="0" tIns="0" rIns="0" bIns="0" rtlCol="0" anchor="b"/>
+          <a:bodyPr wrap="square" rtlCol="0" anchor="b"/>
           <a:lstStyle/>
           <a:p>
             <a:pPr algn="ctr" indent="0" marL="0">
@@ -16562,9 +13872,6 @@
                 <a:solidFill>
                   <a:srgbClr val="FFFFFF"/>
                 </a:solidFill>
-                <a:latin typeface="Calibri" pitchFamily="34" charset="0"/>
-                <a:ea typeface="Calibri" pitchFamily="34" charset="-122"/>
-                <a:cs typeface="Calibri" pitchFamily="34" charset="-120"/>
               </a:rPr>
               <a:t>PI28–PI29</a:t>
             </a:r>
@@ -16590,7 +13897,7 @@
           <a:ln/>
         </p:spPr>
         <p:txBody>
-          <a:bodyPr wrap="square" lIns="0" tIns="0" rIns="0" bIns="0" rtlCol="0" anchor="ctr"/>
+          <a:bodyPr wrap="square" rtlCol="0" anchor="ctr"/>
           <a:lstStyle/>
           <a:p>
             <a:pPr algn="ctr" indent="0" marL="0">
@@ -16601,11 +13908,8 @@
                 <a:solidFill>
                   <a:srgbClr val="FFD282"/>
                 </a:solidFill>
-                <a:latin typeface="Calibri" pitchFamily="34" charset="0"/>
-                <a:ea typeface="Calibri" pitchFamily="34" charset="-122"/>
-                <a:cs typeface="Calibri" pitchFamily="34" charset="-120"/>
-              </a:rPr>
-              <a:t>PI Window</a:t>
+              </a:rPr>
+              <a:t>PI</a:t>
             </a:r>
             <a:endParaRPr lang="en-US" sz="650" dirty="0"/>
           </a:p>
@@ -16629,7 +13933,7 @@
           <a:ln/>
         </p:spPr>
         <p:txBody>
-          <a:bodyPr wrap="square" lIns="0" tIns="0" rIns="0" bIns="0" rtlCol="0" anchor="ctr"/>
+          <a:bodyPr wrap="square" rtlCol="0" anchor="ctr"/>
           <a:lstStyle/>
           <a:p>
             <a:pPr indent="0" marL="0">
@@ -16640,9 +13944,6 @@
                 <a:solidFill>
                   <a:srgbClr val="FF6359"/>
                 </a:solidFill>
-                <a:latin typeface="Calibri" pitchFamily="34" charset="0"/>
-                <a:ea typeface="Calibri" pitchFamily="34" charset="-122"/>
-                <a:cs typeface="Calibri" pitchFamily="34" charset="-120"/>
               </a:rPr>
               <a:t>Scope</a:t>
             </a:r>
@@ -16668,7 +13969,7 @@
           <a:ln/>
         </p:spPr>
         <p:txBody>
-          <a:bodyPr wrap="square" lIns="0" tIns="0" rIns="0" bIns="0" rtlCol="0" anchor="ctr"/>
+          <a:bodyPr wrap="square" rtlCol="0" anchor="ctr"/>
           <a:lstStyle/>
           <a:p>
             <a:pPr indent="0" marL="0">
@@ -16679,9 +13980,6 @@
                 <a:solidFill>
                   <a:srgbClr val="141E1E"/>
                 </a:solidFill>
-                <a:latin typeface="Calibri" pitchFamily="34" charset="0"/>
-                <a:ea typeface="Calibri" pitchFamily="34" charset="-122"/>
-                <a:cs typeface="Calibri" pitchFamily="34" charset="-120"/>
               </a:rPr>
               <a:t>Automates the calculation and application of statutory penalties and interest charges on overdue tax liabilities. Ensures accurate and consistent enforcement of late payment rules across all tax types.</a:t>
             </a:r>
@@ -16707,7 +14005,7 @@
           <a:ln/>
         </p:spPr>
         <p:txBody>
-          <a:bodyPr wrap="square" lIns="0" tIns="0" rIns="0" bIns="0" rtlCol="0" anchor="ctr"/>
+          <a:bodyPr wrap="square" rtlCol="0" anchor="ctr"/>
           <a:lstStyle/>
           <a:p>
             <a:pPr indent="0" marL="0">
@@ -16718,9 +14016,6 @@
                 <a:solidFill>
                   <a:srgbClr val="FF6359"/>
                 </a:solidFill>
-                <a:latin typeface="Calibri" pitchFamily="34" charset="0"/>
-                <a:ea typeface="Calibri" pitchFamily="34" charset="-122"/>
-                <a:cs typeface="Calibri" pitchFamily="34" charset="-120"/>
               </a:rPr>
               <a:t>Benefits</a:t>
             </a:r>
@@ -16758,9 +14053,6 @@
                 <a:solidFill>
                   <a:srgbClr val="4A5C5A"/>
                 </a:solidFill>
-                <a:latin typeface="Calibri" pitchFamily="34" charset="0"/>
-                <a:ea typeface="Calibri" pitchFamily="34" charset="-122"/>
-                <a:cs typeface="Calibri" pitchFamily="34" charset="-120"/>
               </a:rPr>
               <a:t>Automated calculations eliminate manual errors and officer inconsistency</a:t>
             </a:r>
@@ -16776,9 +14068,6 @@
                 <a:solidFill>
                   <a:srgbClr val="4A5C5A"/>
                 </a:solidFill>
-                <a:latin typeface="Calibri" pitchFamily="34" charset="0"/>
-                <a:ea typeface="Calibri" pitchFamily="34" charset="-122"/>
-                <a:cs typeface="Calibri" pitchFamily="34" charset="-120"/>
               </a:rPr>
               <a:t>Increases voluntary compliance by ensuring consistent enforcement</a:t>
             </a:r>
@@ -16794,9 +14083,6 @@
                 <a:solidFill>
                   <a:srgbClr val="4A5C5A"/>
                 </a:solidFill>
-                <a:latin typeface="Calibri" pitchFamily="34" charset="0"/>
-                <a:ea typeface="Calibri" pitchFamily="34" charset="-122"/>
-                <a:cs typeface="Calibri" pitchFamily="34" charset="-120"/>
               </a:rPr>
               <a:t>Supports configurable penalty schedules per tax type and jurisdiction</a:t>
             </a:r>
@@ -16821,12 +14107,7 @@
           <a:solidFill>
             <a:srgbClr val="EEF3F2"/>
           </a:solidFill>
-          <a:ln w="12700">
-            <a:solidFill>
-              <a:srgbClr val="D0D7D7"/>
-            </a:solidFill>
-            <a:prstDash val="solid"/>
-          </a:ln>
+          <a:ln/>
         </p:spPr>
       </p:sp>
       <p:sp>
@@ -16847,7 +14128,7 @@
           <a:ln/>
         </p:spPr>
         <p:txBody>
-          <a:bodyPr wrap="square" lIns="0" tIns="0" rIns="0" bIns="0" rtlCol="0" anchor="ctr"/>
+          <a:bodyPr wrap="square" rtlCol="0" anchor="ctr"/>
           <a:lstStyle/>
           <a:p>
             <a:pPr indent="0" marL="0">
@@ -16858,9 +14139,6 @@
                 <a:solidFill>
                   <a:srgbClr val="123836"/>
                 </a:solidFill>
-                <a:latin typeface="Calibri" pitchFamily="34" charset="0"/>
-                <a:ea typeface="Calibri" pitchFamily="34" charset="-122"/>
-                <a:cs typeface="Calibri" pitchFamily="34" charset="-120"/>
               </a:rPr>
               <a:t>Effort not yet estimated — scope clarification required before PI28 planning can be confirmed.</a:t>
             </a:r>
@@ -16917,12 +14195,7 @@
           <a:solidFill>
             <a:srgbClr val="FF6359"/>
           </a:solidFill>
-          <a:ln w="12700">
-            <a:solidFill>
-              <a:srgbClr val="FF6359"/>
-            </a:solidFill>
-            <a:prstDash val="solid"/>
-          </a:ln>
+          <a:ln/>
         </p:spPr>
       </p:sp>
       <p:sp>
@@ -16943,7 +14216,7 @@
           <a:ln/>
         </p:spPr>
         <p:txBody>
-          <a:bodyPr wrap="square" lIns="0" tIns="0" rIns="0" bIns="0" rtlCol="0" anchor="ctr"/>
+          <a:bodyPr wrap="square" rtlCol="0" anchor="ctr"/>
           <a:lstStyle/>
           <a:p>
             <a:pPr indent="0" marL="0">
@@ -16954,9 +14227,6 @@
                 <a:solidFill>
                   <a:srgbClr val="123836"/>
                 </a:solidFill>
-                <a:latin typeface="Calibri" pitchFamily="34" charset="0"/>
-                <a:ea typeface="Calibri" pitchFamily="34" charset="-122"/>
-                <a:cs typeface="Calibri" pitchFamily="34" charset="-120"/>
               </a:rPr>
               <a:t>Tax Accounts</a:t>
             </a:r>
@@ -16981,12 +14251,7 @@
           <a:solidFill>
             <a:srgbClr val="123836"/>
           </a:solidFill>
-          <a:ln w="12700">
-            <a:solidFill>
-              <a:srgbClr val="1B5E52"/>
-            </a:solidFill>
-            <a:prstDash val="solid"/>
-          </a:ln>
+          <a:ln/>
         </p:spPr>
       </p:sp>
       <p:sp>
@@ -17007,7 +14272,7 @@
           <a:ln/>
         </p:spPr>
         <p:txBody>
-          <a:bodyPr wrap="square" lIns="0" tIns="0" rIns="0" bIns="0" rtlCol="0" anchor="b"/>
+          <a:bodyPr wrap="square" rtlCol="0" anchor="b"/>
           <a:lstStyle/>
           <a:p>
             <a:pPr algn="ctr" indent="0" marL="0">
@@ -17018,9 +14283,6 @@
                 <a:solidFill>
                   <a:srgbClr val="FFFFFF"/>
                 </a:solidFill>
-                <a:latin typeface="Calibri" pitchFamily="34" charset="0"/>
-                <a:ea typeface="Calibri" pitchFamily="34" charset="-122"/>
-                <a:cs typeface="Calibri" pitchFamily="34" charset="-120"/>
               </a:rPr>
               <a:t>TBD</a:t>
             </a:r>
@@ -17046,7 +14308,7 @@
           <a:ln/>
         </p:spPr>
         <p:txBody>
-          <a:bodyPr wrap="square" lIns="0" tIns="0" rIns="0" bIns="0" rtlCol="0" anchor="ctr"/>
+          <a:bodyPr wrap="square" rtlCol="0" anchor="ctr"/>
           <a:lstStyle/>
           <a:p>
             <a:pPr algn="ctr" indent="0" marL="0">
@@ -17057,9 +14319,6 @@
                 <a:solidFill>
                   <a:srgbClr val="FFD282"/>
                 </a:solidFill>
-                <a:latin typeface="Calibri" pitchFamily="34" charset="0"/>
-                <a:ea typeface="Calibri" pitchFamily="34" charset="-122"/>
-                <a:cs typeface="Calibri" pitchFamily="34" charset="-120"/>
               </a:rPr>
               <a:t>Effort</a:t>
             </a:r>
@@ -17084,12 +14343,7 @@
           <a:solidFill>
             <a:srgbClr val="123836"/>
           </a:solidFill>
-          <a:ln w="12700">
-            <a:solidFill>
-              <a:srgbClr val="1B5E52"/>
-            </a:solidFill>
-            <a:prstDash val="solid"/>
-          </a:ln>
+          <a:ln/>
         </p:spPr>
       </p:sp>
       <p:sp>
@@ -17110,7 +14364,7 @@
           <a:ln/>
         </p:spPr>
         <p:txBody>
-          <a:bodyPr wrap="square" lIns="0" tIns="0" rIns="0" bIns="0" rtlCol="0" anchor="b"/>
+          <a:bodyPr wrap="square" rtlCol="0" anchor="b"/>
           <a:lstStyle/>
           <a:p>
             <a:pPr algn="ctr" indent="0" marL="0">
@@ -17121,9 +14375,6 @@
                 <a:solidFill>
                   <a:srgbClr val="FFFFFF"/>
                 </a:solidFill>
-                <a:latin typeface="Calibri" pitchFamily="34" charset="0"/>
-                <a:ea typeface="Calibri" pitchFamily="34" charset="-122"/>
-                <a:cs typeface="Calibri" pitchFamily="34" charset="-120"/>
               </a:rPr>
               <a:t>1</a:t>
             </a:r>
@@ -17149,7 +14400,7 @@
           <a:ln/>
         </p:spPr>
         <p:txBody>
-          <a:bodyPr wrap="square" lIns="0" tIns="0" rIns="0" bIns="0" rtlCol="0" anchor="ctr"/>
+          <a:bodyPr wrap="square" rtlCol="0" anchor="ctr"/>
           <a:lstStyle/>
           <a:p>
             <a:pPr algn="ctr" indent="0" marL="0">
@@ -17160,9 +14411,6 @@
                 <a:solidFill>
                   <a:srgbClr val="FFD282"/>
                 </a:solidFill>
-                <a:latin typeface="Calibri" pitchFamily="34" charset="0"/>
-                <a:ea typeface="Calibri" pitchFamily="34" charset="-122"/>
-                <a:cs typeface="Calibri" pitchFamily="34" charset="-120"/>
               </a:rPr>
               <a:t>Features</a:t>
             </a:r>
@@ -17187,12 +14435,7 @@
           <a:solidFill>
             <a:srgbClr val="123836"/>
           </a:solidFill>
-          <a:ln w="12700">
-            <a:solidFill>
-              <a:srgbClr val="1B5E52"/>
-            </a:solidFill>
-            <a:prstDash val="solid"/>
-          </a:ln>
+          <a:ln/>
         </p:spPr>
       </p:sp>
       <p:sp>
@@ -17213,7 +14456,7 @@
           <a:ln/>
         </p:spPr>
         <p:txBody>
-          <a:bodyPr wrap="square" lIns="0" tIns="0" rIns="0" bIns="0" rtlCol="0" anchor="b"/>
+          <a:bodyPr wrap="square" rtlCol="0" anchor="b"/>
           <a:lstStyle/>
           <a:p>
             <a:pPr algn="ctr" indent="0" marL="0">
@@ -17224,9 +14467,6 @@
                 <a:solidFill>
                   <a:srgbClr val="FFFFFF"/>
                 </a:solidFill>
-                <a:latin typeface="Calibri" pitchFamily="34" charset="0"/>
-                <a:ea typeface="Calibri" pitchFamily="34" charset="-122"/>
-                <a:cs typeface="Calibri" pitchFamily="34" charset="-120"/>
               </a:rPr>
               <a:t>P1</a:t>
             </a:r>
@@ -17252,7 +14492,7 @@
           <a:ln/>
         </p:spPr>
         <p:txBody>
-          <a:bodyPr wrap="square" lIns="0" tIns="0" rIns="0" bIns="0" rtlCol="0" anchor="ctr"/>
+          <a:bodyPr wrap="square" rtlCol="0" anchor="ctr"/>
           <a:lstStyle/>
           <a:p>
             <a:pPr algn="ctr" indent="0" marL="0">
@@ -17263,9 +14503,6 @@
                 <a:solidFill>
                   <a:srgbClr val="FFD282"/>
                 </a:solidFill>
-                <a:latin typeface="Calibri" pitchFamily="34" charset="0"/>
-                <a:ea typeface="Calibri" pitchFamily="34" charset="-122"/>
-                <a:cs typeface="Calibri" pitchFamily="34" charset="-120"/>
               </a:rPr>
               <a:t>Priority</a:t>
             </a:r>
@@ -17290,12 +14527,7 @@
           <a:solidFill>
             <a:srgbClr val="123836"/>
           </a:solidFill>
-          <a:ln w="12700">
-            <a:solidFill>
-              <a:srgbClr val="1B5E52"/>
-            </a:solidFill>
-            <a:prstDash val="solid"/>
-          </a:ln>
+          <a:ln/>
         </p:spPr>
       </p:sp>
       <p:sp>
@@ -17316,7 +14548,7 @@
           <a:ln/>
         </p:spPr>
         <p:txBody>
-          <a:bodyPr wrap="square" lIns="0" tIns="0" rIns="0" bIns="0" rtlCol="0" anchor="b"/>
+          <a:bodyPr wrap="square" rtlCol="0" anchor="b"/>
           <a:lstStyle/>
           <a:p>
             <a:pPr algn="ctr" indent="0" marL="0">
@@ -17327,9 +14559,6 @@
                 <a:solidFill>
                   <a:srgbClr val="FFFFFF"/>
                 </a:solidFill>
-                <a:latin typeface="Calibri" pitchFamily="34" charset="0"/>
-                <a:ea typeface="Calibri" pitchFamily="34" charset="-122"/>
-                <a:cs typeface="Calibri" pitchFamily="34" charset="-120"/>
               </a:rPr>
               <a:t>PI28–PI29</a:t>
             </a:r>
@@ -17355,7 +14584,7 @@
           <a:ln/>
         </p:spPr>
         <p:txBody>
-          <a:bodyPr wrap="square" lIns="0" tIns="0" rIns="0" bIns="0" rtlCol="0" anchor="ctr"/>
+          <a:bodyPr wrap="square" rtlCol="0" anchor="ctr"/>
           <a:lstStyle/>
           <a:p>
             <a:pPr algn="ctr" indent="0" marL="0">
@@ -17366,11 +14595,8 @@
                 <a:solidFill>
                   <a:srgbClr val="FFD282"/>
                 </a:solidFill>
-                <a:latin typeface="Calibri" pitchFamily="34" charset="0"/>
-                <a:ea typeface="Calibri" pitchFamily="34" charset="-122"/>
-                <a:cs typeface="Calibri" pitchFamily="34" charset="-120"/>
-              </a:rPr>
-              <a:t>PI Window</a:t>
+              </a:rPr>
+              <a:t>PI</a:t>
             </a:r>
             <a:endParaRPr lang="en-US" sz="650" dirty="0"/>
           </a:p>
@@ -17394,7 +14620,7 @@
           <a:ln/>
         </p:spPr>
         <p:txBody>
-          <a:bodyPr wrap="square" lIns="0" tIns="0" rIns="0" bIns="0" rtlCol="0" anchor="ctr"/>
+          <a:bodyPr wrap="square" rtlCol="0" anchor="ctr"/>
           <a:lstStyle/>
           <a:p>
             <a:pPr indent="0" marL="0">
@@ -17405,9 +14631,6 @@
                 <a:solidFill>
                   <a:srgbClr val="FF6359"/>
                 </a:solidFill>
-                <a:latin typeface="Calibri" pitchFamily="34" charset="0"/>
-                <a:ea typeface="Calibri" pitchFamily="34" charset="-122"/>
-                <a:cs typeface="Calibri" pitchFamily="34" charset="-120"/>
               </a:rPr>
               <a:t>Scope</a:t>
             </a:r>
@@ -17433,7 +14656,7 @@
           <a:ln/>
         </p:spPr>
         <p:txBody>
-          <a:bodyPr wrap="square" lIns="0" tIns="0" rIns="0" bIns="0" rtlCol="0" anchor="ctr"/>
+          <a:bodyPr wrap="square" rtlCol="0" anchor="ctr"/>
           <a:lstStyle/>
           <a:p>
             <a:pPr indent="0" marL="0">
@@ -17444,9 +14667,6 @@
                 <a:solidFill>
                   <a:srgbClr val="141E1E"/>
                 </a:solidFill>
-                <a:latin typeface="Calibri" pitchFamily="34" charset="0"/>
-                <a:ea typeface="Calibri" pitchFamily="34" charset="-122"/>
-                <a:cs typeface="Calibri" pitchFamily="34" charset="-120"/>
               </a:rPr>
               <a:t>Provides a structured account management layer for individual tax obligations, enabling authorities to track, manage, and report on each taxpayer's account position across multiple tax types and periods.</a:t>
             </a:r>
@@ -17472,7 +14692,7 @@
           <a:ln/>
         </p:spPr>
         <p:txBody>
-          <a:bodyPr wrap="square" lIns="0" tIns="0" rIns="0" bIns="0" rtlCol="0" anchor="ctr"/>
+          <a:bodyPr wrap="square" rtlCol="0" anchor="ctr"/>
           <a:lstStyle/>
           <a:p>
             <a:pPr indent="0" marL="0">
@@ -17483,9 +14703,6 @@
                 <a:solidFill>
                   <a:srgbClr val="FF6359"/>
                 </a:solidFill>
-                <a:latin typeface="Calibri" pitchFamily="34" charset="0"/>
-                <a:ea typeface="Calibri" pitchFamily="34" charset="-122"/>
-                <a:cs typeface="Calibri" pitchFamily="34" charset="-120"/>
               </a:rPr>
               <a:t>Benefits</a:t>
             </a:r>
@@ -17523,9 +14740,6 @@
                 <a:solidFill>
                   <a:srgbClr val="4A5C5A"/>
                 </a:solidFill>
-                <a:latin typeface="Calibri" pitchFamily="34" charset="0"/>
-                <a:ea typeface="Calibri" pitchFamily="34" charset="-122"/>
-                <a:cs typeface="Calibri" pitchFamily="34" charset="-120"/>
               </a:rPr>
               <a:t>Unified account view simplifies officer case management and reduces error rates</a:t>
             </a:r>
@@ -17541,9 +14755,6 @@
                 <a:solidFill>
                   <a:srgbClr val="4A5C5A"/>
                 </a:solidFill>
-                <a:latin typeface="Calibri" pitchFamily="34" charset="0"/>
-                <a:ea typeface="Calibri" pitchFamily="34" charset="-122"/>
-                <a:cs typeface="Calibri" pitchFamily="34" charset="-120"/>
               </a:rPr>
               <a:t>Supports multi-period and multi-tax-type account tracking in a single view</a:t>
             </a:r>
@@ -17559,9 +14770,6 @@
                 <a:solidFill>
                   <a:srgbClr val="4A5C5A"/>
                 </a:solidFill>
-                <a:latin typeface="Calibri" pitchFamily="34" charset="0"/>
-                <a:ea typeface="Calibri" pitchFamily="34" charset="-122"/>
-                <a:cs typeface="Calibri" pitchFamily="34" charset="-120"/>
               </a:rPr>
               <a:t>Foundation for advanced debt management and compliance analytics</a:t>
             </a:r>
@@ -17586,12 +14794,7 @@
           <a:solidFill>
             <a:srgbClr val="EEF3F2"/>
           </a:solidFill>
-          <a:ln w="12700">
-            <a:solidFill>
-              <a:srgbClr val="D0D7D7"/>
-            </a:solidFill>
-            <a:prstDash val="solid"/>
-          </a:ln>
+          <a:ln/>
         </p:spPr>
       </p:sp>
       <p:sp>
@@ -17612,7 +14815,7 @@
           <a:ln/>
         </p:spPr>
         <p:txBody>
-          <a:bodyPr wrap="square" lIns="0" tIns="0" rIns="0" bIns="0" rtlCol="0" anchor="ctr"/>
+          <a:bodyPr wrap="square" rtlCol="0" anchor="ctr"/>
           <a:lstStyle/>
           <a:p>
             <a:pPr indent="0" marL="0">
@@ -17623,9 +14826,6 @@
                 <a:solidFill>
                   <a:srgbClr val="123836"/>
                 </a:solidFill>
-                <a:latin typeface="Calibri" pitchFamily="34" charset="0"/>
-                <a:ea typeface="Calibri" pitchFamily="34" charset="-122"/>
-                <a:cs typeface="Calibri" pitchFamily="34" charset="-120"/>
               </a:rPr>
               <a:t>P1 priority but effort TBD — requires immediate scoping to avoid PI28 planning risk.</a:t>
             </a:r>
@@ -17682,12 +14882,7 @@
           <a:solidFill>
             <a:srgbClr val="FF6359"/>
           </a:solidFill>
-          <a:ln w="12700">
-            <a:solidFill>
-              <a:srgbClr val="FF6359"/>
-            </a:solidFill>
-            <a:prstDash val="solid"/>
-          </a:ln>
+          <a:ln/>
         </p:spPr>
       </p:sp>
       <p:sp>
@@ -17707,12 +14902,7 @@
           <a:solidFill>
             <a:srgbClr val="0A2422"/>
           </a:solidFill>
-          <a:ln w="12700">
-            <a:solidFill>
-              <a:srgbClr val="0A2422"/>
-            </a:solidFill>
-            <a:prstDash val="solid"/>
-          </a:ln>
+          <a:ln/>
         </p:spPr>
       </p:sp>
       <p:sp>
@@ -17733,7 +14923,7 @@
           <a:ln/>
         </p:spPr>
         <p:txBody>
-          <a:bodyPr wrap="square" lIns="0" tIns="0" rIns="0" bIns="0" rtlCol="0" anchor="ctr"/>
+          <a:bodyPr wrap="square" rtlCol="0" anchor="ctr"/>
           <a:lstStyle/>
           <a:p>
             <a:pPr indent="0" marL="0">
@@ -17744,9 +14934,6 @@
                 <a:solidFill>
                   <a:srgbClr val="FFFFFF"/>
                 </a:solidFill>
-                <a:latin typeface="Calibri" pitchFamily="34" charset="0"/>
-                <a:ea typeface="Calibri" pitchFamily="34" charset="-122"/>
-                <a:cs typeface="Calibri" pitchFamily="34" charset="-120"/>
               </a:rPr>
               <a:t>Next Steps &amp; Decision Points</a:t>
             </a:r>
@@ -17772,7 +14959,7 @@
           <a:ln/>
         </p:spPr>
         <p:txBody>
-          <a:bodyPr wrap="square" lIns="0" tIns="0" rIns="0" bIns="0" rtlCol="0" anchor="ctr"/>
+          <a:bodyPr wrap="square" rtlCol="0" anchor="ctr"/>
           <a:lstStyle/>
           <a:p>
             <a:pPr indent="0" marL="0">
@@ -17783,9 +14970,6 @@
                 <a:solidFill>
                   <a:srgbClr val="73AA87"/>
                 </a:solidFill>
-                <a:latin typeface="Calibri" pitchFamily="34" charset="0"/>
-                <a:ea typeface="Calibri" pitchFamily="34" charset="-122"/>
-                <a:cs typeface="Calibri" pitchFamily="34" charset="-120"/>
               </a:rPr>
               <a:t>Solon Tax Product Roadmap 2026 | SteerCo Session — 29 April 2026</a:t>
             </a:r>
@@ -17810,12 +14994,7 @@
           <a:solidFill>
             <a:srgbClr val="1B5E52"/>
           </a:solidFill>
-          <a:ln w="12700">
-            <a:solidFill>
-              <a:srgbClr val="1E4A44"/>
-            </a:solidFill>
-            <a:prstDash val="solid"/>
-          </a:ln>
+          <a:ln/>
         </p:spPr>
       </p:sp>
       <p:sp>
@@ -17835,12 +15014,7 @@
           <a:solidFill>
             <a:srgbClr val="FFD282"/>
           </a:solidFill>
-          <a:ln w="12700">
-            <a:solidFill>
-              <a:srgbClr val="FFD282"/>
-            </a:solidFill>
-            <a:prstDash val="solid"/>
-          </a:ln>
+          <a:ln/>
         </p:spPr>
       </p:sp>
       <p:sp>
@@ -17861,7 +15035,7 @@
           <a:ln/>
         </p:spPr>
         <p:txBody>
-          <a:bodyPr wrap="square" lIns="0" tIns="0" rIns="0" bIns="0" rtlCol="0" anchor="ctr"/>
+          <a:bodyPr wrap="square" rtlCol="0" anchor="ctr"/>
           <a:lstStyle/>
           <a:p>
             <a:pPr indent="0" marL="0">
@@ -17872,9 +15046,6 @@
                 <a:solidFill>
                   <a:srgbClr val="FFD282"/>
                 </a:solidFill>
-                <a:latin typeface="Calibri" pitchFamily="34" charset="0"/>
-                <a:ea typeface="Calibri" pitchFamily="34" charset="-122"/>
-                <a:cs typeface="Calibri" pitchFamily="34" charset="-120"/>
               </a:rPr>
               <a:t>01</a:t>
             </a:r>
@@ -17900,9 +15071,7 @@
           <a:ln/>
         </p:spPr>
         <p:txBody>
-          <a:bodyPr wrap="square" lIns="0" tIns="0" rIns="0" bIns="0" rtlCol="0" anchor="ctr">
-            <a:normAutofit/>
-          </a:bodyPr>
+          <a:bodyPr wrap="square" rtlCol="0" anchor="ctr"/>
           <a:lstStyle/>
           <a:p>
             <a:pPr indent="0" marL="0">
@@ -17913,9 +15082,6 @@
                 <a:solidFill>
                   <a:srgbClr val="FFFFFF"/>
                 </a:solidFill>
-                <a:latin typeface="Calibri" pitchFamily="34" charset="0"/>
-                <a:ea typeface="Calibri" pitchFamily="34" charset="-122"/>
-                <a:cs typeface="Calibri" pitchFamily="34" charset="-120"/>
               </a:rPr>
               <a:t>Confirm PI28 Capacity</a:t>
             </a:r>
@@ -17941,7 +15107,7 @@
           <a:ln/>
         </p:spPr>
         <p:txBody>
-          <a:bodyPr wrap="square" lIns="0" tIns="0" rIns="0" bIns="0" rtlCol="0" anchor="ctr"/>
+          <a:bodyPr wrap="square" rtlCol="0" anchor="ctr"/>
           <a:lstStyle/>
           <a:p>
             <a:pPr indent="0" marL="0">
@@ -17952,9 +15118,6 @@
                 <a:solidFill>
                   <a:srgbClr val="D0D7D7"/>
                 </a:solidFill>
-                <a:latin typeface="Calibri" pitchFamily="34" charset="0"/>
-                <a:ea typeface="Calibri" pitchFamily="34" charset="-122"/>
-                <a:cs typeface="Calibri" pitchFamily="34" charset="-120"/>
               </a:rPr>
               <a:t>Validate delivery team capacity for Registration, Taxpayer Accounting, and Billing features planned in PI28. Flag any resource constraints to product leadership.</a:t>
             </a:r>
@@ -17979,12 +15142,7 @@
           <a:solidFill>
             <a:srgbClr val="1B5E52"/>
           </a:solidFill>
-          <a:ln w="12700">
-            <a:solidFill>
-              <a:srgbClr val="1E4A44"/>
-            </a:solidFill>
-            <a:prstDash val="solid"/>
-          </a:ln>
+          <a:ln/>
         </p:spPr>
       </p:sp>
       <p:sp>
@@ -18004,12 +15162,7 @@
           <a:solidFill>
             <a:srgbClr val="FFD282"/>
           </a:solidFill>
-          <a:ln w="12700">
-            <a:solidFill>
-              <a:srgbClr val="FFD282"/>
-            </a:solidFill>
-            <a:prstDash val="solid"/>
-          </a:ln>
+          <a:ln/>
         </p:spPr>
       </p:sp>
       <p:sp>
@@ -18030,7 +15183,7 @@
           <a:ln/>
         </p:spPr>
         <p:txBody>
-          <a:bodyPr wrap="square" lIns="0" tIns="0" rIns="0" bIns="0" rtlCol="0" anchor="ctr"/>
+          <a:bodyPr wrap="square" rtlCol="0" anchor="ctr"/>
           <a:lstStyle/>
           <a:p>
             <a:pPr indent="0" marL="0">
@@ -18041,9 +15194,6 @@
                 <a:solidFill>
                   <a:srgbClr val="FFD282"/>
                 </a:solidFill>
-                <a:latin typeface="Calibri" pitchFamily="34" charset="0"/>
-                <a:ea typeface="Calibri" pitchFamily="34" charset="-122"/>
-                <a:cs typeface="Calibri" pitchFamily="34" charset="-120"/>
               </a:rPr>
               <a:t>02</a:t>
             </a:r>
@@ -18069,9 +15219,7 @@
           <a:ln/>
         </p:spPr>
         <p:txBody>
-          <a:bodyPr wrap="square" lIns="0" tIns="0" rIns="0" bIns="0" rtlCol="0" anchor="ctr">
-            <a:normAutofit/>
-          </a:bodyPr>
+          <a:bodyPr wrap="square" rtlCol="0" anchor="ctr"/>
           <a:lstStyle/>
           <a:p>
             <a:pPr indent="0" marL="0">
@@ -18082,9 +15230,6 @@
                 <a:solidFill>
                   <a:srgbClr val="FFFFFF"/>
                 </a:solidFill>
-                <a:latin typeface="Calibri" pitchFamily="34" charset="0"/>
-                <a:ea typeface="Calibri" pitchFamily="34" charset="-122"/>
-                <a:cs typeface="Calibri" pitchFamily="34" charset="-120"/>
               </a:rPr>
               <a:t>Estimate Penalty &amp; Interest + Tax Accounts</a:t>
             </a:r>
@@ -18110,7 +15255,7 @@
           <a:ln/>
         </p:spPr>
         <p:txBody>
-          <a:bodyPr wrap="square" lIns="0" tIns="0" rIns="0" bIns="0" rtlCol="0" anchor="ctr"/>
+          <a:bodyPr wrap="square" rtlCol="0" anchor="ctr"/>
           <a:lstStyle/>
           <a:p>
             <a:pPr indent="0" marL="0">
@@ -18121,9 +15266,6 @@
                 <a:solidFill>
                   <a:srgbClr val="D0D7D7"/>
                 </a:solidFill>
-                <a:latin typeface="Calibri" pitchFamily="34" charset="0"/>
-                <a:ea typeface="Calibri" pitchFamily="34" charset="-122"/>
-                <a:cs typeface="Calibri" pitchFamily="34" charset="-120"/>
               </a:rPr>
               <a:t>Both initiatives are P1/P2 with TBD effort estimates. Scope clarification sessions must be scheduled before PI28 planning begins.</a:t>
             </a:r>
@@ -18148,12 +15290,7 @@
           <a:solidFill>
             <a:srgbClr val="1B5E52"/>
           </a:solidFill>
-          <a:ln w="12700">
-            <a:solidFill>
-              <a:srgbClr val="1E4A44"/>
-            </a:solidFill>
-            <a:prstDash val="solid"/>
-          </a:ln>
+          <a:ln/>
         </p:spPr>
       </p:sp>
       <p:sp>
@@ -18173,12 +15310,7 @@
           <a:solidFill>
             <a:srgbClr val="FFD282"/>
           </a:solidFill>
-          <a:ln w="12700">
-            <a:solidFill>
-              <a:srgbClr val="FFD282"/>
-            </a:solidFill>
-            <a:prstDash val="solid"/>
-          </a:ln>
+          <a:ln/>
         </p:spPr>
       </p:sp>
       <p:sp>
@@ -18199,7 +15331,7 @@
           <a:ln/>
         </p:spPr>
         <p:txBody>
-          <a:bodyPr wrap="square" lIns="0" tIns="0" rIns="0" bIns="0" rtlCol="0" anchor="ctr"/>
+          <a:bodyPr wrap="square" rtlCol="0" anchor="ctr"/>
           <a:lstStyle/>
           <a:p>
             <a:pPr indent="0" marL="0">
@@ -18210,9 +15342,6 @@
                 <a:solidFill>
                   <a:srgbClr val="FFD282"/>
                 </a:solidFill>
-                <a:latin typeface="Calibri" pitchFamily="34" charset="0"/>
-                <a:ea typeface="Calibri" pitchFamily="34" charset="-122"/>
-                <a:cs typeface="Calibri" pitchFamily="34" charset="-120"/>
               </a:rPr>
               <a:t>03</a:t>
             </a:r>
@@ -18238,9 +15367,7 @@
           <a:ln/>
         </p:spPr>
         <p:txBody>
-          <a:bodyPr wrap="square" lIns="0" tIns="0" rIns="0" bIns="0" rtlCol="0" anchor="ctr">
-            <a:normAutofit/>
-          </a:bodyPr>
+          <a:bodyPr wrap="square" rtlCol="0" anchor="ctr"/>
           <a:lstStyle/>
           <a:p>
             <a:pPr indent="0" marL="0">
@@ -18251,9 +15378,6 @@
                 <a:solidFill>
                   <a:srgbClr val="FFFFFF"/>
                 </a:solidFill>
-                <a:latin typeface="Calibri" pitchFamily="34" charset="0"/>
-                <a:ea typeface="Calibri" pitchFamily="34" charset="-122"/>
-                <a:cs typeface="Calibri" pitchFamily="34" charset="-120"/>
               </a:rPr>
               <a:t>Approve PI29 Scope for Registration</a:t>
             </a:r>
@@ -18279,7 +15403,7 @@
           <a:ln/>
         </p:spPr>
         <p:txBody>
-          <a:bodyPr wrap="square" lIns="0" tIns="0" rIns="0" bIns="0" rtlCol="0" anchor="ctr"/>
+          <a:bodyPr wrap="square" rtlCol="0" anchor="ctr"/>
           <a:lstStyle/>
           <a:p>
             <a:pPr indent="0" marL="0">
@@ -18290,9 +15414,6 @@
                 <a:solidFill>
                   <a:srgbClr val="D0D7D7"/>
                 </a:solidFill>
-                <a:latin typeface="Calibri" pitchFamily="34" charset="0"/>
-                <a:ea typeface="Calibri" pitchFamily="34" charset="-122"/>
-                <a:cs typeface="Calibri" pitchFamily="34" charset="-120"/>
               </a:rPr>
               <a:t>Organisational Hierarchy View feature requires SteerCo alignment on priority and GRC team availability for PI29 delivery confirmation.</a:t>
             </a:r>
@@ -18317,12 +15438,7 @@
           <a:solidFill>
             <a:srgbClr val="1B5E52"/>
           </a:solidFill>
-          <a:ln w="12700">
-            <a:solidFill>
-              <a:srgbClr val="1E4A44"/>
-            </a:solidFill>
-            <a:prstDash val="solid"/>
-          </a:ln>
+          <a:ln/>
         </p:spPr>
       </p:sp>
       <p:sp>
@@ -18342,12 +15458,7 @@
           <a:solidFill>
             <a:srgbClr val="FFD282"/>
           </a:solidFill>
-          <a:ln w="12700">
-            <a:solidFill>
-              <a:srgbClr val="FFD282"/>
-            </a:solidFill>
-            <a:prstDash val="solid"/>
-          </a:ln>
+          <a:ln/>
         </p:spPr>
       </p:sp>
       <p:sp>
@@ -18368,7 +15479,7 @@
           <a:ln/>
         </p:spPr>
         <p:txBody>
-          <a:bodyPr wrap="square" lIns="0" tIns="0" rIns="0" bIns="0" rtlCol="0" anchor="ctr"/>
+          <a:bodyPr wrap="square" rtlCol="0" anchor="ctr"/>
           <a:lstStyle/>
           <a:p>
             <a:pPr indent="0" marL="0">
@@ -18379,9 +15490,6 @@
                 <a:solidFill>
                   <a:srgbClr val="FFD282"/>
                 </a:solidFill>
-                <a:latin typeface="Calibri" pitchFamily="34" charset="0"/>
-                <a:ea typeface="Calibri" pitchFamily="34" charset="-122"/>
-                <a:cs typeface="Calibri" pitchFamily="34" charset="-120"/>
               </a:rPr>
               <a:t>04</a:t>
             </a:r>
@@ -18407,9 +15515,7 @@
           <a:ln/>
         </p:spPr>
         <p:txBody>
-          <a:bodyPr wrap="square" lIns="0" tIns="0" rIns="0" bIns="0" rtlCol="0" anchor="ctr">
-            <a:normAutofit/>
-          </a:bodyPr>
+          <a:bodyPr wrap="square" rtlCol="0" anchor="ctr"/>
           <a:lstStyle/>
           <a:p>
             <a:pPr indent="0" marL="0">
@@ -18420,9 +15526,6 @@
                 <a:solidFill>
                   <a:srgbClr val="FFFFFF"/>
                 </a:solidFill>
-                <a:latin typeface="Calibri" pitchFamily="34" charset="0"/>
-                <a:ea typeface="Calibri" pitchFamily="34" charset="-122"/>
-                <a:cs typeface="Calibri" pitchFamily="34" charset="-120"/>
               </a:rPr>
               <a:t>Advance Exemptions as Quick Win</a:t>
             </a:r>
@@ -18448,7 +15551,7 @@
           <a:ln/>
         </p:spPr>
         <p:txBody>
-          <a:bodyPr wrap="square" lIns="0" tIns="0" rIns="0" bIns="0" rtlCol="0" anchor="ctr"/>
+          <a:bodyPr wrap="square" rtlCol="0" anchor="ctr"/>
           <a:lstStyle/>
           <a:p>
             <a:pPr indent="0" marL="0">
@@ -18459,50 +15562,8 @@
                 <a:solidFill>
                   <a:srgbClr val="D0D7D7"/>
                 </a:solidFill>
-                <a:latin typeface="Calibri" pitchFamily="34" charset="0"/>
-                <a:ea typeface="Calibri" pitchFamily="34" charset="-122"/>
-                <a:cs typeface="Calibri" pitchFamily="34" charset="-120"/>
               </a:rPr>
               <a:t>Small scope, P2 initiative with clear value. Recommend advancing delivery to PI28 to demonstrate early value to Greek Project stakeholders.</a:t>
-            </a:r>
-            <a:endParaRPr lang="en-US" sz="900" dirty="0"/>
-          </a:p>
-        </p:txBody>
-      </p:sp>
-      <p:sp>
-        <p:nvSpPr>
-          <p:cNvPr id="26" name="Text 24"/>
-          <p:cNvSpPr/>
-          <p:nvPr/>
-        </p:nvSpPr>
-        <p:spPr>
-          <a:xfrm>
-            <a:off x="320040" y="4480560"/>
-            <a:ext cx="8503920" cy="274320"/>
-          </a:xfrm>
-          <a:prstGeom prst="rect">
-            <a:avLst/>
-          </a:prstGeom>
-          <a:noFill/>
-          <a:ln/>
-        </p:spPr>
-        <p:txBody>
-          <a:bodyPr wrap="square" lIns="0" tIns="0" rIns="0" bIns="0" rtlCol="0" anchor="ctr"/>
-          <a:lstStyle/>
-          <a:p>
-            <a:pPr algn="ctr" indent="0" marL="0">
-              <a:buNone/>
-            </a:pPr>
-            <a:r>
-              <a:rPr lang="en-US" sz="900" dirty="0">
-                <a:solidFill>
-                  <a:srgbClr val="718886"/>
-                </a:solidFill>
-                <a:latin typeface="Calibri" pitchFamily="34" charset="0"/>
-                <a:ea typeface="Calibri" pitchFamily="34" charset="-122"/>
-                <a:cs typeface="Calibri" pitchFamily="34" charset="-120"/>
-              </a:rPr>
-              <a:t>Netcompany | netcompany.com</a:t>
             </a:r>
             <a:endParaRPr lang="en-US" sz="900" dirty="0"/>
           </a:p>
